--- a/기획/SRPG/Srpg 기획서.pptx
+++ b/기획/SRPG/Srpg 기획서.pptx
@@ -17,10 +17,10 @@
     <p:sldId id="404" r:id="rId5"/>
     <p:sldId id="408" r:id="rId6"/>
     <p:sldId id="405" r:id="rId7"/>
-    <p:sldId id="406" r:id="rId8"/>
-    <p:sldId id="410" r:id="rId9"/>
-    <p:sldId id="407" r:id="rId10"/>
-    <p:sldId id="409" r:id="rId11"/>
+    <p:sldId id="410" r:id="rId8"/>
+    <p:sldId id="407" r:id="rId9"/>
+    <p:sldId id="409" r:id="rId10"/>
+    <p:sldId id="411" r:id="rId11"/>
     <p:sldId id="393" r:id="rId12"/>
     <p:sldId id="391" r:id="rId13"/>
     <p:sldId id="392" r:id="rId14"/>
@@ -263,7 +263,7 @@
           <a:p>
             <a:fld id="{4E9214C1-2863-45BA-A7C5-D5EA3C3D4C30}" type="datetimeFigureOut">
               <a:rPr lang="ko-KR" altLang="en-US" smtClean="0"/>
-              <a:t>2026-04-09</a:t>
+              <a:t>2026-04-13</a:t>
             </a:fld>
             <a:endParaRPr lang="ko-KR" altLang="en-US"/>
           </a:p>
@@ -428,7 +428,7 @@
           <a:p>
             <a:fld id="{8F563C85-90F6-445D-9B5B-8ABB00FB3043}" type="datetimeFigureOut">
               <a:rPr lang="ko-KR" altLang="en-US" smtClean="0"/>
-              <a:t>2026-04-09</a:t>
+              <a:t>2026-04-13</a:t>
             </a:fld>
             <a:endParaRPr lang="ko-KR" altLang="en-US"/>
           </a:p>
@@ -975,7 +975,7 @@
             </a:pPr>
             <a:fld id="{B9320F77-B9A0-41C5-862A-B4B631284C64}" type="datetime1">
               <a:rPr lang="en-GB" altLang="en-US" smtClean="0"/>
-              <a:t>09/04/2026</a:t>
+              <a:t>13/04/2026</a:t>
             </a:fld>
             <a:endParaRPr lang="ko-KR" altLang="en-US"/>
           </a:p>
@@ -1334,7 +1334,7 @@
             </a:pPr>
             <a:fld id="{B9320F77-B9A0-41C5-862A-B4B631284C64}" type="datetime1">
               <a:rPr lang="en-GB" altLang="en-US" smtClean="0"/>
-              <a:t>09/04/2026</a:t>
+              <a:t>13/04/2026</a:t>
             </a:fld>
             <a:endParaRPr lang="ko-KR" altLang="en-US"/>
           </a:p>
@@ -1530,7 +1530,7 @@
             </a:pPr>
             <a:fld id="{B9320F77-B9A0-41C5-862A-B4B631284C64}" type="datetime1">
               <a:rPr lang="en-GB" altLang="en-US" smtClean="0"/>
-              <a:t>09/04/2026</a:t>
+              <a:t>13/04/2026</a:t>
             </a:fld>
             <a:endParaRPr lang="ko-KR" altLang="en-US"/>
           </a:p>
@@ -1795,7 +1795,7 @@
             </a:pPr>
             <a:fld id="{B9320F77-B9A0-41C5-862A-B4B631284C64}" type="datetime1">
               <a:rPr lang="en-GB" altLang="en-US" smtClean="0"/>
-              <a:t>09/04/2026</a:t>
+              <a:t>13/04/2026</a:t>
             </a:fld>
             <a:endParaRPr lang="ko-KR" altLang="en-US"/>
           </a:p>
@@ -2223,7 +2223,7 @@
             </a:pPr>
             <a:fld id="{B9320F77-B9A0-41C5-862A-B4B631284C64}" type="datetime1">
               <a:rPr lang="en-GB" altLang="en-US" smtClean="0"/>
-              <a:t>09/04/2026</a:t>
+              <a:t>13/04/2026</a:t>
             </a:fld>
             <a:endParaRPr lang="ko-KR" altLang="en-US"/>
           </a:p>
@@ -2764,7 +2764,7 @@
             </a:pPr>
             <a:fld id="{B9320F77-B9A0-41C5-862A-B4B631284C64}" type="datetime1">
               <a:rPr lang="en-GB" altLang="en-US" smtClean="0"/>
-              <a:t>09/04/2026</a:t>
+              <a:t>13/04/2026</a:t>
             </a:fld>
             <a:endParaRPr lang="ko-KR" altLang="en-US"/>
           </a:p>
@@ -3632,7 +3632,7 @@
             </a:pPr>
             <a:fld id="{B9320F77-B9A0-41C5-862A-B4B631284C64}" type="datetime1">
               <a:rPr lang="en-GB" altLang="en-US" smtClean="0"/>
-              <a:t>09/04/2026</a:t>
+              <a:t>13/04/2026</a:t>
             </a:fld>
             <a:endParaRPr lang="ko-KR" altLang="en-US"/>
           </a:p>
@@ -3806,7 +3806,7 @@
             </a:pPr>
             <a:fld id="{B9320F77-B9A0-41C5-862A-B4B631284C64}" type="datetime1">
               <a:rPr lang="en-GB" altLang="en-US" smtClean="0"/>
-              <a:t>09/04/2026</a:t>
+              <a:t>13/04/2026</a:t>
             </a:fld>
             <a:endParaRPr lang="ko-KR" altLang="en-US"/>
           </a:p>
@@ -3995,7 +3995,7 @@
             </a:pPr>
             <a:fld id="{B9320F77-B9A0-41C5-862A-B4B631284C64}" type="datetime1">
               <a:rPr lang="en-GB" altLang="en-US" smtClean="0"/>
-              <a:t>09/04/2026</a:t>
+              <a:t>13/04/2026</a:t>
             </a:fld>
             <a:endParaRPr lang="ko-KR" altLang="en-US"/>
           </a:p>
@@ -4170,7 +4170,7 @@
             </a:pPr>
             <a:fld id="{B9320F77-B9A0-41C5-862A-B4B631284C64}" type="datetime1">
               <a:rPr lang="en-GB" altLang="en-US" smtClean="0"/>
-              <a:t>09/04/2026</a:t>
+              <a:t>13/04/2026</a:t>
             </a:fld>
             <a:endParaRPr lang="ko-KR" altLang="en-US"/>
           </a:p>
@@ -4418,7 +4418,7 @@
             </a:pPr>
             <a:fld id="{B9320F77-B9A0-41C5-862A-B4B631284C64}" type="datetime1">
               <a:rPr lang="en-GB" altLang="en-US" smtClean="0"/>
-              <a:t>09/04/2026</a:t>
+              <a:t>13/04/2026</a:t>
             </a:fld>
             <a:endParaRPr lang="ko-KR" altLang="en-US"/>
           </a:p>
@@ -4659,7 +4659,7 @@
             </a:pPr>
             <a:fld id="{B9320F77-B9A0-41C5-862A-B4B631284C64}" type="datetime1">
               <a:rPr lang="en-GB" altLang="en-US" smtClean="0"/>
-              <a:t>09/04/2026</a:t>
+              <a:t>13/04/2026</a:t>
             </a:fld>
             <a:endParaRPr lang="ko-KR" altLang="en-US"/>
           </a:p>
@@ -5130,7 +5130,7 @@
             </a:pPr>
             <a:fld id="{B9320F77-B9A0-41C5-862A-B4B631284C64}" type="datetime1">
               <a:rPr lang="en-GB" altLang="en-US" smtClean="0"/>
-              <a:t>09/04/2026</a:t>
+              <a:t>13/04/2026</a:t>
             </a:fld>
             <a:endParaRPr lang="ko-KR" altLang="en-US"/>
           </a:p>
@@ -5253,7 +5253,7 @@
             </a:pPr>
             <a:fld id="{B9320F77-B9A0-41C5-862A-B4B631284C64}" type="datetime1">
               <a:rPr lang="en-GB" altLang="en-US" smtClean="0"/>
-              <a:t>09/04/2026</a:t>
+              <a:t>13/04/2026</a:t>
             </a:fld>
             <a:endParaRPr lang="ko-KR" altLang="en-US"/>
           </a:p>
@@ -5353,7 +5353,7 @@
             </a:pPr>
             <a:fld id="{B9320F77-B9A0-41C5-862A-B4B631284C64}" type="datetime1">
               <a:rPr lang="en-GB" altLang="en-US" smtClean="0"/>
-              <a:t>09/04/2026</a:t>
+              <a:t>13/04/2026</a:t>
             </a:fld>
             <a:endParaRPr lang="ko-KR" altLang="en-US"/>
           </a:p>
@@ -5613,7 +5613,7 @@
             </a:pPr>
             <a:fld id="{B9320F77-B9A0-41C5-862A-B4B631284C64}" type="datetime1">
               <a:rPr lang="en-GB" altLang="en-US" smtClean="0"/>
-              <a:t>09/04/2026</a:t>
+              <a:t>13/04/2026</a:t>
             </a:fld>
             <a:endParaRPr lang="ko-KR" altLang="en-US"/>
           </a:p>
@@ -5918,7 +5918,7 @@
             </a:pPr>
             <a:fld id="{B9320F77-B9A0-41C5-862A-B4B631284C64}" type="datetime1">
               <a:rPr lang="en-GB" altLang="en-US" smtClean="0"/>
-              <a:t>09/04/2026</a:t>
+              <a:t>13/04/2026</a:t>
             </a:fld>
             <a:endParaRPr lang="ko-KR" altLang="en-US"/>
           </a:p>
@@ -6157,7 +6157,7 @@
             </a:pPr>
             <a:fld id="{B9320F77-B9A0-41C5-862A-B4B631284C64}" type="datetime1">
               <a:rPr lang="en-GB" altLang="en-US" smtClean="0"/>
-              <a:t>09/04/2026</a:t>
+              <a:t>13/04/2026</a:t>
             </a:fld>
             <a:endParaRPr lang="ko-KR" altLang="en-US"/>
           </a:p>
@@ -7177,15 +7177,7 @@
             </a:pPr>
             <a:r>
               <a:rPr lang="ko-KR" altLang="en-US" sz="3200" dirty="0"/>
-              <a:t>대응</a:t>
-            </a:r>
-            <a:r>
-              <a:rPr lang="en-US" altLang="ko-KR" sz="3200" dirty="0"/>
-              <a:t> </a:t>
-            </a:r>
-            <a:r>
-              <a:rPr lang="ko-KR" altLang="en-US" sz="3200" dirty="0"/>
-              <a:t>시스템 </a:t>
+              <a:t>대응 시스템 </a:t>
             </a:r>
             <a:r>
               <a:rPr lang="en-US" altLang="ko-KR" sz="3200" dirty="0"/>
@@ -7193,7 +7185,7 @@
             </a:r>
             <a:r>
               <a:rPr lang="ko-KR" altLang="en-US" sz="2400" dirty="0"/>
-              <a:t>대응의 종류</a:t>
+              <a:t>퍼펙트 가드 시스템</a:t>
             </a:r>
             <a:endParaRPr lang="en-US" altLang="ko-KR" sz="2400" dirty="0"/>
           </a:p>
@@ -7213,7 +7205,7 @@
         </p:nvSpPr>
         <p:spPr>
           <a:xfrm>
-            <a:off x="2962380" y="3910206"/>
+            <a:off x="2962380" y="3429000"/>
             <a:ext cx="6267238" cy="1869899"/>
           </a:xfrm>
           <a:prstGeom prst="rect">
@@ -7243,163 +7235,21 @@
             <a:pPr algn="ctr"/>
             <a:r>
               <a:rPr lang="ko-KR" altLang="en-US" dirty="0"/>
-              <a:t>각 대응에 따른 장단점</a:t>
-            </a:r>
-          </a:p>
-        </p:txBody>
-      </p:sp>
-      <p:sp>
-        <p:nvSpPr>
-          <p:cNvPr id="6" name="타원 5">
-            <a:extLst>
-              <a:ext uri="{FF2B5EF4-FFF2-40B4-BE49-F238E27FC236}">
-                <a16:creationId xmlns:a16="http://schemas.microsoft.com/office/drawing/2014/main" id="{6F9CF0DC-FB06-D2D3-27D0-49E3B70B2E54}"/>
-              </a:ext>
-            </a:extLst>
-          </p:cNvPr>
-          <p:cNvSpPr/>
-          <p:nvPr/>
-        </p:nvSpPr>
-        <p:spPr>
-          <a:xfrm>
-            <a:off x="1717497" y="1560782"/>
-            <a:ext cx="1654138" cy="1387012"/>
-          </a:xfrm>
-          <a:prstGeom prst="ellipse">
-            <a:avLst/>
-          </a:prstGeom>
-        </p:spPr>
-        <p:style>
-          <a:lnRef idx="2">
-            <a:schemeClr val="accent1">
-              <a:shade val="15000"/>
-            </a:schemeClr>
-          </a:lnRef>
-          <a:fillRef idx="1">
-            <a:schemeClr val="accent1"/>
-          </a:fillRef>
-          <a:effectRef idx="0">
-            <a:schemeClr val="accent1"/>
-          </a:effectRef>
-          <a:fontRef idx="minor">
-            <a:schemeClr val="lt1"/>
-          </a:fontRef>
-        </p:style>
-        <p:txBody>
-          <a:bodyPr rtlCol="0" anchor="ctr"/>
-          <a:lstStyle/>
-          <a:p>
-            <a:pPr algn="ctr"/>
-            <a:r>
-              <a:rPr lang="ko-KR" altLang="en-US" sz="1600" dirty="0"/>
-              <a:t>막기 이미지</a:t>
-            </a:r>
-          </a:p>
-        </p:txBody>
-      </p:sp>
-      <p:sp>
-        <p:nvSpPr>
-          <p:cNvPr id="3" name="타원 2">
-            <a:extLst>
-              <a:ext uri="{FF2B5EF4-FFF2-40B4-BE49-F238E27FC236}">
-                <a16:creationId xmlns:a16="http://schemas.microsoft.com/office/drawing/2014/main" id="{388BC2E9-B307-E186-09D5-718DD11C70F4}"/>
-              </a:ext>
-            </a:extLst>
-          </p:cNvPr>
-          <p:cNvSpPr/>
-          <p:nvPr/>
-        </p:nvSpPr>
-        <p:spPr>
-          <a:xfrm>
-            <a:off x="2962380" y="1560782"/>
-            <a:ext cx="1654138" cy="1387012"/>
-          </a:xfrm>
-          <a:prstGeom prst="ellipse">
-            <a:avLst/>
-          </a:prstGeom>
-        </p:spPr>
-        <p:style>
-          <a:lnRef idx="2">
-            <a:schemeClr val="accent1">
-              <a:shade val="15000"/>
-            </a:schemeClr>
-          </a:lnRef>
-          <a:fillRef idx="1">
-            <a:schemeClr val="accent1"/>
-          </a:fillRef>
-          <a:effectRef idx="0">
-            <a:schemeClr val="accent1"/>
-          </a:effectRef>
-          <a:fontRef idx="minor">
-            <a:schemeClr val="lt1"/>
-          </a:fontRef>
-        </p:style>
-        <p:txBody>
-          <a:bodyPr rtlCol="0" anchor="ctr"/>
-          <a:lstStyle/>
-          <a:p>
-            <a:pPr algn="ctr"/>
-            <a:r>
-              <a:rPr lang="ko-KR" altLang="en-US" sz="1600" dirty="0"/>
-              <a:t>회피 이미지</a:t>
-            </a:r>
-          </a:p>
-        </p:txBody>
-      </p:sp>
-      <p:sp>
-        <p:nvSpPr>
-          <p:cNvPr id="10" name="타원 9">
-            <a:extLst>
-              <a:ext uri="{FF2B5EF4-FFF2-40B4-BE49-F238E27FC236}">
-                <a16:creationId xmlns:a16="http://schemas.microsoft.com/office/drawing/2014/main" id="{2BFD447E-A945-7ABE-3267-B8BB353E16DB}"/>
-              </a:ext>
-            </a:extLst>
-          </p:cNvPr>
-          <p:cNvSpPr/>
-          <p:nvPr/>
-        </p:nvSpPr>
-        <p:spPr>
-          <a:xfrm>
-            <a:off x="4207263" y="1560782"/>
-            <a:ext cx="1654138" cy="1387012"/>
-          </a:xfrm>
-          <a:prstGeom prst="ellipse">
-            <a:avLst/>
-          </a:prstGeom>
-        </p:spPr>
-        <p:style>
-          <a:lnRef idx="2">
-            <a:schemeClr val="accent1">
-              <a:shade val="15000"/>
-            </a:schemeClr>
-          </a:lnRef>
-          <a:fillRef idx="1">
-            <a:schemeClr val="accent1"/>
-          </a:fillRef>
-          <a:effectRef idx="0">
-            <a:schemeClr val="accent1"/>
-          </a:effectRef>
-          <a:fontRef idx="minor">
-            <a:schemeClr val="lt1"/>
-          </a:fontRef>
-        </p:style>
-        <p:txBody>
-          <a:bodyPr rtlCol="0" anchor="ctr"/>
-          <a:lstStyle/>
-          <a:p>
-            <a:pPr algn="ctr"/>
-            <a:r>
-              <a:rPr lang="ko-KR" altLang="en-US" sz="1600" dirty="0"/>
-              <a:t>반격</a:t>
-            </a:r>
-            <a:endParaRPr lang="en-US" altLang="ko-KR" sz="1600" dirty="0"/>
-          </a:p>
-          <a:p>
-            <a:pPr algn="ctr"/>
-            <a:r>
-              <a:rPr lang="ko-KR" altLang="en-US" sz="1600" dirty="0"/>
-              <a:t>이미지</a:t>
-            </a:r>
+              <a:t>퍼펙트 가드 시스템이란 공격을 막기</a:t>
+            </a:r>
+            <a:r>
+              <a:rPr lang="en-US" altLang="ko-KR" dirty="0"/>
+              <a:t>,</a:t>
+            </a:r>
+            <a:r>
+              <a:rPr lang="ko-KR" altLang="en-US" dirty="0"/>
+              <a:t> 회피 등으로 대응할 때 적대 유닛과  대응 유닛의 다이스 값이 같을 경우 이로운 추가 효과가 적용되는 시스템이다</a:t>
+            </a:r>
+            <a:r>
+              <a:rPr lang="en-US" altLang="ko-KR" dirty="0"/>
+              <a:t>.</a:t>
+            </a:r>
+            <a:endParaRPr lang="ko-KR" altLang="en-US" dirty="0"/>
           </a:p>
         </p:txBody>
       </p:sp>
@@ -7417,7 +7267,7 @@
         </p:nvSpPr>
         <p:spPr>
           <a:xfrm>
-            <a:off x="6697029" y="1442184"/>
+            <a:off x="3846818" y="1287454"/>
             <a:ext cx="4498361" cy="1624207"/>
           </a:xfrm>
           <a:prstGeom prst="ellipse">
@@ -7447,7 +7297,7 @@
             <a:pPr algn="ctr"/>
             <a:r>
               <a:rPr lang="ko-KR" altLang="en-US" sz="1600"/>
-              <a:t>받아치기 예시</a:t>
+              <a:t>퍼펙트 가드 예시 이미지</a:t>
             </a:r>
             <a:endParaRPr lang="ko-KR" altLang="en-US" sz="1600" dirty="0"/>
           </a:p>
@@ -7456,7 +7306,7 @@
     </p:spTree>
     <p:extLst>
       <p:ext uri="{BB962C8B-B14F-4D97-AF65-F5344CB8AC3E}">
-        <p14:creationId xmlns:p14="http://schemas.microsoft.com/office/powerpoint/2010/main" val="2051309267"/>
+        <p14:creationId xmlns:p14="http://schemas.microsoft.com/office/powerpoint/2010/main" val="2458664766"/>
       </p:ext>
     </p:extLst>
   </p:cSld>
@@ -10293,8 +10143,45 @@
             <a:pPr algn="ctr"/>
             <a:r>
               <a:rPr lang="ko-KR" altLang="en-US" dirty="0"/>
-              <a:t>전투에 대한 설명</a:t>
-            </a:r>
+              <a:t>해당 게임의 전투는 양측의 턴을 순차적으로 진행하며</a:t>
+            </a:r>
+            <a:r>
+              <a:rPr lang="en-US" altLang="ko-KR" dirty="0"/>
+              <a:t>, </a:t>
+            </a:r>
+            <a:r>
+              <a:rPr lang="ko-KR" altLang="en-US" dirty="0"/>
+              <a:t>양측은 서로의 </a:t>
+            </a:r>
+            <a:r>
+              <a:rPr lang="en-US" altLang="ko-KR" dirty="0"/>
+              <a:t>OP(Order Point)</a:t>
+            </a:r>
+            <a:r>
+              <a:rPr lang="ko-KR" altLang="en-US" dirty="0"/>
+              <a:t>를 사용하여 유닛에게 이동</a:t>
+            </a:r>
+            <a:r>
+              <a:rPr lang="en-US" altLang="ko-KR" dirty="0"/>
+              <a:t>, </a:t>
+            </a:r>
+            <a:r>
+              <a:rPr lang="ko-KR" altLang="en-US" dirty="0"/>
+              <a:t>공격</a:t>
+            </a:r>
+            <a:r>
+              <a:rPr lang="en-US" altLang="ko-KR" dirty="0"/>
+              <a:t>, </a:t>
+            </a:r>
+            <a:r>
+              <a:rPr lang="ko-KR" altLang="en-US" dirty="0"/>
+              <a:t>방어 등의 명령을 내려 조작한다</a:t>
+            </a:r>
+            <a:r>
+              <a:rPr lang="en-US" altLang="ko-KR" dirty="0"/>
+              <a:t>.</a:t>
+            </a:r>
+            <a:endParaRPr lang="ko-KR" altLang="en-US" dirty="0"/>
           </a:p>
         </p:txBody>
       </p:sp>
@@ -10312,7 +10199,7 @@
         </p:nvSpPr>
         <p:spPr>
           <a:xfrm>
-            <a:off x="1017141" y="1415263"/>
+            <a:off x="1017141" y="4029593"/>
             <a:ext cx="3236359" cy="1869899"/>
           </a:xfrm>
           <a:prstGeom prst="ellipse">
@@ -10344,6 +10231,14 @@
               <a:rPr lang="ko-KR" altLang="en-US" dirty="0"/>
               <a:t>전투 장면 예시</a:t>
             </a:r>
+            <a:endParaRPr lang="en-US" altLang="ko-KR" dirty="0"/>
+          </a:p>
+          <a:p>
+            <a:pPr algn="ctr"/>
+            <a:r>
+              <a:rPr lang="ko-KR" altLang="en-US" dirty="0"/>
+              <a:t>공격</a:t>
+            </a:r>
           </a:p>
         </p:txBody>
       </p:sp>
@@ -10361,7 +10256,7 @@
         </p:nvSpPr>
         <p:spPr>
           <a:xfrm>
-            <a:off x="1017140" y="4029594"/>
+            <a:off x="4638728" y="4029594"/>
             <a:ext cx="3236359" cy="1869899"/>
           </a:xfrm>
           <a:prstGeom prst="ellipse">
@@ -10389,16 +10284,19 @@
           <a:lstStyle/>
           <a:p>
             <a:pPr algn="ctr"/>
-            <a:endParaRPr lang="ko-KR" altLang="en-US"/>
-          </a:p>
-        </p:txBody>
-      </p:sp>
-      <p:sp>
-        <p:nvSpPr>
-          <p:cNvPr id="7" name="타원 6">
+            <a:r>
+              <a:rPr lang="ko-KR" altLang="en-US" dirty="0"/>
+              <a:t>이동</a:t>
+            </a:r>
+          </a:p>
+        </p:txBody>
+      </p:sp>
+      <p:sp>
+        <p:nvSpPr>
+          <p:cNvPr id="8" name="타원 7">
             <a:extLst>
               <a:ext uri="{FF2B5EF4-FFF2-40B4-BE49-F238E27FC236}">
-                <a16:creationId xmlns:a16="http://schemas.microsoft.com/office/drawing/2014/main" id="{1A6BED39-2229-A756-E39F-05043ACEFFC7}"/>
+                <a16:creationId xmlns:a16="http://schemas.microsoft.com/office/drawing/2014/main" id="{9B781F4C-6B57-AB4F-980B-D6C92F23D163}"/>
               </a:ext>
             </a:extLst>
           </p:cNvPr>
@@ -10407,7 +10305,7 @@
         </p:nvSpPr>
         <p:spPr>
           <a:xfrm>
-            <a:off x="7938501" y="4029594"/>
+            <a:off x="8260316" y="4029594"/>
             <a:ext cx="3236359" cy="1869899"/>
           </a:xfrm>
           <a:prstGeom prst="ellipse">
@@ -10435,16 +10333,19 @@
           <a:lstStyle/>
           <a:p>
             <a:pPr algn="ctr"/>
-            <a:endParaRPr lang="ko-KR" altLang="en-US"/>
-          </a:p>
-        </p:txBody>
-      </p:sp>
-      <p:sp>
-        <p:nvSpPr>
-          <p:cNvPr id="8" name="타원 7">
+            <a:r>
+              <a:rPr lang="ko-KR" altLang="en-US" dirty="0"/>
+              <a:t>방어</a:t>
+            </a:r>
+          </a:p>
+        </p:txBody>
+      </p:sp>
+      <p:sp>
+        <p:nvSpPr>
+          <p:cNvPr id="3" name="직사각형 2">
             <a:extLst>
               <a:ext uri="{FF2B5EF4-FFF2-40B4-BE49-F238E27FC236}">
-                <a16:creationId xmlns:a16="http://schemas.microsoft.com/office/drawing/2014/main" id="{9B781F4C-6B57-AB4F-980B-D6C92F23D163}"/>
+                <a16:creationId xmlns:a16="http://schemas.microsoft.com/office/drawing/2014/main" id="{C83869C6-81F9-482A-B570-06F3CA0A8628}"/>
               </a:ext>
             </a:extLst>
           </p:cNvPr>
@@ -10453,17 +10354,17 @@
         </p:nvSpPr>
         <p:spPr>
           <a:xfrm>
-            <a:off x="4477819" y="4029594"/>
-            <a:ext cx="3236359" cy="1869899"/>
+            <a:off x="1017141" y="1524271"/>
+            <a:ext cx="2356834" cy="628400"/>
           </a:xfrm>
-          <a:prstGeom prst="ellipse">
+          <a:prstGeom prst="rect">
             <a:avLst/>
           </a:prstGeom>
         </p:spPr>
         <p:style>
           <a:lnRef idx="2">
             <a:schemeClr val="accent1">
-              <a:shade val="15000"/>
+              <a:shade val="50000"/>
             </a:schemeClr>
           </a:lnRef>
           <a:fillRef idx="1">
@@ -10481,7 +10382,65 @@
           <a:lstStyle/>
           <a:p>
             <a:pPr algn="ctr"/>
-            <a:endParaRPr lang="ko-KR" altLang="en-US"/>
+            <a:r>
+              <a:rPr lang="ko-KR" altLang="en-US" dirty="0"/>
+              <a:t>턴 관련 이미지</a:t>
+            </a:r>
+            <a:endParaRPr lang="en-US" altLang="ko-KR" dirty="0"/>
+          </a:p>
+        </p:txBody>
+      </p:sp>
+      <p:sp>
+        <p:nvSpPr>
+          <p:cNvPr id="9" name="직사각형 8">
+            <a:extLst>
+              <a:ext uri="{FF2B5EF4-FFF2-40B4-BE49-F238E27FC236}">
+                <a16:creationId xmlns:a16="http://schemas.microsoft.com/office/drawing/2014/main" id="{81B3D3B6-3CF7-423E-B3FE-7F7334EAFA5E}"/>
+              </a:ext>
+            </a:extLst>
+          </p:cNvPr>
+          <p:cNvSpPr/>
+          <p:nvPr/>
+        </p:nvSpPr>
+        <p:spPr>
+          <a:xfrm>
+            <a:off x="2195558" y="2514207"/>
+            <a:ext cx="2356834" cy="628400"/>
+          </a:xfrm>
+          <a:prstGeom prst="rect">
+            <a:avLst/>
+          </a:prstGeom>
+        </p:spPr>
+        <p:style>
+          <a:lnRef idx="2">
+            <a:schemeClr val="accent1">
+              <a:shade val="50000"/>
+            </a:schemeClr>
+          </a:lnRef>
+          <a:fillRef idx="1">
+            <a:schemeClr val="accent1"/>
+          </a:fillRef>
+          <a:effectRef idx="0">
+            <a:schemeClr val="accent1"/>
+          </a:effectRef>
+          <a:fontRef idx="minor">
+            <a:schemeClr val="lt1"/>
+          </a:fontRef>
+        </p:style>
+        <p:txBody>
+          <a:bodyPr rtlCol="0" anchor="ctr"/>
+          <a:lstStyle/>
+          <a:p>
+            <a:pPr algn="ctr"/>
+            <a:r>
+              <a:rPr lang="en-US" altLang="ko-KR" dirty="0"/>
+              <a:t>Op(Order Point) </a:t>
+            </a:r>
+            <a:r>
+              <a:rPr lang="ko-KR" altLang="en-US" dirty="0"/>
+              <a:t>이미지</a:t>
+            </a:r>
+            <a:endParaRPr lang="en-US" altLang="ko-KR" dirty="0"/>
           </a:p>
         </p:txBody>
       </p:sp>
@@ -10591,7 +10550,7 @@
             </a:r>
             <a:r>
               <a:rPr lang="ko-KR" altLang="en-US" sz="2400" dirty="0"/>
-              <a:t>필드 구성 형식</a:t>
+              <a:t>필드 구성 요소</a:t>
             </a:r>
             <a:endParaRPr lang="en-US" altLang="ko-KR" sz="2400" dirty="0"/>
           </a:p>
@@ -10611,7 +10570,7 @@
         </p:nvSpPr>
         <p:spPr>
           <a:xfrm>
-            <a:off x="3705546" y="2047846"/>
+            <a:off x="3808577" y="2319569"/>
             <a:ext cx="4780908" cy="2762308"/>
           </a:xfrm>
           <a:prstGeom prst="ellipse">
@@ -10645,10 +10604,10 @@
       </p:sp>
       <p:sp>
         <p:nvSpPr>
-          <p:cNvPr id="6" name="타원 5">
+          <p:cNvPr id="7" name="타원 6">
             <a:extLst>
               <a:ext uri="{FF2B5EF4-FFF2-40B4-BE49-F238E27FC236}">
-                <a16:creationId xmlns:a16="http://schemas.microsoft.com/office/drawing/2014/main" id="{4E57466A-FCFD-2FDF-F91C-6347DA6E2FBF}"/>
+                <a16:creationId xmlns:a16="http://schemas.microsoft.com/office/drawing/2014/main" id="{D02B82BF-717A-D480-736D-99C5D64FBB3C}"/>
               </a:ext>
             </a:extLst>
           </p:cNvPr>
@@ -10657,7 +10616,7 @@
         </p:nvSpPr>
         <p:spPr>
           <a:xfrm>
-            <a:off x="7835758" y="4142609"/>
+            <a:off x="8260316" y="1384619"/>
             <a:ext cx="3236359" cy="1869899"/>
           </a:xfrm>
           <a:prstGeom prst="ellipse">
@@ -10695,10 +10654,10 @@
       </p:sp>
       <p:sp>
         <p:nvSpPr>
-          <p:cNvPr id="7" name="타원 6">
+          <p:cNvPr id="8" name="타원 7">
             <a:extLst>
               <a:ext uri="{FF2B5EF4-FFF2-40B4-BE49-F238E27FC236}">
-                <a16:creationId xmlns:a16="http://schemas.microsoft.com/office/drawing/2014/main" id="{D02B82BF-717A-D480-736D-99C5D64FBB3C}"/>
+                <a16:creationId xmlns:a16="http://schemas.microsoft.com/office/drawing/2014/main" id="{1B096A71-F70B-9439-48CE-71AB35AD184A}"/>
               </a:ext>
             </a:extLst>
           </p:cNvPr>
@@ -10707,7 +10666,7 @@
         </p:nvSpPr>
         <p:spPr>
           <a:xfrm>
-            <a:off x="8003138" y="1268413"/>
+            <a:off x="469187" y="3429000"/>
             <a:ext cx="3236359" cy="1869899"/>
           </a:xfrm>
           <a:prstGeom prst="ellipse">
@@ -10736,56 +10695,6 @@
           <a:p>
             <a:pPr algn="ctr"/>
             <a:r>
-              <a:rPr lang="ko-KR" altLang="en-US"/>
-              <a:t>필드의 구성 요소를 하나씩 강조</a:t>
-            </a:r>
-            <a:endParaRPr lang="ko-KR" altLang="en-US" dirty="0"/>
-          </a:p>
-        </p:txBody>
-      </p:sp>
-      <p:sp>
-        <p:nvSpPr>
-          <p:cNvPr id="8" name="타원 7">
-            <a:extLst>
-              <a:ext uri="{FF2B5EF4-FFF2-40B4-BE49-F238E27FC236}">
-                <a16:creationId xmlns:a16="http://schemas.microsoft.com/office/drawing/2014/main" id="{1B096A71-F70B-9439-48CE-71AB35AD184A}"/>
-              </a:ext>
-            </a:extLst>
-          </p:cNvPr>
-          <p:cNvSpPr/>
-          <p:nvPr/>
-        </p:nvSpPr>
-        <p:spPr>
-          <a:xfrm>
-            <a:off x="952503" y="1268413"/>
-            <a:ext cx="3236359" cy="1869899"/>
-          </a:xfrm>
-          <a:prstGeom prst="ellipse">
-            <a:avLst/>
-          </a:prstGeom>
-        </p:spPr>
-        <p:style>
-          <a:lnRef idx="2">
-            <a:schemeClr val="accent1">
-              <a:shade val="15000"/>
-            </a:schemeClr>
-          </a:lnRef>
-          <a:fillRef idx="1">
-            <a:schemeClr val="accent1"/>
-          </a:fillRef>
-          <a:effectRef idx="0">
-            <a:schemeClr val="accent1"/>
-          </a:effectRef>
-          <a:fontRef idx="minor">
-            <a:schemeClr val="lt1"/>
-          </a:fontRef>
-        </p:style>
-        <p:txBody>
-          <a:bodyPr rtlCol="0" anchor="ctr"/>
-          <a:lstStyle/>
-          <a:p>
-            <a:pPr algn="ctr"/>
-            <a:r>
               <a:rPr lang="ko-KR" altLang="en-US" dirty="0"/>
               <a:t>필드의 구성 요소를 하나씩 강조</a:t>
             </a:r>
@@ -10806,7 +10715,7 @@
         </p:nvSpPr>
         <p:spPr>
           <a:xfrm>
-            <a:off x="1119882" y="4142610"/>
+            <a:off x="8003138" y="4400188"/>
             <a:ext cx="3236359" cy="1869899"/>
           </a:xfrm>
           <a:prstGeom prst="ellipse">
@@ -10998,8 +10907,13 @@
             <a:pPr algn="ctr"/>
             <a:r>
               <a:rPr lang="ko-KR" altLang="en-US" dirty="0"/>
-              <a:t>다이스 시스템에 대한 간략한 설명</a:t>
-            </a:r>
+              <a:t>다이스 시스템이란 이동을 제외한 명령을 수행할 경우 주사위를 굴려 해당 명령에 대한 결과 값이 바뀌게 되는 시스템이다</a:t>
+            </a:r>
+            <a:r>
+              <a:rPr lang="en-US" altLang="ko-KR" dirty="0"/>
+              <a:t>.</a:t>
+            </a:r>
+            <a:endParaRPr lang="ko-KR" altLang="en-US" dirty="0"/>
           </a:p>
         </p:txBody>
       </p:sp>
@@ -11314,17 +11228,77 @@
             <a:pPr algn="ctr"/>
             <a:r>
               <a:rPr lang="ko-KR" altLang="en-US" dirty="0"/>
-              <a:t>다이스 종류에 따른 차이점</a:t>
-            </a:r>
-          </a:p>
-        </p:txBody>
-      </p:sp>
-      <p:sp>
-        <p:nvSpPr>
-          <p:cNvPr id="5" name="타원 4">
+              <a:t>다이스는 크게 코인</a:t>
+            </a:r>
+            <a:r>
+              <a:rPr lang="en-US" altLang="ko-KR" dirty="0"/>
+              <a:t>, </a:t>
+            </a:r>
+            <a:r>
+              <a:rPr lang="ko-KR" altLang="en-US" dirty="0"/>
+              <a:t>삼각 기둥</a:t>
+            </a:r>
+            <a:r>
+              <a:rPr lang="en-US" altLang="ko-KR" dirty="0"/>
+              <a:t>, </a:t>
+            </a:r>
+            <a:r>
+              <a:rPr lang="ko-KR" altLang="en-US" dirty="0"/>
+              <a:t>정사면체</a:t>
+            </a:r>
+            <a:r>
+              <a:rPr lang="en-US" altLang="ko-KR" dirty="0"/>
+              <a:t>, </a:t>
+            </a:r>
+            <a:r>
+              <a:rPr lang="ko-KR" altLang="en-US" dirty="0"/>
+              <a:t>정육면체</a:t>
+            </a:r>
+            <a:r>
+              <a:rPr lang="en-US" altLang="ko-KR" dirty="0"/>
+              <a:t>, </a:t>
+            </a:r>
+            <a:r>
+              <a:rPr lang="ko-KR" altLang="en-US" dirty="0"/>
+              <a:t>정십이면체가 있으며 각 다이스의 최대 값이 </a:t>
+            </a:r>
+            <a:r>
+              <a:rPr lang="en-US" altLang="ko-KR" dirty="0"/>
+              <a:t>12</a:t>
+            </a:r>
+            <a:r>
+              <a:rPr lang="ko-KR" altLang="en-US" dirty="0"/>
+              <a:t>가 되도록 개수가 정해져 있다</a:t>
+            </a:r>
+            <a:r>
+              <a:rPr lang="en-US" altLang="ko-KR" dirty="0"/>
+              <a:t>.</a:t>
+            </a:r>
+          </a:p>
+          <a:p>
+            <a:pPr algn="ctr"/>
+            <a:endParaRPr lang="en-US" altLang="ko-KR" dirty="0"/>
+          </a:p>
+          <a:p>
+            <a:pPr algn="ctr"/>
+            <a:r>
+              <a:rPr lang="ko-KR" altLang="en-US" dirty="0"/>
+              <a:t>다이스는 종류에 따라 나올 수 있는 값의 범위와 확률에 차이가 있다</a:t>
+            </a:r>
+            <a:r>
+              <a:rPr lang="en-US" altLang="ko-KR" dirty="0"/>
+              <a:t>.</a:t>
+            </a:r>
+            <a:endParaRPr lang="ko-KR" altLang="en-US" dirty="0"/>
+          </a:p>
+        </p:txBody>
+      </p:sp>
+      <p:sp>
+        <p:nvSpPr>
+          <p:cNvPr id="3" name="타원 2">
             <a:extLst>
               <a:ext uri="{FF2B5EF4-FFF2-40B4-BE49-F238E27FC236}">
-                <a16:creationId xmlns:a16="http://schemas.microsoft.com/office/drawing/2014/main" id="{512A9135-1220-F7C8-2DAF-ABB2AFBF1592}"/>
+                <a16:creationId xmlns:a16="http://schemas.microsoft.com/office/drawing/2014/main" id="{491CD6DA-5997-75BF-18C2-5376086A524B}"/>
               </a:ext>
             </a:extLst>
           </p:cNvPr>
@@ -11333,8 +11307,8 @@
         </p:nvSpPr>
         <p:spPr>
           <a:xfrm>
-            <a:off x="1078785" y="1417833"/>
-            <a:ext cx="1047968" cy="862807"/>
+            <a:off x="1275008" y="1610401"/>
+            <a:ext cx="1624402" cy="1337393"/>
           </a:xfrm>
           <a:prstGeom prst="ellipse">
             <a:avLst/>
@@ -11371,17 +11345,17 @@
             <a:pPr algn="ctr"/>
             <a:r>
               <a:rPr lang="ko-KR" altLang="en-US" sz="1200" dirty="0"/>
-              <a:t>이미지</a:t>
-            </a:r>
-          </a:p>
-        </p:txBody>
-      </p:sp>
-      <p:sp>
-        <p:nvSpPr>
-          <p:cNvPr id="3" name="타원 2">
+              <a:t>아이콘</a:t>
+            </a:r>
+          </a:p>
+        </p:txBody>
+      </p:sp>
+      <p:sp>
+        <p:nvSpPr>
+          <p:cNvPr id="10" name="타원 9">
             <a:extLst>
               <a:ext uri="{FF2B5EF4-FFF2-40B4-BE49-F238E27FC236}">
-                <a16:creationId xmlns:a16="http://schemas.microsoft.com/office/drawing/2014/main" id="{491CD6DA-5997-75BF-18C2-5376086A524B}"/>
+                <a16:creationId xmlns:a16="http://schemas.microsoft.com/office/drawing/2014/main" id="{1C9D0674-2478-EDAF-B924-89F395FD610A}"/>
               </a:ext>
             </a:extLst>
           </p:cNvPr>
@@ -11390,8 +11364,8 @@
         </p:nvSpPr>
         <p:spPr>
           <a:xfrm>
-            <a:off x="2018868" y="2232616"/>
-            <a:ext cx="1047968" cy="862807"/>
+            <a:off x="3679158" y="1610401"/>
+            <a:ext cx="1624402" cy="1337393"/>
           </a:xfrm>
           <a:prstGeom prst="ellipse">
             <a:avLst/>
@@ -11435,10 +11409,10 @@
       </p:sp>
       <p:sp>
         <p:nvSpPr>
-          <p:cNvPr id="9" name="타원 8">
+          <p:cNvPr id="12" name="타원 11">
             <a:extLst>
               <a:ext uri="{FF2B5EF4-FFF2-40B4-BE49-F238E27FC236}">
-                <a16:creationId xmlns:a16="http://schemas.microsoft.com/office/drawing/2014/main" id="{B593C8A8-AA0A-1548-40F2-0126BC6BFCF6}"/>
+                <a16:creationId xmlns:a16="http://schemas.microsoft.com/office/drawing/2014/main" id="{C48E9216-2003-84E6-6754-48993292852F}"/>
               </a:ext>
             </a:extLst>
           </p:cNvPr>
@@ -11447,8 +11421,8 @@
         </p:nvSpPr>
         <p:spPr>
           <a:xfrm>
-            <a:off x="3482935" y="1417833"/>
-            <a:ext cx="1047968" cy="862807"/>
+            <a:off x="5667209" y="1610401"/>
+            <a:ext cx="1624402" cy="1337393"/>
           </a:xfrm>
           <a:prstGeom prst="ellipse">
             <a:avLst/>
@@ -11485,17 +11459,17 @@
             <a:pPr algn="ctr"/>
             <a:r>
               <a:rPr lang="ko-KR" altLang="en-US" sz="1200" dirty="0"/>
-              <a:t>이미지</a:t>
-            </a:r>
-          </a:p>
-        </p:txBody>
-      </p:sp>
-      <p:sp>
-        <p:nvSpPr>
-          <p:cNvPr id="10" name="타원 9">
+              <a:t>아이콘</a:t>
+            </a:r>
+          </a:p>
+        </p:txBody>
+      </p:sp>
+      <p:sp>
+        <p:nvSpPr>
+          <p:cNvPr id="14" name="타원 13">
             <a:extLst>
               <a:ext uri="{FF2B5EF4-FFF2-40B4-BE49-F238E27FC236}">
-                <a16:creationId xmlns:a16="http://schemas.microsoft.com/office/drawing/2014/main" id="{1C9D0674-2478-EDAF-B924-89F395FD610A}"/>
+                <a16:creationId xmlns:a16="http://schemas.microsoft.com/office/drawing/2014/main" id="{5E85E0BA-E720-DFF0-F4C2-EC5873FB4BFF}"/>
               </a:ext>
             </a:extLst>
           </p:cNvPr>
@@ -11504,8 +11478,8 @@
         </p:nvSpPr>
         <p:spPr>
           <a:xfrm>
-            <a:off x="4423018" y="2232616"/>
-            <a:ext cx="1047968" cy="862807"/>
+            <a:off x="7655260" y="1610401"/>
+            <a:ext cx="1624402" cy="1337393"/>
           </a:xfrm>
           <a:prstGeom prst="ellipse">
             <a:avLst/>
@@ -11549,10 +11523,10 @@
       </p:sp>
       <p:sp>
         <p:nvSpPr>
-          <p:cNvPr id="11" name="타원 10">
+          <p:cNvPr id="16" name="타원 15">
             <a:extLst>
               <a:ext uri="{FF2B5EF4-FFF2-40B4-BE49-F238E27FC236}">
-                <a16:creationId xmlns:a16="http://schemas.microsoft.com/office/drawing/2014/main" id="{EE881B86-16F2-3FEB-D829-2AF30C650C6C}"/>
+                <a16:creationId xmlns:a16="http://schemas.microsoft.com/office/drawing/2014/main" id="{47449222-69D9-B53A-5901-0030F9358B39}"/>
               </a:ext>
             </a:extLst>
           </p:cNvPr>
@@ -11561,8 +11535,8 @@
         </p:nvSpPr>
         <p:spPr>
           <a:xfrm>
-            <a:off x="5470986" y="1417833"/>
-            <a:ext cx="1047968" cy="862807"/>
+            <a:off x="9535426" y="1610401"/>
+            <a:ext cx="1624402" cy="1337393"/>
           </a:xfrm>
           <a:prstGeom prst="ellipse">
             <a:avLst/>
@@ -11599,291 +11573,6 @@
             <a:pPr algn="ctr"/>
             <a:r>
               <a:rPr lang="ko-KR" altLang="en-US" sz="1200" dirty="0"/>
-              <a:t>이미지</a:t>
-            </a:r>
-          </a:p>
-        </p:txBody>
-      </p:sp>
-      <p:sp>
-        <p:nvSpPr>
-          <p:cNvPr id="12" name="타원 11">
-            <a:extLst>
-              <a:ext uri="{FF2B5EF4-FFF2-40B4-BE49-F238E27FC236}">
-                <a16:creationId xmlns:a16="http://schemas.microsoft.com/office/drawing/2014/main" id="{C48E9216-2003-84E6-6754-48993292852F}"/>
-              </a:ext>
-            </a:extLst>
-          </p:cNvPr>
-          <p:cNvSpPr/>
-          <p:nvPr/>
-        </p:nvSpPr>
-        <p:spPr>
-          <a:xfrm>
-            <a:off x="6411069" y="2232616"/>
-            <a:ext cx="1047968" cy="862807"/>
-          </a:xfrm>
-          <a:prstGeom prst="ellipse">
-            <a:avLst/>
-          </a:prstGeom>
-        </p:spPr>
-        <p:style>
-          <a:lnRef idx="2">
-            <a:schemeClr val="accent1">
-              <a:shade val="15000"/>
-            </a:schemeClr>
-          </a:lnRef>
-          <a:fillRef idx="1">
-            <a:schemeClr val="accent1"/>
-          </a:fillRef>
-          <a:effectRef idx="0">
-            <a:schemeClr val="accent1"/>
-          </a:effectRef>
-          <a:fontRef idx="minor">
-            <a:schemeClr val="lt1"/>
-          </a:fontRef>
-        </p:style>
-        <p:txBody>
-          <a:bodyPr rtlCol="0" anchor="ctr"/>
-          <a:lstStyle/>
-          <a:p>
-            <a:pPr algn="ctr"/>
-            <a:r>
-              <a:rPr lang="ko-KR" altLang="en-US" sz="1200" dirty="0"/>
-              <a:t>다이스</a:t>
-            </a:r>
-            <a:endParaRPr lang="en-US" altLang="ko-KR" sz="1200" dirty="0"/>
-          </a:p>
-          <a:p>
-            <a:pPr algn="ctr"/>
-            <a:r>
-              <a:rPr lang="ko-KR" altLang="en-US" sz="1200" dirty="0"/>
-              <a:t>아이콘</a:t>
-            </a:r>
-          </a:p>
-        </p:txBody>
-      </p:sp>
-      <p:sp>
-        <p:nvSpPr>
-          <p:cNvPr id="13" name="타원 12">
-            <a:extLst>
-              <a:ext uri="{FF2B5EF4-FFF2-40B4-BE49-F238E27FC236}">
-                <a16:creationId xmlns:a16="http://schemas.microsoft.com/office/drawing/2014/main" id="{EF8E8CA7-0B20-D476-822B-7F75D51C6828}"/>
-              </a:ext>
-            </a:extLst>
-          </p:cNvPr>
-          <p:cNvSpPr/>
-          <p:nvPr/>
-        </p:nvSpPr>
-        <p:spPr>
-          <a:xfrm>
-            <a:off x="7459037" y="1417833"/>
-            <a:ext cx="1047968" cy="862807"/>
-          </a:xfrm>
-          <a:prstGeom prst="ellipse">
-            <a:avLst/>
-          </a:prstGeom>
-        </p:spPr>
-        <p:style>
-          <a:lnRef idx="2">
-            <a:schemeClr val="accent1">
-              <a:shade val="15000"/>
-            </a:schemeClr>
-          </a:lnRef>
-          <a:fillRef idx="1">
-            <a:schemeClr val="accent1"/>
-          </a:fillRef>
-          <a:effectRef idx="0">
-            <a:schemeClr val="accent1"/>
-          </a:effectRef>
-          <a:fontRef idx="minor">
-            <a:schemeClr val="lt1"/>
-          </a:fontRef>
-        </p:style>
-        <p:txBody>
-          <a:bodyPr rtlCol="0" anchor="ctr"/>
-          <a:lstStyle/>
-          <a:p>
-            <a:pPr algn="ctr"/>
-            <a:r>
-              <a:rPr lang="ko-KR" altLang="en-US" sz="1200" dirty="0"/>
-              <a:t>다이스</a:t>
-            </a:r>
-            <a:endParaRPr lang="en-US" altLang="ko-KR" sz="1200" dirty="0"/>
-          </a:p>
-          <a:p>
-            <a:pPr algn="ctr"/>
-            <a:r>
-              <a:rPr lang="ko-KR" altLang="en-US" sz="1200" dirty="0"/>
-              <a:t>이미지</a:t>
-            </a:r>
-          </a:p>
-        </p:txBody>
-      </p:sp>
-      <p:sp>
-        <p:nvSpPr>
-          <p:cNvPr id="14" name="타원 13">
-            <a:extLst>
-              <a:ext uri="{FF2B5EF4-FFF2-40B4-BE49-F238E27FC236}">
-                <a16:creationId xmlns:a16="http://schemas.microsoft.com/office/drawing/2014/main" id="{5E85E0BA-E720-DFF0-F4C2-EC5873FB4BFF}"/>
-              </a:ext>
-            </a:extLst>
-          </p:cNvPr>
-          <p:cNvSpPr/>
-          <p:nvPr/>
-        </p:nvSpPr>
-        <p:spPr>
-          <a:xfrm>
-            <a:off x="8399120" y="2232616"/>
-            <a:ext cx="1047968" cy="862807"/>
-          </a:xfrm>
-          <a:prstGeom prst="ellipse">
-            <a:avLst/>
-          </a:prstGeom>
-        </p:spPr>
-        <p:style>
-          <a:lnRef idx="2">
-            <a:schemeClr val="accent1">
-              <a:shade val="15000"/>
-            </a:schemeClr>
-          </a:lnRef>
-          <a:fillRef idx="1">
-            <a:schemeClr val="accent1"/>
-          </a:fillRef>
-          <a:effectRef idx="0">
-            <a:schemeClr val="accent1"/>
-          </a:effectRef>
-          <a:fontRef idx="minor">
-            <a:schemeClr val="lt1"/>
-          </a:fontRef>
-        </p:style>
-        <p:txBody>
-          <a:bodyPr rtlCol="0" anchor="ctr"/>
-          <a:lstStyle/>
-          <a:p>
-            <a:pPr algn="ctr"/>
-            <a:r>
-              <a:rPr lang="ko-KR" altLang="en-US" sz="1200" dirty="0"/>
-              <a:t>다이스</a:t>
-            </a:r>
-            <a:endParaRPr lang="en-US" altLang="ko-KR" sz="1200" dirty="0"/>
-          </a:p>
-          <a:p>
-            <a:pPr algn="ctr"/>
-            <a:r>
-              <a:rPr lang="ko-KR" altLang="en-US" sz="1200" dirty="0"/>
-              <a:t>아이콘</a:t>
-            </a:r>
-          </a:p>
-        </p:txBody>
-      </p:sp>
-      <p:sp>
-        <p:nvSpPr>
-          <p:cNvPr id="15" name="타원 14">
-            <a:extLst>
-              <a:ext uri="{FF2B5EF4-FFF2-40B4-BE49-F238E27FC236}">
-                <a16:creationId xmlns:a16="http://schemas.microsoft.com/office/drawing/2014/main" id="{7F7BAE25-6E97-82C3-347C-EE146766BDB2}"/>
-              </a:ext>
-            </a:extLst>
-          </p:cNvPr>
-          <p:cNvSpPr/>
-          <p:nvPr/>
-        </p:nvSpPr>
-        <p:spPr>
-          <a:xfrm>
-            <a:off x="9339203" y="1417833"/>
-            <a:ext cx="1047968" cy="862807"/>
-          </a:xfrm>
-          <a:prstGeom prst="ellipse">
-            <a:avLst/>
-          </a:prstGeom>
-        </p:spPr>
-        <p:style>
-          <a:lnRef idx="2">
-            <a:schemeClr val="accent1">
-              <a:shade val="15000"/>
-            </a:schemeClr>
-          </a:lnRef>
-          <a:fillRef idx="1">
-            <a:schemeClr val="accent1"/>
-          </a:fillRef>
-          <a:effectRef idx="0">
-            <a:schemeClr val="accent1"/>
-          </a:effectRef>
-          <a:fontRef idx="minor">
-            <a:schemeClr val="lt1"/>
-          </a:fontRef>
-        </p:style>
-        <p:txBody>
-          <a:bodyPr rtlCol="0" anchor="ctr"/>
-          <a:lstStyle/>
-          <a:p>
-            <a:pPr algn="ctr"/>
-            <a:r>
-              <a:rPr lang="ko-KR" altLang="en-US" sz="1200" dirty="0"/>
-              <a:t>다이스</a:t>
-            </a:r>
-            <a:endParaRPr lang="en-US" altLang="ko-KR" sz="1200" dirty="0"/>
-          </a:p>
-          <a:p>
-            <a:pPr algn="ctr"/>
-            <a:r>
-              <a:rPr lang="ko-KR" altLang="en-US" sz="1200" dirty="0"/>
-              <a:t>이미지</a:t>
-            </a:r>
-          </a:p>
-        </p:txBody>
-      </p:sp>
-      <p:sp>
-        <p:nvSpPr>
-          <p:cNvPr id="16" name="타원 15">
-            <a:extLst>
-              <a:ext uri="{FF2B5EF4-FFF2-40B4-BE49-F238E27FC236}">
-                <a16:creationId xmlns:a16="http://schemas.microsoft.com/office/drawing/2014/main" id="{47449222-69D9-B53A-5901-0030F9358B39}"/>
-              </a:ext>
-            </a:extLst>
-          </p:cNvPr>
-          <p:cNvSpPr/>
-          <p:nvPr/>
-        </p:nvSpPr>
-        <p:spPr>
-          <a:xfrm>
-            <a:off x="10279286" y="2232616"/>
-            <a:ext cx="1047968" cy="862807"/>
-          </a:xfrm>
-          <a:prstGeom prst="ellipse">
-            <a:avLst/>
-          </a:prstGeom>
-        </p:spPr>
-        <p:style>
-          <a:lnRef idx="2">
-            <a:schemeClr val="accent1">
-              <a:shade val="15000"/>
-            </a:schemeClr>
-          </a:lnRef>
-          <a:fillRef idx="1">
-            <a:schemeClr val="accent1"/>
-          </a:fillRef>
-          <a:effectRef idx="0">
-            <a:schemeClr val="accent1"/>
-          </a:effectRef>
-          <a:fontRef idx="minor">
-            <a:schemeClr val="lt1"/>
-          </a:fontRef>
-        </p:style>
-        <p:txBody>
-          <a:bodyPr rtlCol="0" anchor="ctr"/>
-          <a:lstStyle/>
-          <a:p>
-            <a:pPr algn="ctr"/>
-            <a:r>
-              <a:rPr lang="ko-KR" altLang="en-US" sz="1200" dirty="0"/>
-              <a:t>다이스</a:t>
-            </a:r>
-            <a:endParaRPr lang="en-US" altLang="ko-KR" sz="1200" dirty="0"/>
-          </a:p>
-          <a:p>
-            <a:pPr algn="ctr"/>
-            <a:r>
-              <a:rPr lang="ko-KR" altLang="en-US" sz="1200" dirty="0"/>
               <a:t>아이콘</a:t>
             </a:r>
           </a:p>
@@ -11903,322 +11592,6 @@
 </file>
 
 <file path=ppt/slides/slide7.xml><?xml version="1.0" encoding="utf-8"?>
-<p:sld xmlns:a="http://schemas.openxmlformats.org/drawingml/2006/main" xmlns:r="http://schemas.openxmlformats.org/officeDocument/2006/relationships" xmlns:p="http://schemas.openxmlformats.org/presentationml/2006/main">
-  <p:cSld>
-    <p:spTree>
-      <p:nvGrpSpPr>
-        <p:cNvPr id="1" name="">
-          <a:extLst>
-            <a:ext uri="{FF2B5EF4-FFF2-40B4-BE49-F238E27FC236}">
-              <a16:creationId xmlns:a16="http://schemas.microsoft.com/office/drawing/2014/main" id="{29B9D1FE-EAA2-7E86-C688-5797E13A11C3}"/>
-            </a:ext>
-          </a:extLst>
-        </p:cNvPr>
-        <p:cNvGrpSpPr/>
-        <p:nvPr/>
-      </p:nvGrpSpPr>
-      <p:grpSpPr>
-        <a:xfrm>
-          <a:off x="0" y="0"/>
-          <a:ext cx="0" cy="0"/>
-          <a:chOff x="0" y="0"/>
-          <a:chExt cx="0" cy="0"/>
-        </a:xfrm>
-      </p:grpSpPr>
-      <p:sp>
-        <p:nvSpPr>
-          <p:cNvPr id="4" name="제목 1">
-            <a:extLst>
-              <a:ext uri="{FF2B5EF4-FFF2-40B4-BE49-F238E27FC236}">
-                <a16:creationId xmlns:a16="http://schemas.microsoft.com/office/drawing/2014/main" id="{10B75828-F8FD-5FF0-4CB2-A40A98974540}"/>
-              </a:ext>
-            </a:extLst>
-          </p:cNvPr>
-          <p:cNvSpPr txBox="1">
-            <a:spLocks/>
-          </p:cNvSpPr>
-          <p:nvPr/>
-        </p:nvSpPr>
-        <p:spPr>
-          <a:xfrm>
-            <a:off x="695324" y="387600"/>
-            <a:ext cx="10801351" cy="628400"/>
-          </a:xfrm>
-          <a:prstGeom prst="rect">
-            <a:avLst/>
-          </a:prstGeom>
-        </p:spPr>
-        <p:txBody>
-          <a:bodyPr vert="horz" lIns="91440" tIns="45720" rIns="91440" bIns="45720" rtlCol="0" anchor="ctr">
-            <a:normAutofit/>
-          </a:bodyPr>
-          <a:lstStyle>
-            <a:lvl1pPr algn="ctr" defTabSz="914400" rtl="0" eaLnBrk="1" latinLnBrk="1" hangingPunct="1">
-              <a:lnSpc>
-                <a:spcPct val="90000"/>
-              </a:lnSpc>
-              <a:spcBef>
-                <a:spcPct val="0"/>
-              </a:spcBef>
-              <a:buNone/>
-              <a:defRPr sz="6000" kern="1200">
-                <a:solidFill>
-                  <a:schemeClr val="tx1"/>
-                </a:solidFill>
-                <a:latin typeface="+mj-lt"/>
-                <a:ea typeface="+mj-ea"/>
-                <a:cs typeface="+mj-cs"/>
-              </a:defRPr>
-            </a:lvl1pPr>
-          </a:lstStyle>
-          <a:p>
-            <a:pPr algn="l">
-              <a:lnSpc>
-                <a:spcPct val="100000"/>
-              </a:lnSpc>
-            </a:pPr>
-            <a:r>
-              <a:rPr lang="ko-KR" altLang="en-US" sz="3200" dirty="0"/>
-              <a:t>다이스</a:t>
-            </a:r>
-            <a:r>
-              <a:rPr lang="en-US" altLang="ko-KR" sz="3200" dirty="0"/>
-              <a:t> </a:t>
-            </a:r>
-            <a:r>
-              <a:rPr lang="ko-KR" altLang="en-US" sz="3200" dirty="0"/>
-              <a:t>시스템 </a:t>
-            </a:r>
-            <a:r>
-              <a:rPr lang="en-US" altLang="ko-KR" sz="3200" dirty="0"/>
-              <a:t>– </a:t>
-            </a:r>
-            <a:r>
-              <a:rPr lang="ko-KR" altLang="en-US" sz="2400" dirty="0"/>
-              <a:t>다이스 값에 의한 위력</a:t>
-            </a:r>
-            <a:endParaRPr lang="en-US" altLang="ko-KR" sz="2400" dirty="0"/>
-          </a:p>
-        </p:txBody>
-      </p:sp>
-      <p:sp>
-        <p:nvSpPr>
-          <p:cNvPr id="2" name="직사각형 1">
-            <a:extLst>
-              <a:ext uri="{FF2B5EF4-FFF2-40B4-BE49-F238E27FC236}">
-                <a16:creationId xmlns:a16="http://schemas.microsoft.com/office/drawing/2014/main" id="{BC5F8518-8B72-CCF2-C686-8B30BD14C058}"/>
-              </a:ext>
-            </a:extLst>
-          </p:cNvPr>
-          <p:cNvSpPr/>
-          <p:nvPr/>
-        </p:nvSpPr>
-        <p:spPr>
-          <a:xfrm>
-            <a:off x="2945259" y="4375900"/>
-            <a:ext cx="6267238" cy="1064267"/>
-          </a:xfrm>
-          <a:prstGeom prst="rect">
-            <a:avLst/>
-          </a:prstGeom>
-        </p:spPr>
-        <p:style>
-          <a:lnRef idx="2">
-            <a:schemeClr val="accent1">
-              <a:shade val="15000"/>
-            </a:schemeClr>
-          </a:lnRef>
-          <a:fillRef idx="1">
-            <a:schemeClr val="accent1"/>
-          </a:fillRef>
-          <a:effectRef idx="0">
-            <a:schemeClr val="accent1"/>
-          </a:effectRef>
-          <a:fontRef idx="minor">
-            <a:schemeClr val="lt1"/>
-          </a:fontRef>
-        </p:style>
-        <p:txBody>
-          <a:bodyPr rtlCol="0" anchor="ctr"/>
-          <a:lstStyle/>
-          <a:p>
-            <a:pPr algn="ctr"/>
-            <a:r>
-              <a:rPr lang="ko-KR" altLang="en-US" dirty="0"/>
-              <a:t>공식 설명</a:t>
-            </a:r>
-          </a:p>
-        </p:txBody>
-      </p:sp>
-      <p:sp>
-        <p:nvSpPr>
-          <p:cNvPr id="5" name="타원 4">
-            <a:extLst>
-              <a:ext uri="{FF2B5EF4-FFF2-40B4-BE49-F238E27FC236}">
-                <a16:creationId xmlns:a16="http://schemas.microsoft.com/office/drawing/2014/main" id="{F01B40C9-F5CF-CA9C-9023-AF563834BE7B}"/>
-              </a:ext>
-            </a:extLst>
-          </p:cNvPr>
-          <p:cNvSpPr/>
-          <p:nvPr/>
-        </p:nvSpPr>
-        <p:spPr>
-          <a:xfrm>
-            <a:off x="4698716" y="1417833"/>
-            <a:ext cx="2578815" cy="1387012"/>
-          </a:xfrm>
-          <a:prstGeom prst="ellipse">
-            <a:avLst/>
-          </a:prstGeom>
-        </p:spPr>
-        <p:style>
-          <a:lnRef idx="2">
-            <a:schemeClr val="accent1">
-              <a:shade val="15000"/>
-            </a:schemeClr>
-          </a:lnRef>
-          <a:fillRef idx="1">
-            <a:schemeClr val="accent1"/>
-          </a:fillRef>
-          <a:effectRef idx="0">
-            <a:schemeClr val="accent1"/>
-          </a:effectRef>
-          <a:fontRef idx="minor">
-            <a:schemeClr val="lt1"/>
-          </a:fontRef>
-        </p:style>
-        <p:txBody>
-          <a:bodyPr rtlCol="0" anchor="ctr"/>
-          <a:lstStyle/>
-          <a:p>
-            <a:pPr algn="ctr"/>
-            <a:r>
-              <a:rPr lang="ko-KR" altLang="en-US" sz="1600" dirty="0"/>
-              <a:t>다이스 이미지</a:t>
-            </a:r>
-          </a:p>
-        </p:txBody>
-      </p:sp>
-      <p:sp>
-        <p:nvSpPr>
-          <p:cNvPr id="6" name="타원 5">
-            <a:extLst>
-              <a:ext uri="{FF2B5EF4-FFF2-40B4-BE49-F238E27FC236}">
-                <a16:creationId xmlns:a16="http://schemas.microsoft.com/office/drawing/2014/main" id="{541E4596-9B72-ACC9-D1AC-3C1C7ACDC4CA}"/>
-              </a:ext>
-            </a:extLst>
-          </p:cNvPr>
-          <p:cNvSpPr/>
-          <p:nvPr/>
-        </p:nvSpPr>
-        <p:spPr>
-          <a:xfrm>
-            <a:off x="8150830" y="1417833"/>
-            <a:ext cx="2578815" cy="1387012"/>
-          </a:xfrm>
-          <a:prstGeom prst="ellipse">
-            <a:avLst/>
-          </a:prstGeom>
-        </p:spPr>
-        <p:style>
-          <a:lnRef idx="2">
-            <a:schemeClr val="accent1">
-              <a:shade val="15000"/>
-            </a:schemeClr>
-          </a:lnRef>
-          <a:fillRef idx="1">
-            <a:schemeClr val="accent1"/>
-          </a:fillRef>
-          <a:effectRef idx="0">
-            <a:schemeClr val="accent1"/>
-          </a:effectRef>
-          <a:fontRef idx="minor">
-            <a:schemeClr val="lt1"/>
-          </a:fontRef>
-        </p:style>
-        <p:txBody>
-          <a:bodyPr rtlCol="0" anchor="ctr"/>
-          <a:lstStyle/>
-          <a:p>
-            <a:pPr algn="ctr"/>
-            <a:r>
-              <a:rPr lang="ko-KR" altLang="en-US" sz="1600" dirty="0"/>
-              <a:t>다이스 값에</a:t>
-            </a:r>
-            <a:endParaRPr lang="en-US" altLang="ko-KR" sz="1600" dirty="0"/>
-          </a:p>
-          <a:p>
-            <a:pPr algn="ctr"/>
-            <a:r>
-              <a:rPr lang="ko-KR" altLang="en-US" sz="1600" dirty="0"/>
-              <a:t>대한 결과</a:t>
-            </a:r>
-          </a:p>
-        </p:txBody>
-      </p:sp>
-      <p:sp>
-        <p:nvSpPr>
-          <p:cNvPr id="7" name="타원 6">
-            <a:extLst>
-              <a:ext uri="{FF2B5EF4-FFF2-40B4-BE49-F238E27FC236}">
-                <a16:creationId xmlns:a16="http://schemas.microsoft.com/office/drawing/2014/main" id="{BCDF1339-63BA-2E15-AF9E-42B674A58AA1}"/>
-              </a:ext>
-            </a:extLst>
-          </p:cNvPr>
-          <p:cNvSpPr/>
-          <p:nvPr/>
-        </p:nvSpPr>
-        <p:spPr>
-          <a:xfrm>
-            <a:off x="1500027" y="1417833"/>
-            <a:ext cx="2578815" cy="1387012"/>
-          </a:xfrm>
-          <a:prstGeom prst="ellipse">
-            <a:avLst/>
-          </a:prstGeom>
-        </p:spPr>
-        <p:style>
-          <a:lnRef idx="2">
-            <a:schemeClr val="accent1">
-              <a:shade val="15000"/>
-            </a:schemeClr>
-          </a:lnRef>
-          <a:fillRef idx="1">
-            <a:schemeClr val="accent1"/>
-          </a:fillRef>
-          <a:effectRef idx="0">
-            <a:schemeClr val="accent1"/>
-          </a:effectRef>
-          <a:fontRef idx="minor">
-            <a:schemeClr val="lt1"/>
-          </a:fontRef>
-        </p:style>
-        <p:txBody>
-          <a:bodyPr rtlCol="0" anchor="ctr"/>
-          <a:lstStyle/>
-          <a:p>
-            <a:pPr algn="ctr"/>
-            <a:r>
-              <a:rPr lang="ko-KR" altLang="en-US" sz="1600" dirty="0"/>
-              <a:t>스킬 및 스킬 설명</a:t>
-            </a:r>
-          </a:p>
-        </p:txBody>
-      </p:sp>
-    </p:spTree>
-    <p:extLst>
-      <p:ext uri="{BB962C8B-B14F-4D97-AF65-F5344CB8AC3E}">
-        <p14:creationId xmlns:p14="http://schemas.microsoft.com/office/powerpoint/2010/main" val="2614650611"/>
-      </p:ext>
-    </p:extLst>
-  </p:cSld>
-  <p:clrMapOvr>
-    <a:masterClrMapping/>
-  </p:clrMapOvr>
-</p:sld>
-</file>
-
-<file path=ppt/slides/slide8.xml><?xml version="1.0" encoding="utf-8"?>
 <p:sld xmlns:a="http://schemas.openxmlformats.org/drawingml/2006/main" xmlns:r="http://schemas.openxmlformats.org/officeDocument/2006/relationships" xmlns:p="http://schemas.openxmlformats.org/presentationml/2006/main">
   <p:cSld>
     <p:spTree>
@@ -12361,8 +11734,13 @@
             <a:pPr algn="ctr"/>
             <a:r>
               <a:rPr lang="ko-KR" altLang="en-US" dirty="0"/>
-              <a:t>보정 시스템에 대한 설명</a:t>
-            </a:r>
+              <a:t>값 보정 시스템이란 스킬을 시전하는 유닛이 보유한 보정치에 따라서 다이스 값의 최솟값을 해당 값으로 보정하거나 각 스킬이 대응할 경우 다이스 값이 보정치 범위 안에 포함될 경우 해당 값으로 보정하는 시스템이다</a:t>
+            </a:r>
+            <a:r>
+              <a:rPr lang="en-US" altLang="ko-KR" dirty="0"/>
+              <a:t>.</a:t>
+            </a:r>
+            <a:endParaRPr lang="ko-KR" altLang="en-US" dirty="0"/>
           </a:p>
         </p:txBody>
       </p:sp>
@@ -12485,7 +11863,7 @@
 </p:sld>
 </file>
 
-<file path=ppt/slides/slide9.xml><?xml version="1.0" encoding="utf-8"?>
+<file path=ppt/slides/slide8.xml><?xml version="1.0" encoding="utf-8"?>
 <p:sld xmlns:a="http://schemas.openxmlformats.org/drawingml/2006/main" xmlns:r="http://schemas.openxmlformats.org/officeDocument/2006/relationships" xmlns:p="http://schemas.openxmlformats.org/presentationml/2006/main">
   <p:cSld>
     <p:spTree>
@@ -12628,8 +12006,29 @@
             <a:pPr algn="ctr"/>
             <a:r>
               <a:rPr lang="ko-KR" altLang="en-US" dirty="0"/>
-              <a:t>대응 시스템에 대한 간략한 설명</a:t>
-            </a:r>
+              <a:t>대응 시스템이란 적대 유닛의 공격 대상이 되었을 때 </a:t>
+            </a:r>
+            <a:r>
+              <a:rPr lang="en-US" altLang="ko-KR" dirty="0"/>
+              <a:t>OP </a:t>
+            </a:r>
+            <a:r>
+              <a:rPr lang="ko-KR" altLang="en-US" dirty="0"/>
+              <a:t>및 </a:t>
+            </a:r>
+            <a:r>
+              <a:rPr lang="en-US" altLang="ko-KR" dirty="0"/>
+              <a:t>DOP</a:t>
+            </a:r>
+            <a:r>
+              <a:rPr lang="ko-KR" altLang="en-US" dirty="0"/>
+              <a:t>를 소모하여 막거나 회피하는 등 대응하는 시스템이다</a:t>
+            </a:r>
+            <a:r>
+              <a:rPr lang="en-US" altLang="ko-KR" dirty="0"/>
+              <a:t>.</a:t>
+            </a:r>
+            <a:endParaRPr lang="ko-KR" altLang="en-US" dirty="0"/>
           </a:p>
         </p:txBody>
       </p:sp>
@@ -12784,6 +12183,372 @@
     <p:extLst>
       <p:ext uri="{BB962C8B-B14F-4D97-AF65-F5344CB8AC3E}">
         <p14:creationId xmlns:p14="http://schemas.microsoft.com/office/powerpoint/2010/main" val="3854447967"/>
+      </p:ext>
+    </p:extLst>
+  </p:cSld>
+  <p:clrMapOvr>
+    <a:masterClrMapping/>
+  </p:clrMapOvr>
+</p:sld>
+</file>
+
+<file path=ppt/slides/slide9.xml><?xml version="1.0" encoding="utf-8"?>
+<p:sld xmlns:a="http://schemas.openxmlformats.org/drawingml/2006/main" xmlns:r="http://schemas.openxmlformats.org/officeDocument/2006/relationships" xmlns:p="http://schemas.openxmlformats.org/presentationml/2006/main">
+  <p:cSld>
+    <p:spTree>
+      <p:nvGrpSpPr>
+        <p:cNvPr id="1" name="">
+          <a:extLst>
+            <a:ext uri="{FF2B5EF4-FFF2-40B4-BE49-F238E27FC236}">
+              <a16:creationId xmlns:a16="http://schemas.microsoft.com/office/drawing/2014/main" id="{E8B11E55-79FA-6AB1-C3E6-DBBE419F15B2}"/>
+            </a:ext>
+          </a:extLst>
+        </p:cNvPr>
+        <p:cNvGrpSpPr/>
+        <p:nvPr/>
+      </p:nvGrpSpPr>
+      <p:grpSpPr>
+        <a:xfrm>
+          <a:off x="0" y="0"/>
+          <a:ext cx="0" cy="0"/>
+          <a:chOff x="0" y="0"/>
+          <a:chExt cx="0" cy="0"/>
+        </a:xfrm>
+      </p:grpSpPr>
+      <p:sp>
+        <p:nvSpPr>
+          <p:cNvPr id="4" name="제목 1">
+            <a:extLst>
+              <a:ext uri="{FF2B5EF4-FFF2-40B4-BE49-F238E27FC236}">
+                <a16:creationId xmlns:a16="http://schemas.microsoft.com/office/drawing/2014/main" id="{B214E72F-CDA6-9232-0976-BA2EEF4CC001}"/>
+              </a:ext>
+            </a:extLst>
+          </p:cNvPr>
+          <p:cNvSpPr txBox="1">
+            <a:spLocks/>
+          </p:cNvSpPr>
+          <p:nvPr/>
+        </p:nvSpPr>
+        <p:spPr>
+          <a:xfrm>
+            <a:off x="695324" y="387600"/>
+            <a:ext cx="10801351" cy="628400"/>
+          </a:xfrm>
+          <a:prstGeom prst="rect">
+            <a:avLst/>
+          </a:prstGeom>
+        </p:spPr>
+        <p:txBody>
+          <a:bodyPr vert="horz" lIns="91440" tIns="45720" rIns="91440" bIns="45720" rtlCol="0" anchor="ctr">
+            <a:normAutofit/>
+          </a:bodyPr>
+          <a:lstStyle>
+            <a:lvl1pPr algn="ctr" defTabSz="914400" rtl="0" eaLnBrk="1" latinLnBrk="1" hangingPunct="1">
+              <a:lnSpc>
+                <a:spcPct val="90000"/>
+              </a:lnSpc>
+              <a:spcBef>
+                <a:spcPct val="0"/>
+              </a:spcBef>
+              <a:buNone/>
+              <a:defRPr sz="6000" kern="1200">
+                <a:solidFill>
+                  <a:schemeClr val="tx1"/>
+                </a:solidFill>
+                <a:latin typeface="+mj-lt"/>
+                <a:ea typeface="+mj-ea"/>
+                <a:cs typeface="+mj-cs"/>
+              </a:defRPr>
+            </a:lvl1pPr>
+          </a:lstStyle>
+          <a:p>
+            <a:pPr algn="l">
+              <a:lnSpc>
+                <a:spcPct val="100000"/>
+              </a:lnSpc>
+            </a:pPr>
+            <a:r>
+              <a:rPr lang="ko-KR" altLang="en-US" sz="3200" dirty="0"/>
+              <a:t>대응</a:t>
+            </a:r>
+            <a:r>
+              <a:rPr lang="en-US" altLang="ko-KR" sz="3200" dirty="0"/>
+              <a:t> </a:t>
+            </a:r>
+            <a:r>
+              <a:rPr lang="ko-KR" altLang="en-US" sz="3200" dirty="0"/>
+              <a:t>시스템 </a:t>
+            </a:r>
+            <a:r>
+              <a:rPr lang="en-US" altLang="ko-KR" sz="3200" dirty="0"/>
+              <a:t>– </a:t>
+            </a:r>
+            <a:r>
+              <a:rPr lang="ko-KR" altLang="en-US" sz="2400" dirty="0"/>
+              <a:t>대응의 종류</a:t>
+            </a:r>
+            <a:endParaRPr lang="en-US" altLang="ko-KR" sz="2400" dirty="0"/>
+          </a:p>
+        </p:txBody>
+      </p:sp>
+      <p:sp>
+        <p:nvSpPr>
+          <p:cNvPr id="2" name="직사각형 1">
+            <a:extLst>
+              <a:ext uri="{FF2B5EF4-FFF2-40B4-BE49-F238E27FC236}">
+                <a16:creationId xmlns:a16="http://schemas.microsoft.com/office/drawing/2014/main" id="{16EC0C48-5688-2026-FC96-4771E1D70F2D}"/>
+              </a:ext>
+            </a:extLst>
+          </p:cNvPr>
+          <p:cNvSpPr/>
+          <p:nvPr/>
+        </p:nvSpPr>
+        <p:spPr>
+          <a:xfrm>
+            <a:off x="2962380" y="3910206"/>
+            <a:ext cx="6267238" cy="1869899"/>
+          </a:xfrm>
+          <a:prstGeom prst="rect">
+            <a:avLst/>
+          </a:prstGeom>
+        </p:spPr>
+        <p:style>
+          <a:lnRef idx="2">
+            <a:schemeClr val="accent1">
+              <a:shade val="15000"/>
+            </a:schemeClr>
+          </a:lnRef>
+          <a:fillRef idx="1">
+            <a:schemeClr val="accent1"/>
+          </a:fillRef>
+          <a:effectRef idx="0">
+            <a:schemeClr val="accent1"/>
+          </a:effectRef>
+          <a:fontRef idx="minor">
+            <a:schemeClr val="lt1"/>
+          </a:fontRef>
+        </p:style>
+        <p:txBody>
+          <a:bodyPr rtlCol="0" anchor="ctr"/>
+          <a:lstStyle/>
+          <a:p>
+            <a:pPr algn="ctr"/>
+            <a:r>
+              <a:rPr lang="ko-KR" altLang="en-US" dirty="0"/>
+              <a:t>각 대응에 따른 장단점</a:t>
+            </a:r>
+          </a:p>
+        </p:txBody>
+      </p:sp>
+      <p:sp>
+        <p:nvSpPr>
+          <p:cNvPr id="6" name="타원 5">
+            <a:extLst>
+              <a:ext uri="{FF2B5EF4-FFF2-40B4-BE49-F238E27FC236}">
+                <a16:creationId xmlns:a16="http://schemas.microsoft.com/office/drawing/2014/main" id="{6F9CF0DC-FB06-D2D3-27D0-49E3B70B2E54}"/>
+              </a:ext>
+            </a:extLst>
+          </p:cNvPr>
+          <p:cNvSpPr/>
+          <p:nvPr/>
+        </p:nvSpPr>
+        <p:spPr>
+          <a:xfrm>
+            <a:off x="1717497" y="1560782"/>
+            <a:ext cx="1654138" cy="1387012"/>
+          </a:xfrm>
+          <a:prstGeom prst="ellipse">
+            <a:avLst/>
+          </a:prstGeom>
+        </p:spPr>
+        <p:style>
+          <a:lnRef idx="2">
+            <a:schemeClr val="accent1">
+              <a:shade val="15000"/>
+            </a:schemeClr>
+          </a:lnRef>
+          <a:fillRef idx="1">
+            <a:schemeClr val="accent1"/>
+          </a:fillRef>
+          <a:effectRef idx="0">
+            <a:schemeClr val="accent1"/>
+          </a:effectRef>
+          <a:fontRef idx="minor">
+            <a:schemeClr val="lt1"/>
+          </a:fontRef>
+        </p:style>
+        <p:txBody>
+          <a:bodyPr rtlCol="0" anchor="ctr"/>
+          <a:lstStyle/>
+          <a:p>
+            <a:pPr algn="ctr"/>
+            <a:r>
+              <a:rPr lang="ko-KR" altLang="en-US" sz="1600" dirty="0"/>
+              <a:t>막기 이미지</a:t>
+            </a:r>
+          </a:p>
+        </p:txBody>
+      </p:sp>
+      <p:sp>
+        <p:nvSpPr>
+          <p:cNvPr id="3" name="타원 2">
+            <a:extLst>
+              <a:ext uri="{FF2B5EF4-FFF2-40B4-BE49-F238E27FC236}">
+                <a16:creationId xmlns:a16="http://schemas.microsoft.com/office/drawing/2014/main" id="{388BC2E9-B307-E186-09D5-718DD11C70F4}"/>
+              </a:ext>
+            </a:extLst>
+          </p:cNvPr>
+          <p:cNvSpPr/>
+          <p:nvPr/>
+        </p:nvSpPr>
+        <p:spPr>
+          <a:xfrm>
+            <a:off x="2962380" y="1560782"/>
+            <a:ext cx="1654138" cy="1387012"/>
+          </a:xfrm>
+          <a:prstGeom prst="ellipse">
+            <a:avLst/>
+          </a:prstGeom>
+        </p:spPr>
+        <p:style>
+          <a:lnRef idx="2">
+            <a:schemeClr val="accent1">
+              <a:shade val="15000"/>
+            </a:schemeClr>
+          </a:lnRef>
+          <a:fillRef idx="1">
+            <a:schemeClr val="accent1"/>
+          </a:fillRef>
+          <a:effectRef idx="0">
+            <a:schemeClr val="accent1"/>
+          </a:effectRef>
+          <a:fontRef idx="minor">
+            <a:schemeClr val="lt1"/>
+          </a:fontRef>
+        </p:style>
+        <p:txBody>
+          <a:bodyPr rtlCol="0" anchor="ctr"/>
+          <a:lstStyle/>
+          <a:p>
+            <a:pPr algn="ctr"/>
+            <a:r>
+              <a:rPr lang="ko-KR" altLang="en-US" sz="1600" dirty="0"/>
+              <a:t>회피 이미지</a:t>
+            </a:r>
+          </a:p>
+        </p:txBody>
+      </p:sp>
+      <p:sp>
+        <p:nvSpPr>
+          <p:cNvPr id="10" name="타원 9">
+            <a:extLst>
+              <a:ext uri="{FF2B5EF4-FFF2-40B4-BE49-F238E27FC236}">
+                <a16:creationId xmlns:a16="http://schemas.microsoft.com/office/drawing/2014/main" id="{2BFD447E-A945-7ABE-3267-B8BB353E16DB}"/>
+              </a:ext>
+            </a:extLst>
+          </p:cNvPr>
+          <p:cNvSpPr/>
+          <p:nvPr/>
+        </p:nvSpPr>
+        <p:spPr>
+          <a:xfrm>
+            <a:off x="4207263" y="1560782"/>
+            <a:ext cx="1654138" cy="1387012"/>
+          </a:xfrm>
+          <a:prstGeom prst="ellipse">
+            <a:avLst/>
+          </a:prstGeom>
+        </p:spPr>
+        <p:style>
+          <a:lnRef idx="2">
+            <a:schemeClr val="accent1">
+              <a:shade val="15000"/>
+            </a:schemeClr>
+          </a:lnRef>
+          <a:fillRef idx="1">
+            <a:schemeClr val="accent1"/>
+          </a:fillRef>
+          <a:effectRef idx="0">
+            <a:schemeClr val="accent1"/>
+          </a:effectRef>
+          <a:fontRef idx="minor">
+            <a:schemeClr val="lt1"/>
+          </a:fontRef>
+        </p:style>
+        <p:txBody>
+          <a:bodyPr rtlCol="0" anchor="ctr"/>
+          <a:lstStyle/>
+          <a:p>
+            <a:pPr algn="ctr"/>
+            <a:r>
+              <a:rPr lang="ko-KR" altLang="en-US" sz="1600" dirty="0"/>
+              <a:t>반격</a:t>
+            </a:r>
+            <a:endParaRPr lang="en-US" altLang="ko-KR" sz="1600" dirty="0"/>
+          </a:p>
+          <a:p>
+            <a:pPr algn="ctr"/>
+            <a:r>
+              <a:rPr lang="ko-KR" altLang="en-US" sz="1600" dirty="0"/>
+              <a:t>이미지</a:t>
+            </a:r>
+          </a:p>
+        </p:txBody>
+      </p:sp>
+      <p:sp>
+        <p:nvSpPr>
+          <p:cNvPr id="11" name="타원 10">
+            <a:extLst>
+              <a:ext uri="{FF2B5EF4-FFF2-40B4-BE49-F238E27FC236}">
+                <a16:creationId xmlns:a16="http://schemas.microsoft.com/office/drawing/2014/main" id="{DA5130C8-D9CE-240C-EFC8-AF677BD4ED51}"/>
+              </a:ext>
+            </a:extLst>
+          </p:cNvPr>
+          <p:cNvSpPr/>
+          <p:nvPr/>
+        </p:nvSpPr>
+        <p:spPr>
+          <a:xfrm>
+            <a:off x="6697029" y="1442184"/>
+            <a:ext cx="4498361" cy="1624207"/>
+          </a:xfrm>
+          <a:prstGeom prst="ellipse">
+            <a:avLst/>
+          </a:prstGeom>
+        </p:spPr>
+        <p:style>
+          <a:lnRef idx="2">
+            <a:schemeClr val="accent1">
+              <a:shade val="15000"/>
+            </a:schemeClr>
+          </a:lnRef>
+          <a:fillRef idx="1">
+            <a:schemeClr val="accent1"/>
+          </a:fillRef>
+          <a:effectRef idx="0">
+            <a:schemeClr val="accent1"/>
+          </a:effectRef>
+          <a:fontRef idx="minor">
+            <a:schemeClr val="lt1"/>
+          </a:fontRef>
+        </p:style>
+        <p:txBody>
+          <a:bodyPr rtlCol="0" anchor="ctr"/>
+          <a:lstStyle/>
+          <a:p>
+            <a:pPr algn="ctr"/>
+            <a:r>
+              <a:rPr lang="ko-KR" altLang="en-US" sz="1600"/>
+              <a:t>받아치기 예시</a:t>
+            </a:r>
+            <a:endParaRPr lang="ko-KR" altLang="en-US" sz="1600" dirty="0"/>
+          </a:p>
+        </p:txBody>
+      </p:sp>
+    </p:spTree>
+    <p:extLst>
+      <p:ext uri="{BB962C8B-B14F-4D97-AF65-F5344CB8AC3E}">
+        <p14:creationId xmlns:p14="http://schemas.microsoft.com/office/powerpoint/2010/main" val="2051309267"/>
       </p:ext>
     </p:extLst>
   </p:cSld>

--- a/기획/SRPG/Srpg 기획서.pptx
+++ b/기획/SRPG/Srpg 기획서.pptx
@@ -5,10 +5,10 @@
     <p:sldMasterId id="2147484419" r:id="rId1"/>
   </p:sldMasterIdLst>
   <p:notesMasterIdLst>
-    <p:notesMasterId r:id="rId15"/>
+    <p:notesMasterId r:id="rId16"/>
   </p:notesMasterIdLst>
   <p:handoutMasterIdLst>
-    <p:handoutMasterId r:id="rId16"/>
+    <p:handoutMasterId r:id="rId17"/>
   </p:handoutMasterIdLst>
   <p:sldIdLst>
     <p:sldId id="256" r:id="rId2"/>
@@ -21,9 +21,10 @@
     <p:sldId id="407" r:id="rId9"/>
     <p:sldId id="409" r:id="rId10"/>
     <p:sldId id="411" r:id="rId11"/>
-    <p:sldId id="393" r:id="rId12"/>
-    <p:sldId id="391" r:id="rId13"/>
-    <p:sldId id="392" r:id="rId14"/>
+    <p:sldId id="412" r:id="rId12"/>
+    <p:sldId id="393" r:id="rId13"/>
+    <p:sldId id="391" r:id="rId14"/>
+    <p:sldId id="392" r:id="rId15"/>
   </p:sldIdLst>
   <p:sldSz cx="12192000" cy="6858000"/>
   <p:notesSz cx="6858000" cy="9144000"/>
@@ -263,7 +264,7 @@
           <a:p>
             <a:fld id="{4E9214C1-2863-45BA-A7C5-D5EA3C3D4C30}" type="datetimeFigureOut">
               <a:rPr lang="ko-KR" altLang="en-US" smtClean="0"/>
-              <a:t>2026-04-13</a:t>
+              <a:t>2026-04-14</a:t>
             </a:fld>
             <a:endParaRPr lang="ko-KR" altLang="en-US"/>
           </a:p>
@@ -428,7 +429,7 @@
           <a:p>
             <a:fld id="{8F563C85-90F6-445D-9B5B-8ABB00FB3043}" type="datetimeFigureOut">
               <a:rPr lang="ko-KR" altLang="en-US" smtClean="0"/>
-              <a:t>2026-04-13</a:t>
+              <a:t>2026-04-14</a:t>
             </a:fld>
             <a:endParaRPr lang="ko-KR" altLang="en-US"/>
           </a:p>
@@ -975,7 +976,7 @@
             </a:pPr>
             <a:fld id="{B9320F77-B9A0-41C5-862A-B4B631284C64}" type="datetime1">
               <a:rPr lang="en-GB" altLang="en-US" smtClean="0"/>
-              <a:t>13/04/2026</a:t>
+              <a:t>14/04/2026</a:t>
             </a:fld>
             <a:endParaRPr lang="ko-KR" altLang="en-US"/>
           </a:p>
@@ -1334,7 +1335,7 @@
             </a:pPr>
             <a:fld id="{B9320F77-B9A0-41C5-862A-B4B631284C64}" type="datetime1">
               <a:rPr lang="en-GB" altLang="en-US" smtClean="0"/>
-              <a:t>13/04/2026</a:t>
+              <a:t>14/04/2026</a:t>
             </a:fld>
             <a:endParaRPr lang="ko-KR" altLang="en-US"/>
           </a:p>
@@ -1530,7 +1531,7 @@
             </a:pPr>
             <a:fld id="{B9320F77-B9A0-41C5-862A-B4B631284C64}" type="datetime1">
               <a:rPr lang="en-GB" altLang="en-US" smtClean="0"/>
-              <a:t>13/04/2026</a:t>
+              <a:t>14/04/2026</a:t>
             </a:fld>
             <a:endParaRPr lang="ko-KR" altLang="en-US"/>
           </a:p>
@@ -1795,7 +1796,7 @@
             </a:pPr>
             <a:fld id="{B9320F77-B9A0-41C5-862A-B4B631284C64}" type="datetime1">
               <a:rPr lang="en-GB" altLang="en-US" smtClean="0"/>
-              <a:t>13/04/2026</a:t>
+              <a:t>14/04/2026</a:t>
             </a:fld>
             <a:endParaRPr lang="ko-KR" altLang="en-US"/>
           </a:p>
@@ -2223,7 +2224,7 @@
             </a:pPr>
             <a:fld id="{B9320F77-B9A0-41C5-862A-B4B631284C64}" type="datetime1">
               <a:rPr lang="en-GB" altLang="en-US" smtClean="0"/>
-              <a:t>13/04/2026</a:t>
+              <a:t>14/04/2026</a:t>
             </a:fld>
             <a:endParaRPr lang="ko-KR" altLang="en-US"/>
           </a:p>
@@ -2764,7 +2765,7 @@
             </a:pPr>
             <a:fld id="{B9320F77-B9A0-41C5-862A-B4B631284C64}" type="datetime1">
               <a:rPr lang="en-GB" altLang="en-US" smtClean="0"/>
-              <a:t>13/04/2026</a:t>
+              <a:t>14/04/2026</a:t>
             </a:fld>
             <a:endParaRPr lang="ko-KR" altLang="en-US"/>
           </a:p>
@@ -3632,7 +3633,7 @@
             </a:pPr>
             <a:fld id="{B9320F77-B9A0-41C5-862A-B4B631284C64}" type="datetime1">
               <a:rPr lang="en-GB" altLang="en-US" smtClean="0"/>
-              <a:t>13/04/2026</a:t>
+              <a:t>14/04/2026</a:t>
             </a:fld>
             <a:endParaRPr lang="ko-KR" altLang="en-US"/>
           </a:p>
@@ -3806,7 +3807,7 @@
             </a:pPr>
             <a:fld id="{B9320F77-B9A0-41C5-862A-B4B631284C64}" type="datetime1">
               <a:rPr lang="en-GB" altLang="en-US" smtClean="0"/>
-              <a:t>13/04/2026</a:t>
+              <a:t>14/04/2026</a:t>
             </a:fld>
             <a:endParaRPr lang="ko-KR" altLang="en-US"/>
           </a:p>
@@ -3995,7 +3996,7 @@
             </a:pPr>
             <a:fld id="{B9320F77-B9A0-41C5-862A-B4B631284C64}" type="datetime1">
               <a:rPr lang="en-GB" altLang="en-US" smtClean="0"/>
-              <a:t>13/04/2026</a:t>
+              <a:t>14/04/2026</a:t>
             </a:fld>
             <a:endParaRPr lang="ko-KR" altLang="en-US"/>
           </a:p>
@@ -4170,7 +4171,7 @@
             </a:pPr>
             <a:fld id="{B9320F77-B9A0-41C5-862A-B4B631284C64}" type="datetime1">
               <a:rPr lang="en-GB" altLang="en-US" smtClean="0"/>
-              <a:t>13/04/2026</a:t>
+              <a:t>14/04/2026</a:t>
             </a:fld>
             <a:endParaRPr lang="ko-KR" altLang="en-US"/>
           </a:p>
@@ -4418,7 +4419,7 @@
             </a:pPr>
             <a:fld id="{B9320F77-B9A0-41C5-862A-B4B631284C64}" type="datetime1">
               <a:rPr lang="en-GB" altLang="en-US" smtClean="0"/>
-              <a:t>13/04/2026</a:t>
+              <a:t>14/04/2026</a:t>
             </a:fld>
             <a:endParaRPr lang="ko-KR" altLang="en-US"/>
           </a:p>
@@ -4659,7 +4660,7 @@
             </a:pPr>
             <a:fld id="{B9320F77-B9A0-41C5-862A-B4B631284C64}" type="datetime1">
               <a:rPr lang="en-GB" altLang="en-US" smtClean="0"/>
-              <a:t>13/04/2026</a:t>
+              <a:t>14/04/2026</a:t>
             </a:fld>
             <a:endParaRPr lang="ko-KR" altLang="en-US"/>
           </a:p>
@@ -5130,7 +5131,7 @@
             </a:pPr>
             <a:fld id="{B9320F77-B9A0-41C5-862A-B4B631284C64}" type="datetime1">
               <a:rPr lang="en-GB" altLang="en-US" smtClean="0"/>
-              <a:t>13/04/2026</a:t>
+              <a:t>14/04/2026</a:t>
             </a:fld>
             <a:endParaRPr lang="ko-KR" altLang="en-US"/>
           </a:p>
@@ -5253,7 +5254,7 @@
             </a:pPr>
             <a:fld id="{B9320F77-B9A0-41C5-862A-B4B631284C64}" type="datetime1">
               <a:rPr lang="en-GB" altLang="en-US" smtClean="0"/>
-              <a:t>13/04/2026</a:t>
+              <a:t>14/04/2026</a:t>
             </a:fld>
             <a:endParaRPr lang="ko-KR" altLang="en-US"/>
           </a:p>
@@ -5353,7 +5354,7 @@
             </a:pPr>
             <a:fld id="{B9320F77-B9A0-41C5-862A-B4B631284C64}" type="datetime1">
               <a:rPr lang="en-GB" altLang="en-US" smtClean="0"/>
-              <a:t>13/04/2026</a:t>
+              <a:t>14/04/2026</a:t>
             </a:fld>
             <a:endParaRPr lang="ko-KR" altLang="en-US"/>
           </a:p>
@@ -5613,7 +5614,7 @@
             </a:pPr>
             <a:fld id="{B9320F77-B9A0-41C5-862A-B4B631284C64}" type="datetime1">
               <a:rPr lang="en-GB" altLang="en-US" smtClean="0"/>
-              <a:t>13/04/2026</a:t>
+              <a:t>14/04/2026</a:t>
             </a:fld>
             <a:endParaRPr lang="ko-KR" altLang="en-US"/>
           </a:p>
@@ -5918,7 +5919,7 @@
             </a:pPr>
             <a:fld id="{B9320F77-B9A0-41C5-862A-B4B631284C64}" type="datetime1">
               <a:rPr lang="en-GB" altLang="en-US" smtClean="0"/>
-              <a:t>13/04/2026</a:t>
+              <a:t>14/04/2026</a:t>
             </a:fld>
             <a:endParaRPr lang="ko-KR" altLang="en-US"/>
           </a:p>
@@ -6157,7 +6158,7 @@
             </a:pPr>
             <a:fld id="{B9320F77-B9A0-41C5-862A-B4B631284C64}" type="datetime1">
               <a:rPr lang="en-GB" altLang="en-US" smtClean="0"/>
-              <a:t>13/04/2026</a:t>
+              <a:t>14/04/2026</a:t>
             </a:fld>
             <a:endParaRPr lang="ko-KR" altLang="en-US"/>
           </a:p>
@@ -7321,6 +7322,2944 @@
   <p:cSld>
     <p:spTree>
       <p:nvGrpSpPr>
+        <p:cNvPr id="1" name=""/>
+        <p:cNvGrpSpPr/>
+        <p:nvPr/>
+      </p:nvGrpSpPr>
+      <p:grpSpPr>
+        <a:xfrm>
+          <a:off x="0" y="0"/>
+          <a:ext cx="0" cy="0"/>
+          <a:chOff x="0" y="0"/>
+          <a:chExt cx="0" cy="0"/>
+        </a:xfrm>
+      </p:grpSpPr>
+      <p:graphicFrame>
+        <p:nvGraphicFramePr>
+          <p:cNvPr id="5" name="표 4">
+            <a:extLst>
+              <a:ext uri="{FF2B5EF4-FFF2-40B4-BE49-F238E27FC236}">
+                <a16:creationId xmlns:a16="http://schemas.microsoft.com/office/drawing/2014/main" id="{A022E8D9-7177-4E66-AA34-B3A77A773FFE}"/>
+              </a:ext>
+            </a:extLst>
+          </p:cNvPr>
+          <p:cNvGraphicFramePr>
+            <a:graphicFrameLocks noGrp="1"/>
+          </p:cNvGraphicFramePr>
+          <p:nvPr>
+            <p:extLst>
+              <p:ext uri="{D42A27DB-BD31-4B8C-83A1-F6EECF244321}">
+                <p14:modId xmlns:p14="http://schemas.microsoft.com/office/powerpoint/2010/main" val="738276175"/>
+              </p:ext>
+            </p:extLst>
+          </p:nvPr>
+        </p:nvGraphicFramePr>
+        <p:xfrm>
+          <a:off x="2119221" y="748559"/>
+          <a:ext cx="4483481" cy="3876132"/>
+        </p:xfrm>
+        <a:graphic>
+          <a:graphicData uri="http://schemas.openxmlformats.org/drawingml/2006/table">
+            <a:tbl>
+              <a:tblPr/>
+              <a:tblGrid>
+                <a:gridCol w="715338">
+                  <a:extLst>
+                    <a:ext uri="{9D8B030D-6E8A-4147-A177-3AD203B41FA5}">
+                      <a16:colId xmlns:a16="http://schemas.microsoft.com/office/drawing/2014/main" val="1381190679"/>
+                    </a:ext>
+                  </a:extLst>
+                </a:gridCol>
+                <a:gridCol w="818526">
+                  <a:extLst>
+                    <a:ext uri="{9D8B030D-6E8A-4147-A177-3AD203B41FA5}">
+                      <a16:colId xmlns:a16="http://schemas.microsoft.com/office/drawing/2014/main" val="1271831159"/>
+                    </a:ext>
+                  </a:extLst>
+                </a:gridCol>
+                <a:gridCol w="818526">
+                  <a:extLst>
+                    <a:ext uri="{9D8B030D-6E8A-4147-A177-3AD203B41FA5}">
+                      <a16:colId xmlns:a16="http://schemas.microsoft.com/office/drawing/2014/main" val="3406441402"/>
+                    </a:ext>
+                  </a:extLst>
+                </a:gridCol>
+                <a:gridCol w="715338">
+                  <a:extLst>
+                    <a:ext uri="{9D8B030D-6E8A-4147-A177-3AD203B41FA5}">
+                      <a16:colId xmlns:a16="http://schemas.microsoft.com/office/drawing/2014/main" val="2483275385"/>
+                    </a:ext>
+                  </a:extLst>
+                </a:gridCol>
+                <a:gridCol w="715338">
+                  <a:extLst>
+                    <a:ext uri="{9D8B030D-6E8A-4147-A177-3AD203B41FA5}">
+                      <a16:colId xmlns:a16="http://schemas.microsoft.com/office/drawing/2014/main" val="3597317050"/>
+                    </a:ext>
+                  </a:extLst>
+                </a:gridCol>
+                <a:gridCol w="700415">
+                  <a:extLst>
+                    <a:ext uri="{9D8B030D-6E8A-4147-A177-3AD203B41FA5}">
+                      <a16:colId xmlns:a16="http://schemas.microsoft.com/office/drawing/2014/main" val="3880302435"/>
+                    </a:ext>
+                  </a:extLst>
+                </a:gridCol>
+              </a:tblGrid>
+              <a:tr h="0">
+                <a:tc>
+                  <a:txBody>
+                    <a:bodyPr/>
+                    <a:lstStyle/>
+                    <a:p>
+                      <a:pPr algn="ctr" rtl="0"/>
+                      <a:r>
+                        <a:rPr lang="en-US" sz="1600" b="1" dirty="0">
+                          <a:solidFill>
+                            <a:schemeClr val="tx1"/>
+                          </a:solidFill>
+                          <a:effectLst/>
+                          <a:latin typeface="+mj-lt"/>
+                        </a:rPr>
+                        <a:t>vs</a:t>
+                      </a:r>
+                    </a:p>
+                  </a:txBody>
+                  <a:tcPr marL="59695" marR="74618" marT="99491" marB="99491" anchor="ctr">
+                    <a:lnL w="12700" cap="flat" cmpd="sng" algn="ctr">
+                      <a:solidFill>
+                        <a:schemeClr val="tx1"/>
+                      </a:solidFill>
+                      <a:prstDash val="solid"/>
+                      <a:round/>
+                      <a:headEnd type="none" w="med" len="med"/>
+                      <a:tailEnd type="none" w="med" len="med"/>
+                    </a:lnL>
+                    <a:lnR w="12700" cap="flat" cmpd="sng" algn="ctr">
+                      <a:solidFill>
+                        <a:schemeClr val="tx1"/>
+                      </a:solidFill>
+                      <a:prstDash val="solid"/>
+                      <a:round/>
+                      <a:headEnd type="none" w="med" len="med"/>
+                      <a:tailEnd type="none" w="med" len="med"/>
+                    </a:lnR>
+                    <a:lnT w="12700" cap="flat" cmpd="sng" algn="ctr">
+                      <a:solidFill>
+                        <a:schemeClr val="tx1"/>
+                      </a:solidFill>
+                      <a:prstDash val="solid"/>
+                      <a:round/>
+                      <a:headEnd type="none" w="med" len="med"/>
+                      <a:tailEnd type="none" w="med" len="med"/>
+                    </a:lnT>
+                    <a:lnB w="12700" cap="flat" cmpd="sng" algn="ctr">
+                      <a:solidFill>
+                        <a:schemeClr val="tx1"/>
+                      </a:solidFill>
+                      <a:prstDash val="solid"/>
+                      <a:round/>
+                      <a:headEnd type="none" w="med" len="med"/>
+                      <a:tailEnd type="none" w="med" len="med"/>
+                    </a:lnB>
+                    <a:lnTlToBr w="12700" cmpd="sng">
+                      <a:noFill/>
+                      <a:prstDash val="solid"/>
+                    </a:lnTlToBr>
+                    <a:lnBlToTr w="12700" cmpd="sng">
+                      <a:noFill/>
+                      <a:prstDash val="solid"/>
+                    </a:lnBlToTr>
+                  </a:tcPr>
+                </a:tc>
+                <a:tc>
+                  <a:txBody>
+                    <a:bodyPr/>
+                    <a:lstStyle/>
+                    <a:p>
+                      <a:pPr algn="ctr" rtl="0"/>
+                      <a:r>
+                        <a:rPr lang="en-US" altLang="ko-KR" sz="1600" b="1" dirty="0">
+                          <a:solidFill>
+                            <a:schemeClr val="tx1"/>
+                          </a:solidFill>
+                          <a:effectLst/>
+                          <a:latin typeface="+mj-lt"/>
+                        </a:rPr>
+                        <a:t>(2, 6)</a:t>
+                      </a:r>
+                      <a:endParaRPr lang="ko-KR" altLang="en-US" sz="1600" b="1" dirty="0">
+                        <a:solidFill>
+                          <a:schemeClr val="tx1"/>
+                        </a:solidFill>
+                        <a:effectLst/>
+                        <a:latin typeface="+mj-lt"/>
+                      </a:endParaRPr>
+                    </a:p>
+                  </a:txBody>
+                  <a:tcPr marL="59695" marR="74618" marT="99491" marB="99491" anchor="ctr">
+                    <a:lnL w="12700" cap="flat" cmpd="sng" algn="ctr">
+                      <a:solidFill>
+                        <a:schemeClr val="tx1"/>
+                      </a:solidFill>
+                      <a:prstDash val="solid"/>
+                      <a:round/>
+                      <a:headEnd type="none" w="med" len="med"/>
+                      <a:tailEnd type="none" w="med" len="med"/>
+                    </a:lnL>
+                    <a:lnR w="12700" cap="flat" cmpd="sng" algn="ctr">
+                      <a:solidFill>
+                        <a:schemeClr val="tx1"/>
+                      </a:solidFill>
+                      <a:prstDash val="solid"/>
+                      <a:round/>
+                      <a:headEnd type="none" w="med" len="med"/>
+                      <a:tailEnd type="none" w="med" len="med"/>
+                    </a:lnR>
+                    <a:lnT w="12700" cap="flat" cmpd="sng" algn="ctr">
+                      <a:solidFill>
+                        <a:schemeClr val="tx1"/>
+                      </a:solidFill>
+                      <a:prstDash val="solid"/>
+                      <a:round/>
+                      <a:headEnd type="none" w="med" len="med"/>
+                      <a:tailEnd type="none" w="med" len="med"/>
+                    </a:lnT>
+                    <a:lnB w="12700" cap="flat" cmpd="sng" algn="ctr">
+                      <a:solidFill>
+                        <a:schemeClr val="tx1"/>
+                      </a:solidFill>
+                      <a:prstDash val="solid"/>
+                      <a:round/>
+                      <a:headEnd type="none" w="med" len="med"/>
+                      <a:tailEnd type="none" w="med" len="med"/>
+                    </a:lnB>
+                    <a:lnTlToBr w="12700" cmpd="sng">
+                      <a:noFill/>
+                      <a:prstDash val="solid"/>
+                    </a:lnTlToBr>
+                    <a:lnBlToTr w="12700" cmpd="sng">
+                      <a:noFill/>
+                      <a:prstDash val="solid"/>
+                    </a:lnBlToTr>
+                  </a:tcPr>
+                </a:tc>
+                <a:tc>
+                  <a:txBody>
+                    <a:bodyPr/>
+                    <a:lstStyle/>
+                    <a:p>
+                      <a:pPr algn="ctr" rtl="0"/>
+                      <a:r>
+                        <a:rPr lang="en-US" altLang="ko-KR" sz="1600" b="1">
+                          <a:solidFill>
+                            <a:schemeClr val="tx1"/>
+                          </a:solidFill>
+                          <a:effectLst/>
+                          <a:latin typeface="+mj-lt"/>
+                        </a:rPr>
+                        <a:t>(3, 4)</a:t>
+                      </a:r>
+                      <a:endParaRPr lang="ko-KR" altLang="en-US" sz="1600" b="1">
+                        <a:solidFill>
+                          <a:schemeClr val="tx1"/>
+                        </a:solidFill>
+                        <a:effectLst/>
+                        <a:latin typeface="+mj-lt"/>
+                      </a:endParaRPr>
+                    </a:p>
+                  </a:txBody>
+                  <a:tcPr marL="59695" marR="74618" marT="99491" marB="99491" anchor="ctr">
+                    <a:lnL w="12700" cap="flat" cmpd="sng" algn="ctr">
+                      <a:solidFill>
+                        <a:schemeClr val="tx1"/>
+                      </a:solidFill>
+                      <a:prstDash val="solid"/>
+                      <a:round/>
+                      <a:headEnd type="none" w="med" len="med"/>
+                      <a:tailEnd type="none" w="med" len="med"/>
+                    </a:lnL>
+                    <a:lnR w="12700" cap="flat" cmpd="sng" algn="ctr">
+                      <a:solidFill>
+                        <a:schemeClr val="tx1"/>
+                      </a:solidFill>
+                      <a:prstDash val="solid"/>
+                      <a:round/>
+                      <a:headEnd type="none" w="med" len="med"/>
+                      <a:tailEnd type="none" w="med" len="med"/>
+                    </a:lnR>
+                    <a:lnT w="12700" cap="flat" cmpd="sng" algn="ctr">
+                      <a:solidFill>
+                        <a:schemeClr val="tx1"/>
+                      </a:solidFill>
+                      <a:prstDash val="solid"/>
+                      <a:round/>
+                      <a:headEnd type="none" w="med" len="med"/>
+                      <a:tailEnd type="none" w="med" len="med"/>
+                    </a:lnT>
+                    <a:lnB w="12700" cap="flat" cmpd="sng" algn="ctr">
+                      <a:solidFill>
+                        <a:schemeClr val="tx1"/>
+                      </a:solidFill>
+                      <a:prstDash val="solid"/>
+                      <a:round/>
+                      <a:headEnd type="none" w="med" len="med"/>
+                      <a:tailEnd type="none" w="med" len="med"/>
+                    </a:lnB>
+                    <a:lnTlToBr w="12700" cmpd="sng">
+                      <a:noFill/>
+                      <a:prstDash val="solid"/>
+                    </a:lnTlToBr>
+                    <a:lnBlToTr w="12700" cmpd="sng">
+                      <a:noFill/>
+                      <a:prstDash val="solid"/>
+                    </a:lnBlToTr>
+                  </a:tcPr>
+                </a:tc>
+                <a:tc>
+                  <a:txBody>
+                    <a:bodyPr/>
+                    <a:lstStyle/>
+                    <a:p>
+                      <a:pPr algn="ctr" rtl="0"/>
+                      <a:r>
+                        <a:rPr lang="en-US" altLang="ko-KR" sz="1600" b="1">
+                          <a:solidFill>
+                            <a:schemeClr val="tx1"/>
+                          </a:solidFill>
+                          <a:effectLst/>
+                          <a:latin typeface="+mj-lt"/>
+                        </a:rPr>
+                        <a:t>(4, 3)</a:t>
+                      </a:r>
+                      <a:endParaRPr lang="ko-KR" altLang="en-US" sz="1600" b="1">
+                        <a:solidFill>
+                          <a:schemeClr val="tx1"/>
+                        </a:solidFill>
+                        <a:effectLst/>
+                        <a:latin typeface="+mj-lt"/>
+                      </a:endParaRPr>
+                    </a:p>
+                  </a:txBody>
+                  <a:tcPr marL="59695" marR="74618" marT="99491" marB="99491" anchor="ctr">
+                    <a:lnL w="12700" cap="flat" cmpd="sng" algn="ctr">
+                      <a:solidFill>
+                        <a:schemeClr val="tx1"/>
+                      </a:solidFill>
+                      <a:prstDash val="solid"/>
+                      <a:round/>
+                      <a:headEnd type="none" w="med" len="med"/>
+                      <a:tailEnd type="none" w="med" len="med"/>
+                    </a:lnL>
+                    <a:lnR w="12700" cap="flat" cmpd="sng" algn="ctr">
+                      <a:solidFill>
+                        <a:schemeClr val="tx1"/>
+                      </a:solidFill>
+                      <a:prstDash val="solid"/>
+                      <a:round/>
+                      <a:headEnd type="none" w="med" len="med"/>
+                      <a:tailEnd type="none" w="med" len="med"/>
+                    </a:lnR>
+                    <a:lnT w="12700" cap="flat" cmpd="sng" algn="ctr">
+                      <a:solidFill>
+                        <a:schemeClr val="tx1"/>
+                      </a:solidFill>
+                      <a:prstDash val="solid"/>
+                      <a:round/>
+                      <a:headEnd type="none" w="med" len="med"/>
+                      <a:tailEnd type="none" w="med" len="med"/>
+                    </a:lnT>
+                    <a:lnB w="12700" cap="flat" cmpd="sng" algn="ctr">
+                      <a:solidFill>
+                        <a:schemeClr val="tx1"/>
+                      </a:solidFill>
+                      <a:prstDash val="solid"/>
+                      <a:round/>
+                      <a:headEnd type="none" w="med" len="med"/>
+                      <a:tailEnd type="none" w="med" len="med"/>
+                    </a:lnB>
+                    <a:lnTlToBr w="12700" cmpd="sng">
+                      <a:noFill/>
+                      <a:prstDash val="solid"/>
+                    </a:lnTlToBr>
+                    <a:lnBlToTr w="12700" cmpd="sng">
+                      <a:noFill/>
+                      <a:prstDash val="solid"/>
+                    </a:lnBlToTr>
+                  </a:tcPr>
+                </a:tc>
+                <a:tc>
+                  <a:txBody>
+                    <a:bodyPr/>
+                    <a:lstStyle/>
+                    <a:p>
+                      <a:pPr algn="ctr" rtl="0"/>
+                      <a:r>
+                        <a:rPr lang="en-US" altLang="ko-KR" sz="1600" b="1">
+                          <a:solidFill>
+                            <a:schemeClr val="tx1"/>
+                          </a:solidFill>
+                          <a:effectLst/>
+                          <a:latin typeface="+mj-lt"/>
+                        </a:rPr>
+                        <a:t>(6, 2)</a:t>
+                      </a:r>
+                      <a:endParaRPr lang="ko-KR" altLang="en-US" sz="1600" b="1">
+                        <a:solidFill>
+                          <a:schemeClr val="tx1"/>
+                        </a:solidFill>
+                        <a:effectLst/>
+                        <a:latin typeface="+mj-lt"/>
+                      </a:endParaRPr>
+                    </a:p>
+                  </a:txBody>
+                  <a:tcPr marL="59695" marR="74618" marT="99491" marB="99491" anchor="ctr">
+                    <a:lnL w="12700" cap="flat" cmpd="sng" algn="ctr">
+                      <a:solidFill>
+                        <a:schemeClr val="tx1"/>
+                      </a:solidFill>
+                      <a:prstDash val="solid"/>
+                      <a:round/>
+                      <a:headEnd type="none" w="med" len="med"/>
+                      <a:tailEnd type="none" w="med" len="med"/>
+                    </a:lnL>
+                    <a:lnR w="12700" cap="flat" cmpd="sng" algn="ctr">
+                      <a:solidFill>
+                        <a:schemeClr val="tx1"/>
+                      </a:solidFill>
+                      <a:prstDash val="solid"/>
+                      <a:round/>
+                      <a:headEnd type="none" w="med" len="med"/>
+                      <a:tailEnd type="none" w="med" len="med"/>
+                    </a:lnR>
+                    <a:lnT w="12700" cap="flat" cmpd="sng" algn="ctr">
+                      <a:solidFill>
+                        <a:schemeClr val="tx1"/>
+                      </a:solidFill>
+                      <a:prstDash val="solid"/>
+                      <a:round/>
+                      <a:headEnd type="none" w="med" len="med"/>
+                      <a:tailEnd type="none" w="med" len="med"/>
+                    </a:lnT>
+                    <a:lnB w="12700" cap="flat" cmpd="sng" algn="ctr">
+                      <a:solidFill>
+                        <a:schemeClr val="tx1"/>
+                      </a:solidFill>
+                      <a:prstDash val="solid"/>
+                      <a:round/>
+                      <a:headEnd type="none" w="med" len="med"/>
+                      <a:tailEnd type="none" w="med" len="med"/>
+                    </a:lnB>
+                    <a:lnTlToBr w="12700" cmpd="sng">
+                      <a:noFill/>
+                      <a:prstDash val="solid"/>
+                    </a:lnTlToBr>
+                    <a:lnBlToTr w="12700" cmpd="sng">
+                      <a:noFill/>
+                      <a:prstDash val="solid"/>
+                    </a:lnBlToTr>
+                  </a:tcPr>
+                </a:tc>
+                <a:tc>
+                  <a:txBody>
+                    <a:bodyPr/>
+                    <a:lstStyle/>
+                    <a:p>
+                      <a:pPr algn="ctr" rtl="0"/>
+                      <a:r>
+                        <a:rPr lang="en-US" altLang="ko-KR" sz="1600" b="1">
+                          <a:solidFill>
+                            <a:schemeClr val="tx1"/>
+                          </a:solidFill>
+                          <a:effectLst/>
+                          <a:latin typeface="+mj-lt"/>
+                        </a:rPr>
+                        <a:t>(12, 1)</a:t>
+                      </a:r>
+                      <a:endParaRPr lang="ko-KR" altLang="en-US" sz="1600" b="1">
+                        <a:solidFill>
+                          <a:schemeClr val="tx1"/>
+                        </a:solidFill>
+                        <a:effectLst/>
+                        <a:latin typeface="+mj-lt"/>
+                      </a:endParaRPr>
+                    </a:p>
+                  </a:txBody>
+                  <a:tcPr marL="59695" marR="59695" marT="99491" marB="99491" anchor="ctr">
+                    <a:lnL w="12700" cap="flat" cmpd="sng" algn="ctr">
+                      <a:solidFill>
+                        <a:schemeClr val="tx1"/>
+                      </a:solidFill>
+                      <a:prstDash val="solid"/>
+                      <a:round/>
+                      <a:headEnd type="none" w="med" len="med"/>
+                      <a:tailEnd type="none" w="med" len="med"/>
+                    </a:lnL>
+                    <a:lnR w="12700" cap="flat" cmpd="sng" algn="ctr">
+                      <a:solidFill>
+                        <a:schemeClr val="tx1"/>
+                      </a:solidFill>
+                      <a:prstDash val="solid"/>
+                      <a:round/>
+                      <a:headEnd type="none" w="med" len="med"/>
+                      <a:tailEnd type="none" w="med" len="med"/>
+                    </a:lnR>
+                    <a:lnT w="12700" cap="flat" cmpd="sng" algn="ctr">
+                      <a:solidFill>
+                        <a:schemeClr val="tx1"/>
+                      </a:solidFill>
+                      <a:prstDash val="solid"/>
+                      <a:round/>
+                      <a:headEnd type="none" w="med" len="med"/>
+                      <a:tailEnd type="none" w="med" len="med"/>
+                    </a:lnT>
+                    <a:lnB w="12700" cap="flat" cmpd="sng" algn="ctr">
+                      <a:solidFill>
+                        <a:schemeClr val="tx1"/>
+                      </a:solidFill>
+                      <a:prstDash val="solid"/>
+                      <a:round/>
+                      <a:headEnd type="none" w="med" len="med"/>
+                      <a:tailEnd type="none" w="med" len="med"/>
+                    </a:lnB>
+                    <a:lnTlToBr w="12700" cmpd="sng">
+                      <a:noFill/>
+                      <a:prstDash val="solid"/>
+                    </a:lnTlToBr>
+                    <a:lnBlToTr w="12700" cmpd="sng">
+                      <a:noFill/>
+                      <a:prstDash val="solid"/>
+                    </a:lnBlToTr>
+                  </a:tcPr>
+                </a:tc>
+                <a:extLst>
+                  <a:ext uri="{0D108BD9-81ED-4DB2-BD59-A6C34878D82A}">
+                    <a16:rowId xmlns:a16="http://schemas.microsoft.com/office/drawing/2014/main" val="3825002445"/>
+                  </a:ext>
+                </a:extLst>
+              </a:tr>
+              <a:tr h="448927">
+                <a:tc>
+                  <a:txBody>
+                    <a:bodyPr/>
+                    <a:lstStyle/>
+                    <a:p>
+                      <a:pPr algn="ctr" rtl="0"/>
+                      <a:r>
+                        <a:rPr lang="en-US" altLang="ko-KR" sz="1600" b="1" dirty="0">
+                          <a:solidFill>
+                            <a:schemeClr val="tx1"/>
+                          </a:solidFill>
+                          <a:effectLst/>
+                          <a:latin typeface="+mj-lt"/>
+                        </a:rPr>
+                        <a:t>(2, 6)</a:t>
+                      </a:r>
+                      <a:endParaRPr lang="ko-KR" altLang="en-US" sz="1600" b="1" dirty="0">
+                        <a:solidFill>
+                          <a:schemeClr val="tx1"/>
+                        </a:solidFill>
+                        <a:effectLst/>
+                        <a:latin typeface="+mj-lt"/>
+                      </a:endParaRPr>
+                    </a:p>
+                  </a:txBody>
+                  <a:tcPr marL="59695" marR="74618" marT="99491" marB="99491" anchor="ctr">
+                    <a:lnL w="12700" cap="flat" cmpd="sng" algn="ctr">
+                      <a:solidFill>
+                        <a:schemeClr val="tx1"/>
+                      </a:solidFill>
+                      <a:prstDash val="solid"/>
+                      <a:round/>
+                      <a:headEnd type="none" w="med" len="med"/>
+                      <a:tailEnd type="none" w="med" len="med"/>
+                    </a:lnL>
+                    <a:lnR w="12700" cap="flat" cmpd="sng" algn="ctr">
+                      <a:solidFill>
+                        <a:schemeClr val="tx1"/>
+                      </a:solidFill>
+                      <a:prstDash val="solid"/>
+                      <a:round/>
+                      <a:headEnd type="none" w="med" len="med"/>
+                      <a:tailEnd type="none" w="med" len="med"/>
+                    </a:lnR>
+                    <a:lnT w="12700" cap="flat" cmpd="sng" algn="ctr">
+                      <a:solidFill>
+                        <a:schemeClr val="tx1"/>
+                      </a:solidFill>
+                      <a:prstDash val="solid"/>
+                      <a:round/>
+                      <a:headEnd type="none" w="med" len="med"/>
+                      <a:tailEnd type="none" w="med" len="med"/>
+                    </a:lnT>
+                    <a:lnB w="12700" cap="flat" cmpd="sng" algn="ctr">
+                      <a:solidFill>
+                        <a:schemeClr val="tx1"/>
+                      </a:solidFill>
+                      <a:prstDash val="solid"/>
+                      <a:round/>
+                      <a:headEnd type="none" w="med" len="med"/>
+                      <a:tailEnd type="none" w="med" len="med"/>
+                    </a:lnB>
+                    <a:lnTlToBr w="12700" cmpd="sng">
+                      <a:noFill/>
+                      <a:prstDash val="solid"/>
+                    </a:lnTlToBr>
+                    <a:lnBlToTr w="12700" cmpd="sng">
+                      <a:noFill/>
+                      <a:prstDash val="solid"/>
+                    </a:lnBlToTr>
+                  </a:tcPr>
+                </a:tc>
+                <a:tc>
+                  <a:txBody>
+                    <a:bodyPr/>
+                    <a:lstStyle/>
+                    <a:p>
+                      <a:pPr algn="ctr" rtl="0"/>
+                      <a:r>
+                        <a:rPr lang="en-US" altLang="ko-KR" sz="1600" b="1" dirty="0">
+                          <a:solidFill>
+                            <a:schemeClr val="tx1"/>
+                          </a:solidFill>
+                          <a:effectLst/>
+                          <a:latin typeface="+mj-lt"/>
+                        </a:rPr>
+                        <a:t>-</a:t>
+                      </a:r>
+                    </a:p>
+                  </a:txBody>
+                  <a:tcPr marL="59695" marR="74618" marT="99491" marB="99491" anchor="ctr">
+                    <a:lnL w="12700" cap="flat" cmpd="sng" algn="ctr">
+                      <a:solidFill>
+                        <a:schemeClr val="tx1"/>
+                      </a:solidFill>
+                      <a:prstDash val="solid"/>
+                      <a:round/>
+                      <a:headEnd type="none" w="med" len="med"/>
+                      <a:tailEnd type="none" w="med" len="med"/>
+                    </a:lnL>
+                    <a:lnR w="12700" cap="flat" cmpd="sng" algn="ctr">
+                      <a:solidFill>
+                        <a:schemeClr val="tx1"/>
+                      </a:solidFill>
+                      <a:prstDash val="solid"/>
+                      <a:round/>
+                      <a:headEnd type="none" w="med" len="med"/>
+                      <a:tailEnd type="none" w="med" len="med"/>
+                    </a:lnR>
+                    <a:lnT w="12700" cap="flat" cmpd="sng" algn="ctr">
+                      <a:solidFill>
+                        <a:schemeClr val="tx1"/>
+                      </a:solidFill>
+                      <a:prstDash val="solid"/>
+                      <a:round/>
+                      <a:headEnd type="none" w="med" len="med"/>
+                      <a:tailEnd type="none" w="med" len="med"/>
+                    </a:lnT>
+                    <a:lnB w="12700" cap="flat" cmpd="sng" algn="ctr">
+                      <a:solidFill>
+                        <a:schemeClr val="tx1"/>
+                      </a:solidFill>
+                      <a:prstDash val="solid"/>
+                      <a:round/>
+                      <a:headEnd type="none" w="med" len="med"/>
+                      <a:tailEnd type="none" w="med" len="med"/>
+                    </a:lnB>
+                    <a:lnTlToBr w="12700" cmpd="sng">
+                      <a:noFill/>
+                      <a:prstDash val="solid"/>
+                    </a:lnTlToBr>
+                    <a:lnBlToTr w="12700" cmpd="sng">
+                      <a:noFill/>
+                      <a:prstDash val="solid"/>
+                    </a:lnBlToTr>
+                  </a:tcPr>
+                </a:tc>
+                <a:tc>
+                  <a:txBody>
+                    <a:bodyPr/>
+                    <a:lstStyle/>
+                    <a:p>
+                      <a:pPr algn="ctr" rtl="0"/>
+                      <a:r>
+                        <a:rPr lang="en-US" altLang="ko-KR" sz="1600" b="1" dirty="0">
+                          <a:solidFill>
+                            <a:schemeClr val="tx1"/>
+                          </a:solidFill>
+                          <a:effectLst/>
+                          <a:latin typeface="+mj-lt"/>
+                        </a:rPr>
+                        <a:t>63.4%</a:t>
+                      </a:r>
+                      <a:br>
+                        <a:rPr lang="ko-KR" altLang="en-US" sz="1600" b="1" dirty="0">
+                          <a:solidFill>
+                            <a:schemeClr val="tx1"/>
+                          </a:solidFill>
+                          <a:effectLst/>
+                          <a:latin typeface="+mj-lt"/>
+                        </a:rPr>
+                      </a:br>
+                      <a:r>
+                        <a:rPr lang="en-US" altLang="ko-KR" sz="1600" b="1" dirty="0">
+                          <a:solidFill>
+                            <a:schemeClr val="tx1"/>
+                          </a:solidFill>
+                          <a:effectLst/>
+                          <a:latin typeface="+mj-lt"/>
+                        </a:rPr>
+                        <a:t>(12.0%)</a:t>
+                      </a:r>
+                    </a:p>
+                  </a:txBody>
+                  <a:tcPr marL="59695" marR="74618" marT="99491" marB="99491" anchor="ctr">
+                    <a:lnL w="12700" cap="flat" cmpd="sng" algn="ctr">
+                      <a:solidFill>
+                        <a:schemeClr val="tx1"/>
+                      </a:solidFill>
+                      <a:prstDash val="solid"/>
+                      <a:round/>
+                      <a:headEnd type="none" w="med" len="med"/>
+                      <a:tailEnd type="none" w="med" len="med"/>
+                    </a:lnL>
+                    <a:lnR w="12700" cap="flat" cmpd="sng" algn="ctr">
+                      <a:solidFill>
+                        <a:schemeClr val="tx1"/>
+                      </a:solidFill>
+                      <a:prstDash val="solid"/>
+                      <a:round/>
+                      <a:headEnd type="none" w="med" len="med"/>
+                      <a:tailEnd type="none" w="med" len="med"/>
+                    </a:lnR>
+                    <a:lnT w="12700" cap="flat" cmpd="sng" algn="ctr">
+                      <a:solidFill>
+                        <a:schemeClr val="tx1"/>
+                      </a:solidFill>
+                      <a:prstDash val="solid"/>
+                      <a:round/>
+                      <a:headEnd type="none" w="med" len="med"/>
+                      <a:tailEnd type="none" w="med" len="med"/>
+                    </a:lnT>
+                    <a:lnB w="12700" cap="flat" cmpd="sng" algn="ctr">
+                      <a:solidFill>
+                        <a:schemeClr val="tx1"/>
+                      </a:solidFill>
+                      <a:prstDash val="solid"/>
+                      <a:round/>
+                      <a:headEnd type="none" w="med" len="med"/>
+                      <a:tailEnd type="none" w="med" len="med"/>
+                    </a:lnB>
+                    <a:lnTlToBr w="12700" cmpd="sng">
+                      <a:noFill/>
+                      <a:prstDash val="solid"/>
+                    </a:lnTlToBr>
+                    <a:lnBlToTr w="12700" cmpd="sng">
+                      <a:noFill/>
+                      <a:prstDash val="solid"/>
+                    </a:lnBlToTr>
+                  </a:tcPr>
+                </a:tc>
+                <a:tc>
+                  <a:txBody>
+                    <a:bodyPr/>
+                    <a:lstStyle/>
+                    <a:p>
+                      <a:pPr algn="ctr" rtl="0"/>
+                      <a:r>
+                        <a:rPr lang="en-US" altLang="ko-KR" sz="1600" b="1" dirty="0">
+                          <a:solidFill>
+                            <a:schemeClr val="tx1"/>
+                          </a:solidFill>
+                          <a:effectLst/>
+                          <a:latin typeface="+mj-lt"/>
+                        </a:rPr>
+                        <a:t>74.1%</a:t>
+                      </a:r>
+                      <a:br>
+                        <a:rPr lang="ko-KR" altLang="en-US" sz="1600" b="1" dirty="0">
+                          <a:solidFill>
+                            <a:schemeClr val="tx1"/>
+                          </a:solidFill>
+                          <a:effectLst/>
+                          <a:latin typeface="+mj-lt"/>
+                        </a:rPr>
+                      </a:br>
+                      <a:r>
+                        <a:rPr lang="en-US" altLang="ko-KR" sz="1600" b="1" dirty="0">
+                          <a:solidFill>
+                            <a:schemeClr val="tx1"/>
+                          </a:solidFill>
+                          <a:effectLst/>
+                          <a:latin typeface="+mj-lt"/>
+                        </a:rPr>
+                        <a:t>(9.7%)</a:t>
+                      </a:r>
+                    </a:p>
+                  </a:txBody>
+                  <a:tcPr marL="59695" marR="74618" marT="99491" marB="99491" anchor="ctr">
+                    <a:lnL w="12700" cap="flat" cmpd="sng" algn="ctr">
+                      <a:solidFill>
+                        <a:schemeClr val="tx1"/>
+                      </a:solidFill>
+                      <a:prstDash val="solid"/>
+                      <a:round/>
+                      <a:headEnd type="none" w="med" len="med"/>
+                      <a:tailEnd type="none" w="med" len="med"/>
+                    </a:lnL>
+                    <a:lnR w="12700" cap="flat" cmpd="sng" algn="ctr">
+                      <a:solidFill>
+                        <a:schemeClr val="tx1"/>
+                      </a:solidFill>
+                      <a:prstDash val="solid"/>
+                      <a:round/>
+                      <a:headEnd type="none" w="med" len="med"/>
+                      <a:tailEnd type="none" w="med" len="med"/>
+                    </a:lnR>
+                    <a:lnT w="12700" cap="flat" cmpd="sng" algn="ctr">
+                      <a:solidFill>
+                        <a:schemeClr val="tx1"/>
+                      </a:solidFill>
+                      <a:prstDash val="solid"/>
+                      <a:round/>
+                      <a:headEnd type="none" w="med" len="med"/>
+                      <a:tailEnd type="none" w="med" len="med"/>
+                    </a:lnT>
+                    <a:lnB w="12700" cap="flat" cmpd="sng" algn="ctr">
+                      <a:solidFill>
+                        <a:schemeClr val="tx1"/>
+                      </a:solidFill>
+                      <a:prstDash val="solid"/>
+                      <a:round/>
+                      <a:headEnd type="none" w="med" len="med"/>
+                      <a:tailEnd type="none" w="med" len="med"/>
+                    </a:lnB>
+                    <a:lnTlToBr w="12700" cmpd="sng">
+                      <a:noFill/>
+                      <a:prstDash val="solid"/>
+                    </a:lnTlToBr>
+                    <a:lnBlToTr w="12700" cmpd="sng">
+                      <a:noFill/>
+                      <a:prstDash val="solid"/>
+                    </a:lnBlToTr>
+                  </a:tcPr>
+                </a:tc>
+                <a:tc>
+                  <a:txBody>
+                    <a:bodyPr/>
+                    <a:lstStyle/>
+                    <a:p>
+                      <a:pPr algn="ctr" rtl="0"/>
+                      <a:r>
+                        <a:rPr lang="en-US" altLang="ko-KR" sz="1600" b="1" dirty="0">
+                          <a:solidFill>
+                            <a:schemeClr val="tx1"/>
+                          </a:solidFill>
+                          <a:effectLst/>
+                          <a:latin typeface="+mj-lt"/>
+                        </a:rPr>
+                        <a:t>83.1%</a:t>
+                      </a:r>
+                      <a:br>
+                        <a:rPr lang="ko-KR" altLang="en-US" sz="1600" b="1" dirty="0">
+                          <a:solidFill>
+                            <a:schemeClr val="tx1"/>
+                          </a:solidFill>
+                          <a:effectLst/>
+                          <a:latin typeface="+mj-lt"/>
+                        </a:rPr>
+                      </a:br>
+                      <a:r>
+                        <a:rPr lang="en-US" altLang="ko-KR" sz="1600" b="1" dirty="0">
+                          <a:solidFill>
+                            <a:schemeClr val="tx1"/>
+                          </a:solidFill>
+                          <a:effectLst/>
+                          <a:latin typeface="+mj-lt"/>
+                        </a:rPr>
+                        <a:t>(6.6%)</a:t>
+                      </a:r>
+                    </a:p>
+                  </a:txBody>
+                  <a:tcPr marL="59695" marR="74618" marT="99491" marB="99491" anchor="ctr">
+                    <a:lnL w="12700" cap="flat" cmpd="sng" algn="ctr">
+                      <a:solidFill>
+                        <a:schemeClr val="tx1"/>
+                      </a:solidFill>
+                      <a:prstDash val="solid"/>
+                      <a:round/>
+                      <a:headEnd type="none" w="med" len="med"/>
+                      <a:tailEnd type="none" w="med" len="med"/>
+                    </a:lnL>
+                    <a:lnR w="12700" cap="flat" cmpd="sng" algn="ctr">
+                      <a:solidFill>
+                        <a:schemeClr val="tx1"/>
+                      </a:solidFill>
+                      <a:prstDash val="solid"/>
+                      <a:round/>
+                      <a:headEnd type="none" w="med" len="med"/>
+                      <a:tailEnd type="none" w="med" len="med"/>
+                    </a:lnR>
+                    <a:lnT w="12700" cap="flat" cmpd="sng" algn="ctr">
+                      <a:solidFill>
+                        <a:schemeClr val="tx1"/>
+                      </a:solidFill>
+                      <a:prstDash val="solid"/>
+                      <a:round/>
+                      <a:headEnd type="none" w="med" len="med"/>
+                      <a:tailEnd type="none" w="med" len="med"/>
+                    </a:lnT>
+                    <a:lnB w="12700" cap="flat" cmpd="sng" algn="ctr">
+                      <a:solidFill>
+                        <a:schemeClr val="tx1"/>
+                      </a:solidFill>
+                      <a:prstDash val="solid"/>
+                      <a:round/>
+                      <a:headEnd type="none" w="med" len="med"/>
+                      <a:tailEnd type="none" w="med" len="med"/>
+                    </a:lnB>
+                    <a:lnTlToBr w="12700" cmpd="sng">
+                      <a:noFill/>
+                      <a:prstDash val="solid"/>
+                    </a:lnTlToBr>
+                    <a:lnBlToTr w="12700" cmpd="sng">
+                      <a:noFill/>
+                      <a:prstDash val="solid"/>
+                    </a:lnBlToTr>
+                  </a:tcPr>
+                </a:tc>
+                <a:tc>
+                  <a:txBody>
+                    <a:bodyPr/>
+                    <a:lstStyle/>
+                    <a:p>
+                      <a:pPr algn="ctr" rtl="0"/>
+                      <a:r>
+                        <a:rPr lang="en-US" altLang="ko-KR" sz="1600" b="1" dirty="0">
+                          <a:solidFill>
+                            <a:schemeClr val="tx1"/>
+                          </a:solidFill>
+                          <a:effectLst/>
+                          <a:latin typeface="+mj-lt"/>
+                        </a:rPr>
+                        <a:t>89.6%</a:t>
+                      </a:r>
+                      <a:br>
+                        <a:rPr lang="ko-KR" altLang="en-US" sz="1600" b="1" dirty="0">
+                          <a:solidFill>
+                            <a:schemeClr val="tx1"/>
+                          </a:solidFill>
+                          <a:effectLst/>
+                          <a:latin typeface="+mj-lt"/>
+                        </a:rPr>
+                      </a:br>
+                      <a:r>
+                        <a:rPr lang="en-US" altLang="ko-KR" sz="1600" b="1" dirty="0">
+                          <a:solidFill>
+                            <a:schemeClr val="tx1"/>
+                          </a:solidFill>
+                          <a:effectLst/>
+                          <a:latin typeface="+mj-lt"/>
+                        </a:rPr>
+                        <a:t>(3.9%)</a:t>
+                      </a:r>
+                    </a:p>
+                  </a:txBody>
+                  <a:tcPr marL="59695" marR="59695" marT="99491" marB="99491" anchor="ctr">
+                    <a:lnL w="12700" cap="flat" cmpd="sng" algn="ctr">
+                      <a:solidFill>
+                        <a:schemeClr val="tx1"/>
+                      </a:solidFill>
+                      <a:prstDash val="solid"/>
+                      <a:round/>
+                      <a:headEnd type="none" w="med" len="med"/>
+                      <a:tailEnd type="none" w="med" len="med"/>
+                    </a:lnL>
+                    <a:lnR w="12700" cap="flat" cmpd="sng" algn="ctr">
+                      <a:solidFill>
+                        <a:schemeClr val="tx1"/>
+                      </a:solidFill>
+                      <a:prstDash val="solid"/>
+                      <a:round/>
+                      <a:headEnd type="none" w="med" len="med"/>
+                      <a:tailEnd type="none" w="med" len="med"/>
+                    </a:lnR>
+                    <a:lnT w="12700" cap="flat" cmpd="sng" algn="ctr">
+                      <a:solidFill>
+                        <a:schemeClr val="tx1"/>
+                      </a:solidFill>
+                      <a:prstDash val="solid"/>
+                      <a:round/>
+                      <a:headEnd type="none" w="med" len="med"/>
+                      <a:tailEnd type="none" w="med" len="med"/>
+                    </a:lnT>
+                    <a:lnB w="12700" cap="flat" cmpd="sng" algn="ctr">
+                      <a:solidFill>
+                        <a:schemeClr val="tx1"/>
+                      </a:solidFill>
+                      <a:prstDash val="solid"/>
+                      <a:round/>
+                      <a:headEnd type="none" w="med" len="med"/>
+                      <a:tailEnd type="none" w="med" len="med"/>
+                    </a:lnB>
+                    <a:lnTlToBr w="12700" cmpd="sng">
+                      <a:noFill/>
+                      <a:prstDash val="solid"/>
+                    </a:lnTlToBr>
+                    <a:lnBlToTr w="12700" cmpd="sng">
+                      <a:noFill/>
+                      <a:prstDash val="solid"/>
+                    </a:lnBlToTr>
+                  </a:tcPr>
+                </a:tc>
+                <a:extLst>
+                  <a:ext uri="{0D108BD9-81ED-4DB2-BD59-A6C34878D82A}">
+                    <a16:rowId xmlns:a16="http://schemas.microsoft.com/office/drawing/2014/main" val="3931044462"/>
+                  </a:ext>
+                </a:extLst>
+              </a:tr>
+              <a:tr h="448927">
+                <a:tc>
+                  <a:txBody>
+                    <a:bodyPr/>
+                    <a:lstStyle/>
+                    <a:p>
+                      <a:pPr algn="ctr" rtl="0"/>
+                      <a:r>
+                        <a:rPr lang="en-US" altLang="ko-KR" sz="1600" b="1">
+                          <a:solidFill>
+                            <a:schemeClr val="tx1"/>
+                          </a:solidFill>
+                          <a:effectLst/>
+                          <a:latin typeface="+mj-lt"/>
+                        </a:rPr>
+                        <a:t>(3, 4)</a:t>
+                      </a:r>
+                      <a:endParaRPr lang="ko-KR" altLang="en-US" sz="1600" b="1">
+                        <a:solidFill>
+                          <a:schemeClr val="tx1"/>
+                        </a:solidFill>
+                        <a:effectLst/>
+                        <a:latin typeface="+mj-lt"/>
+                      </a:endParaRPr>
+                    </a:p>
+                  </a:txBody>
+                  <a:tcPr marL="59695" marR="74618" marT="99491" marB="99491" anchor="ctr">
+                    <a:lnL w="12700" cap="flat" cmpd="sng" algn="ctr">
+                      <a:solidFill>
+                        <a:schemeClr val="tx1"/>
+                      </a:solidFill>
+                      <a:prstDash val="solid"/>
+                      <a:round/>
+                      <a:headEnd type="none" w="med" len="med"/>
+                      <a:tailEnd type="none" w="med" len="med"/>
+                    </a:lnL>
+                    <a:lnR w="12700" cap="flat" cmpd="sng" algn="ctr">
+                      <a:solidFill>
+                        <a:schemeClr val="tx1"/>
+                      </a:solidFill>
+                      <a:prstDash val="solid"/>
+                      <a:round/>
+                      <a:headEnd type="none" w="med" len="med"/>
+                      <a:tailEnd type="none" w="med" len="med"/>
+                    </a:lnR>
+                    <a:lnT w="12700" cap="flat" cmpd="sng" algn="ctr">
+                      <a:solidFill>
+                        <a:schemeClr val="tx1"/>
+                      </a:solidFill>
+                      <a:prstDash val="solid"/>
+                      <a:round/>
+                      <a:headEnd type="none" w="med" len="med"/>
+                      <a:tailEnd type="none" w="med" len="med"/>
+                    </a:lnT>
+                    <a:lnB w="12700" cap="flat" cmpd="sng" algn="ctr">
+                      <a:solidFill>
+                        <a:schemeClr val="tx1"/>
+                      </a:solidFill>
+                      <a:prstDash val="solid"/>
+                      <a:round/>
+                      <a:headEnd type="none" w="med" len="med"/>
+                      <a:tailEnd type="none" w="med" len="med"/>
+                    </a:lnB>
+                    <a:lnTlToBr w="12700" cmpd="sng">
+                      <a:noFill/>
+                      <a:prstDash val="solid"/>
+                    </a:lnTlToBr>
+                    <a:lnBlToTr w="12700" cmpd="sng">
+                      <a:noFill/>
+                      <a:prstDash val="solid"/>
+                    </a:lnBlToTr>
+                  </a:tcPr>
+                </a:tc>
+                <a:tc>
+                  <a:txBody>
+                    <a:bodyPr/>
+                    <a:lstStyle/>
+                    <a:p>
+                      <a:pPr algn="ctr" rtl="0"/>
+                      <a:r>
+                        <a:rPr lang="en-US" altLang="ko-KR" sz="1600" b="1" dirty="0">
+                          <a:solidFill>
+                            <a:schemeClr val="tx1"/>
+                          </a:solidFill>
+                          <a:effectLst/>
+                          <a:latin typeface="+mj-lt"/>
+                        </a:rPr>
+                        <a:t>24.6%</a:t>
+                      </a:r>
+                      <a:br>
+                        <a:rPr lang="en-US" altLang="ko-KR" sz="1600" b="1" dirty="0">
+                          <a:solidFill>
+                            <a:schemeClr val="tx1"/>
+                          </a:solidFill>
+                          <a:effectLst/>
+                          <a:latin typeface="+mj-lt"/>
+                        </a:rPr>
+                      </a:br>
+                      <a:r>
+                        <a:rPr lang="en-US" altLang="ko-KR" sz="1600" b="1" dirty="0">
+                          <a:solidFill>
+                            <a:schemeClr val="tx1"/>
+                          </a:solidFill>
+                          <a:effectLst/>
+                          <a:latin typeface="+mj-lt"/>
+                        </a:rPr>
+                        <a:t>(12.0%)</a:t>
+                      </a:r>
+                    </a:p>
+                  </a:txBody>
+                  <a:tcPr marL="59695" marR="74618" marT="99491" marB="99491" anchor="ctr">
+                    <a:lnL w="12700" cap="flat" cmpd="sng" algn="ctr">
+                      <a:solidFill>
+                        <a:schemeClr val="tx1"/>
+                      </a:solidFill>
+                      <a:prstDash val="solid"/>
+                      <a:round/>
+                      <a:headEnd type="none" w="med" len="med"/>
+                      <a:tailEnd type="none" w="med" len="med"/>
+                    </a:lnL>
+                    <a:lnR w="12700" cap="flat" cmpd="sng" algn="ctr">
+                      <a:solidFill>
+                        <a:schemeClr val="tx1"/>
+                      </a:solidFill>
+                      <a:prstDash val="solid"/>
+                      <a:round/>
+                      <a:headEnd type="none" w="med" len="med"/>
+                      <a:tailEnd type="none" w="med" len="med"/>
+                    </a:lnR>
+                    <a:lnT w="12700" cap="flat" cmpd="sng" algn="ctr">
+                      <a:solidFill>
+                        <a:schemeClr val="tx1"/>
+                      </a:solidFill>
+                      <a:prstDash val="solid"/>
+                      <a:round/>
+                      <a:headEnd type="none" w="med" len="med"/>
+                      <a:tailEnd type="none" w="med" len="med"/>
+                    </a:lnT>
+                    <a:lnB w="12700" cap="flat" cmpd="sng" algn="ctr">
+                      <a:solidFill>
+                        <a:schemeClr val="tx1"/>
+                      </a:solidFill>
+                      <a:prstDash val="solid"/>
+                      <a:round/>
+                      <a:headEnd type="none" w="med" len="med"/>
+                      <a:tailEnd type="none" w="med" len="med"/>
+                    </a:lnB>
+                    <a:lnTlToBr w="12700" cmpd="sng">
+                      <a:noFill/>
+                      <a:prstDash val="solid"/>
+                    </a:lnTlToBr>
+                    <a:lnBlToTr w="12700" cmpd="sng">
+                      <a:noFill/>
+                      <a:prstDash val="solid"/>
+                    </a:lnBlToTr>
+                  </a:tcPr>
+                </a:tc>
+                <a:tc>
+                  <a:txBody>
+                    <a:bodyPr/>
+                    <a:lstStyle/>
+                    <a:p>
+                      <a:pPr algn="ctr" rtl="0"/>
+                      <a:r>
+                        <a:rPr lang="en-US" altLang="ko-KR" sz="1600" b="1" dirty="0">
+                          <a:solidFill>
+                            <a:schemeClr val="tx1"/>
+                          </a:solidFill>
+                          <a:effectLst/>
+                          <a:latin typeface="+mj-lt"/>
+                        </a:rPr>
+                        <a:t>-</a:t>
+                      </a:r>
+                    </a:p>
+                  </a:txBody>
+                  <a:tcPr marL="59695" marR="74618" marT="99491" marB="99491" anchor="ctr">
+                    <a:lnL w="12700" cap="flat" cmpd="sng" algn="ctr">
+                      <a:solidFill>
+                        <a:schemeClr val="tx1"/>
+                      </a:solidFill>
+                      <a:prstDash val="solid"/>
+                      <a:round/>
+                      <a:headEnd type="none" w="med" len="med"/>
+                      <a:tailEnd type="none" w="med" len="med"/>
+                    </a:lnL>
+                    <a:lnR w="12700" cap="flat" cmpd="sng" algn="ctr">
+                      <a:solidFill>
+                        <a:schemeClr val="tx1"/>
+                      </a:solidFill>
+                      <a:prstDash val="solid"/>
+                      <a:round/>
+                      <a:headEnd type="none" w="med" len="med"/>
+                      <a:tailEnd type="none" w="med" len="med"/>
+                    </a:lnR>
+                    <a:lnT w="12700" cap="flat" cmpd="sng" algn="ctr">
+                      <a:solidFill>
+                        <a:schemeClr val="tx1"/>
+                      </a:solidFill>
+                      <a:prstDash val="solid"/>
+                      <a:round/>
+                      <a:headEnd type="none" w="med" len="med"/>
+                      <a:tailEnd type="none" w="med" len="med"/>
+                    </a:lnT>
+                    <a:lnB w="12700" cap="flat" cmpd="sng" algn="ctr">
+                      <a:solidFill>
+                        <a:schemeClr val="tx1"/>
+                      </a:solidFill>
+                      <a:prstDash val="solid"/>
+                      <a:round/>
+                      <a:headEnd type="none" w="med" len="med"/>
+                      <a:tailEnd type="none" w="med" len="med"/>
+                    </a:lnB>
+                    <a:lnTlToBr w="12700" cmpd="sng">
+                      <a:noFill/>
+                      <a:prstDash val="solid"/>
+                    </a:lnTlToBr>
+                    <a:lnBlToTr w="12700" cmpd="sng">
+                      <a:noFill/>
+                      <a:prstDash val="solid"/>
+                    </a:lnBlToTr>
+                  </a:tcPr>
+                </a:tc>
+                <a:tc>
+                  <a:txBody>
+                    <a:bodyPr/>
+                    <a:lstStyle/>
+                    <a:p>
+                      <a:pPr algn="ctr" rtl="0"/>
+                      <a:r>
+                        <a:rPr lang="en-US" altLang="ko-KR" sz="1600" b="1" dirty="0">
+                          <a:solidFill>
+                            <a:schemeClr val="tx1"/>
+                          </a:solidFill>
+                          <a:effectLst/>
+                          <a:latin typeface="+mj-lt"/>
+                        </a:rPr>
+                        <a:t>59.2%</a:t>
+                      </a:r>
+                      <a:br>
+                        <a:rPr lang="ko-KR" altLang="en-US" sz="1600" b="1" dirty="0">
+                          <a:solidFill>
+                            <a:schemeClr val="tx1"/>
+                          </a:solidFill>
+                          <a:effectLst/>
+                          <a:latin typeface="+mj-lt"/>
+                        </a:rPr>
+                      </a:br>
+                      <a:r>
+                        <a:rPr lang="en-US" altLang="ko-KR" sz="1600" b="1" dirty="0">
+                          <a:solidFill>
+                            <a:schemeClr val="tx1"/>
+                          </a:solidFill>
+                          <a:effectLst/>
+                          <a:latin typeface="+mj-lt"/>
+                        </a:rPr>
+                        <a:t>(9.1%)</a:t>
+                      </a:r>
+                    </a:p>
+                  </a:txBody>
+                  <a:tcPr marL="59695" marR="74618" marT="99491" marB="99491" anchor="ctr">
+                    <a:lnL w="12700" cap="flat" cmpd="sng" algn="ctr">
+                      <a:solidFill>
+                        <a:schemeClr val="tx1"/>
+                      </a:solidFill>
+                      <a:prstDash val="solid"/>
+                      <a:round/>
+                      <a:headEnd type="none" w="med" len="med"/>
+                      <a:tailEnd type="none" w="med" len="med"/>
+                    </a:lnL>
+                    <a:lnR w="12700" cap="flat" cmpd="sng" algn="ctr">
+                      <a:solidFill>
+                        <a:schemeClr val="tx1"/>
+                      </a:solidFill>
+                      <a:prstDash val="solid"/>
+                      <a:round/>
+                      <a:headEnd type="none" w="med" len="med"/>
+                      <a:tailEnd type="none" w="med" len="med"/>
+                    </a:lnR>
+                    <a:lnT w="12700" cap="flat" cmpd="sng" algn="ctr">
+                      <a:solidFill>
+                        <a:schemeClr val="tx1"/>
+                      </a:solidFill>
+                      <a:prstDash val="solid"/>
+                      <a:round/>
+                      <a:headEnd type="none" w="med" len="med"/>
+                      <a:tailEnd type="none" w="med" len="med"/>
+                    </a:lnT>
+                    <a:lnB w="12700" cap="flat" cmpd="sng" algn="ctr">
+                      <a:solidFill>
+                        <a:schemeClr val="tx1"/>
+                      </a:solidFill>
+                      <a:prstDash val="solid"/>
+                      <a:round/>
+                      <a:headEnd type="none" w="med" len="med"/>
+                      <a:tailEnd type="none" w="med" len="med"/>
+                    </a:lnB>
+                    <a:lnTlToBr w="12700" cmpd="sng">
+                      <a:noFill/>
+                      <a:prstDash val="solid"/>
+                    </a:lnTlToBr>
+                    <a:lnBlToTr w="12700" cmpd="sng">
+                      <a:noFill/>
+                      <a:prstDash val="solid"/>
+                    </a:lnBlToTr>
+                  </a:tcPr>
+                </a:tc>
+                <a:tc>
+                  <a:txBody>
+                    <a:bodyPr/>
+                    <a:lstStyle/>
+                    <a:p>
+                      <a:pPr algn="ctr" rtl="0"/>
+                      <a:r>
+                        <a:rPr lang="en-US" altLang="ko-KR" sz="1600" b="1" dirty="0">
+                          <a:solidFill>
+                            <a:schemeClr val="tx1"/>
+                          </a:solidFill>
+                          <a:effectLst/>
+                          <a:latin typeface="+mj-lt"/>
+                        </a:rPr>
+                        <a:t>68.6%</a:t>
+                      </a:r>
+                      <a:br>
+                        <a:rPr lang="ko-KR" altLang="en-US" sz="1600" b="1" dirty="0">
+                          <a:solidFill>
+                            <a:schemeClr val="tx1"/>
+                          </a:solidFill>
+                          <a:effectLst/>
+                          <a:latin typeface="+mj-lt"/>
+                        </a:rPr>
+                      </a:br>
+                      <a:r>
+                        <a:rPr lang="en-US" altLang="ko-KR" sz="1600" b="1" dirty="0">
+                          <a:solidFill>
+                            <a:schemeClr val="tx1"/>
+                          </a:solidFill>
+                          <a:effectLst/>
+                          <a:latin typeface="+mj-lt"/>
+                        </a:rPr>
+                        <a:t>(8.1%)</a:t>
+                      </a:r>
+                    </a:p>
+                  </a:txBody>
+                  <a:tcPr marL="59695" marR="74618" marT="99491" marB="99491" anchor="ctr">
+                    <a:lnL w="12700" cap="flat" cmpd="sng" algn="ctr">
+                      <a:solidFill>
+                        <a:schemeClr val="tx1"/>
+                      </a:solidFill>
+                      <a:prstDash val="solid"/>
+                      <a:round/>
+                      <a:headEnd type="none" w="med" len="med"/>
+                      <a:tailEnd type="none" w="med" len="med"/>
+                    </a:lnL>
+                    <a:lnR w="12700" cap="flat" cmpd="sng" algn="ctr">
+                      <a:solidFill>
+                        <a:schemeClr val="tx1"/>
+                      </a:solidFill>
+                      <a:prstDash val="solid"/>
+                      <a:round/>
+                      <a:headEnd type="none" w="med" len="med"/>
+                      <a:tailEnd type="none" w="med" len="med"/>
+                    </a:lnR>
+                    <a:lnT w="12700" cap="flat" cmpd="sng" algn="ctr">
+                      <a:solidFill>
+                        <a:schemeClr val="tx1"/>
+                      </a:solidFill>
+                      <a:prstDash val="solid"/>
+                      <a:round/>
+                      <a:headEnd type="none" w="med" len="med"/>
+                      <a:tailEnd type="none" w="med" len="med"/>
+                    </a:lnT>
+                    <a:lnB w="12700" cap="flat" cmpd="sng" algn="ctr">
+                      <a:solidFill>
+                        <a:schemeClr val="tx1"/>
+                      </a:solidFill>
+                      <a:prstDash val="solid"/>
+                      <a:round/>
+                      <a:headEnd type="none" w="med" len="med"/>
+                      <a:tailEnd type="none" w="med" len="med"/>
+                    </a:lnB>
+                    <a:lnTlToBr w="12700" cmpd="sng">
+                      <a:noFill/>
+                      <a:prstDash val="solid"/>
+                    </a:lnTlToBr>
+                    <a:lnBlToTr w="12700" cmpd="sng">
+                      <a:noFill/>
+                      <a:prstDash val="solid"/>
+                    </a:lnBlToTr>
+                  </a:tcPr>
+                </a:tc>
+                <a:tc>
+                  <a:txBody>
+                    <a:bodyPr/>
+                    <a:lstStyle/>
+                    <a:p>
+                      <a:pPr algn="ctr" rtl="0"/>
+                      <a:r>
+                        <a:rPr lang="en-US" altLang="ko-KR" sz="1600" b="1" dirty="0">
+                          <a:solidFill>
+                            <a:schemeClr val="tx1"/>
+                          </a:solidFill>
+                          <a:effectLst/>
+                          <a:latin typeface="+mj-lt"/>
+                        </a:rPr>
+                        <a:t>75.1%</a:t>
+                      </a:r>
+                      <a:br>
+                        <a:rPr lang="ko-KR" altLang="en-US" sz="1600" b="1" dirty="0">
+                          <a:solidFill>
+                            <a:schemeClr val="tx1"/>
+                          </a:solidFill>
+                          <a:effectLst/>
+                          <a:latin typeface="+mj-lt"/>
+                        </a:rPr>
+                      </a:br>
+                      <a:r>
+                        <a:rPr lang="en-US" altLang="ko-KR" sz="1600" b="1" dirty="0">
+                          <a:solidFill>
+                            <a:schemeClr val="tx1"/>
+                          </a:solidFill>
+                          <a:effectLst/>
+                          <a:latin typeface="+mj-lt"/>
+                        </a:rPr>
+                        <a:t>(6.7%)</a:t>
+                      </a:r>
+                    </a:p>
+                  </a:txBody>
+                  <a:tcPr marL="59695" marR="59695" marT="99491" marB="99491" anchor="ctr">
+                    <a:lnL w="12700" cap="flat" cmpd="sng" algn="ctr">
+                      <a:solidFill>
+                        <a:schemeClr val="tx1"/>
+                      </a:solidFill>
+                      <a:prstDash val="solid"/>
+                      <a:round/>
+                      <a:headEnd type="none" w="med" len="med"/>
+                      <a:tailEnd type="none" w="med" len="med"/>
+                    </a:lnL>
+                    <a:lnR w="12700" cap="flat" cmpd="sng" algn="ctr">
+                      <a:solidFill>
+                        <a:schemeClr val="tx1"/>
+                      </a:solidFill>
+                      <a:prstDash val="solid"/>
+                      <a:round/>
+                      <a:headEnd type="none" w="med" len="med"/>
+                      <a:tailEnd type="none" w="med" len="med"/>
+                    </a:lnR>
+                    <a:lnT w="12700" cap="flat" cmpd="sng" algn="ctr">
+                      <a:solidFill>
+                        <a:schemeClr val="tx1"/>
+                      </a:solidFill>
+                      <a:prstDash val="solid"/>
+                      <a:round/>
+                      <a:headEnd type="none" w="med" len="med"/>
+                      <a:tailEnd type="none" w="med" len="med"/>
+                    </a:lnT>
+                    <a:lnB w="12700" cap="flat" cmpd="sng" algn="ctr">
+                      <a:solidFill>
+                        <a:schemeClr val="tx1"/>
+                      </a:solidFill>
+                      <a:prstDash val="solid"/>
+                      <a:round/>
+                      <a:headEnd type="none" w="med" len="med"/>
+                      <a:tailEnd type="none" w="med" len="med"/>
+                    </a:lnB>
+                    <a:lnTlToBr w="12700" cmpd="sng">
+                      <a:noFill/>
+                      <a:prstDash val="solid"/>
+                    </a:lnTlToBr>
+                    <a:lnBlToTr w="12700" cmpd="sng">
+                      <a:noFill/>
+                      <a:prstDash val="solid"/>
+                    </a:lnBlToTr>
+                  </a:tcPr>
+                </a:tc>
+                <a:extLst>
+                  <a:ext uri="{0D108BD9-81ED-4DB2-BD59-A6C34878D82A}">
+                    <a16:rowId xmlns:a16="http://schemas.microsoft.com/office/drawing/2014/main" val="1934977763"/>
+                  </a:ext>
+                </a:extLst>
+              </a:tr>
+              <a:tr h="448927">
+                <a:tc>
+                  <a:txBody>
+                    <a:bodyPr/>
+                    <a:lstStyle/>
+                    <a:p>
+                      <a:pPr algn="ctr" rtl="0"/>
+                      <a:r>
+                        <a:rPr lang="en-US" altLang="ko-KR" sz="1600" b="1">
+                          <a:solidFill>
+                            <a:schemeClr val="tx1"/>
+                          </a:solidFill>
+                          <a:effectLst/>
+                          <a:latin typeface="+mj-lt"/>
+                        </a:rPr>
+                        <a:t>(4, 3)</a:t>
+                      </a:r>
+                      <a:endParaRPr lang="ko-KR" altLang="en-US" sz="1600" b="1">
+                        <a:solidFill>
+                          <a:schemeClr val="tx1"/>
+                        </a:solidFill>
+                        <a:effectLst/>
+                        <a:latin typeface="+mj-lt"/>
+                      </a:endParaRPr>
+                    </a:p>
+                  </a:txBody>
+                  <a:tcPr marL="59695" marR="74618" marT="99491" marB="99491" anchor="ctr">
+                    <a:lnL w="12700" cap="flat" cmpd="sng" algn="ctr">
+                      <a:solidFill>
+                        <a:schemeClr val="tx1"/>
+                      </a:solidFill>
+                      <a:prstDash val="solid"/>
+                      <a:round/>
+                      <a:headEnd type="none" w="med" len="med"/>
+                      <a:tailEnd type="none" w="med" len="med"/>
+                    </a:lnL>
+                    <a:lnR w="12700" cap="flat" cmpd="sng" algn="ctr">
+                      <a:solidFill>
+                        <a:schemeClr val="tx1"/>
+                      </a:solidFill>
+                      <a:prstDash val="solid"/>
+                      <a:round/>
+                      <a:headEnd type="none" w="med" len="med"/>
+                      <a:tailEnd type="none" w="med" len="med"/>
+                    </a:lnR>
+                    <a:lnT w="12700" cap="flat" cmpd="sng" algn="ctr">
+                      <a:solidFill>
+                        <a:schemeClr val="tx1"/>
+                      </a:solidFill>
+                      <a:prstDash val="solid"/>
+                      <a:round/>
+                      <a:headEnd type="none" w="med" len="med"/>
+                      <a:tailEnd type="none" w="med" len="med"/>
+                    </a:lnT>
+                    <a:lnB w="12700" cap="flat" cmpd="sng" algn="ctr">
+                      <a:solidFill>
+                        <a:schemeClr val="tx1"/>
+                      </a:solidFill>
+                      <a:prstDash val="solid"/>
+                      <a:round/>
+                      <a:headEnd type="none" w="med" len="med"/>
+                      <a:tailEnd type="none" w="med" len="med"/>
+                    </a:lnB>
+                    <a:lnTlToBr w="12700" cmpd="sng">
+                      <a:noFill/>
+                      <a:prstDash val="solid"/>
+                    </a:lnTlToBr>
+                    <a:lnBlToTr w="12700" cmpd="sng">
+                      <a:noFill/>
+                      <a:prstDash val="solid"/>
+                    </a:lnBlToTr>
+                  </a:tcPr>
+                </a:tc>
+                <a:tc>
+                  <a:txBody>
+                    <a:bodyPr/>
+                    <a:lstStyle/>
+                    <a:p>
+                      <a:pPr algn="ctr" rtl="0"/>
+                      <a:r>
+                        <a:rPr lang="en-US" altLang="ko-KR" sz="1600" b="1" dirty="0">
+                          <a:solidFill>
+                            <a:schemeClr val="tx1"/>
+                          </a:solidFill>
+                          <a:effectLst/>
+                          <a:latin typeface="+mj-lt"/>
+                        </a:rPr>
+                        <a:t>16.2%</a:t>
+                      </a:r>
+                      <a:br>
+                        <a:rPr lang="en-US" altLang="ko-KR" sz="1600" b="1" dirty="0">
+                          <a:solidFill>
+                            <a:schemeClr val="tx1"/>
+                          </a:solidFill>
+                          <a:effectLst/>
+                          <a:latin typeface="+mj-lt"/>
+                        </a:rPr>
+                      </a:br>
+                      <a:r>
+                        <a:rPr lang="en-US" altLang="ko-KR" sz="1600" b="1" dirty="0">
+                          <a:solidFill>
+                            <a:schemeClr val="tx1"/>
+                          </a:solidFill>
+                          <a:effectLst/>
+                          <a:latin typeface="+mj-lt"/>
+                        </a:rPr>
+                        <a:t>(9.7%)</a:t>
+                      </a:r>
+                    </a:p>
+                  </a:txBody>
+                  <a:tcPr marL="59695" marR="74618" marT="99491" marB="99491" anchor="ctr">
+                    <a:lnL w="12700" cap="flat" cmpd="sng" algn="ctr">
+                      <a:solidFill>
+                        <a:schemeClr val="tx1"/>
+                      </a:solidFill>
+                      <a:prstDash val="solid"/>
+                      <a:round/>
+                      <a:headEnd type="none" w="med" len="med"/>
+                      <a:tailEnd type="none" w="med" len="med"/>
+                    </a:lnL>
+                    <a:lnR w="12700" cap="flat" cmpd="sng" algn="ctr">
+                      <a:solidFill>
+                        <a:schemeClr val="tx1"/>
+                      </a:solidFill>
+                      <a:prstDash val="solid"/>
+                      <a:round/>
+                      <a:headEnd type="none" w="med" len="med"/>
+                      <a:tailEnd type="none" w="med" len="med"/>
+                    </a:lnR>
+                    <a:lnT w="12700" cap="flat" cmpd="sng" algn="ctr">
+                      <a:solidFill>
+                        <a:schemeClr val="tx1"/>
+                      </a:solidFill>
+                      <a:prstDash val="solid"/>
+                      <a:round/>
+                      <a:headEnd type="none" w="med" len="med"/>
+                      <a:tailEnd type="none" w="med" len="med"/>
+                    </a:lnT>
+                    <a:lnB w="12700" cap="flat" cmpd="sng" algn="ctr">
+                      <a:solidFill>
+                        <a:schemeClr val="tx1"/>
+                      </a:solidFill>
+                      <a:prstDash val="solid"/>
+                      <a:round/>
+                      <a:headEnd type="none" w="med" len="med"/>
+                      <a:tailEnd type="none" w="med" len="med"/>
+                    </a:lnB>
+                    <a:lnTlToBr w="12700" cmpd="sng">
+                      <a:noFill/>
+                      <a:prstDash val="solid"/>
+                    </a:lnTlToBr>
+                    <a:lnBlToTr w="12700" cmpd="sng">
+                      <a:noFill/>
+                      <a:prstDash val="solid"/>
+                    </a:lnBlToTr>
+                  </a:tcPr>
+                </a:tc>
+                <a:tc>
+                  <a:txBody>
+                    <a:bodyPr/>
+                    <a:lstStyle/>
+                    <a:p>
+                      <a:pPr algn="ctr" rtl="0"/>
+                      <a:r>
+                        <a:rPr lang="en-US" altLang="ko-KR" sz="1600" b="1" dirty="0">
+                          <a:solidFill>
+                            <a:schemeClr val="tx1"/>
+                          </a:solidFill>
+                          <a:effectLst/>
+                          <a:latin typeface="+mj-lt"/>
+                        </a:rPr>
+                        <a:t>31.7%</a:t>
+                      </a:r>
+                      <a:br>
+                        <a:rPr lang="en-US" altLang="ko-KR" sz="1600" b="1" dirty="0">
+                          <a:solidFill>
+                            <a:schemeClr val="tx1"/>
+                          </a:solidFill>
+                          <a:effectLst/>
+                          <a:latin typeface="+mj-lt"/>
+                        </a:rPr>
+                      </a:br>
+                      <a:r>
+                        <a:rPr lang="en-US" altLang="ko-KR" sz="1600" b="1" dirty="0">
+                          <a:solidFill>
+                            <a:schemeClr val="tx1"/>
+                          </a:solidFill>
+                          <a:effectLst/>
+                          <a:latin typeface="+mj-lt"/>
+                        </a:rPr>
+                        <a:t>(9.1%)</a:t>
+                      </a:r>
+                    </a:p>
+                  </a:txBody>
+                  <a:tcPr marL="59695" marR="74618" marT="99491" marB="99491" anchor="ctr">
+                    <a:lnL w="12700" cap="flat" cmpd="sng" algn="ctr">
+                      <a:solidFill>
+                        <a:schemeClr val="tx1"/>
+                      </a:solidFill>
+                      <a:prstDash val="solid"/>
+                      <a:round/>
+                      <a:headEnd type="none" w="med" len="med"/>
+                      <a:tailEnd type="none" w="med" len="med"/>
+                    </a:lnL>
+                    <a:lnR w="12700" cap="flat" cmpd="sng" algn="ctr">
+                      <a:solidFill>
+                        <a:schemeClr val="tx1"/>
+                      </a:solidFill>
+                      <a:prstDash val="solid"/>
+                      <a:round/>
+                      <a:headEnd type="none" w="med" len="med"/>
+                      <a:tailEnd type="none" w="med" len="med"/>
+                    </a:lnR>
+                    <a:lnT w="12700" cap="flat" cmpd="sng" algn="ctr">
+                      <a:solidFill>
+                        <a:schemeClr val="tx1"/>
+                      </a:solidFill>
+                      <a:prstDash val="solid"/>
+                      <a:round/>
+                      <a:headEnd type="none" w="med" len="med"/>
+                      <a:tailEnd type="none" w="med" len="med"/>
+                    </a:lnT>
+                    <a:lnB w="12700" cap="flat" cmpd="sng" algn="ctr">
+                      <a:solidFill>
+                        <a:schemeClr val="tx1"/>
+                      </a:solidFill>
+                      <a:prstDash val="solid"/>
+                      <a:round/>
+                      <a:headEnd type="none" w="med" len="med"/>
+                      <a:tailEnd type="none" w="med" len="med"/>
+                    </a:lnB>
+                    <a:lnTlToBr w="12700" cmpd="sng">
+                      <a:noFill/>
+                      <a:prstDash val="solid"/>
+                    </a:lnTlToBr>
+                    <a:lnBlToTr w="12700" cmpd="sng">
+                      <a:noFill/>
+                      <a:prstDash val="solid"/>
+                    </a:lnBlToTr>
+                  </a:tcPr>
+                </a:tc>
+                <a:tc>
+                  <a:txBody>
+                    <a:bodyPr/>
+                    <a:lstStyle/>
+                    <a:p>
+                      <a:pPr algn="ctr" rtl="0"/>
+                      <a:r>
+                        <a:rPr lang="en-US" altLang="ko-KR" sz="1600" b="1" dirty="0">
+                          <a:solidFill>
+                            <a:schemeClr val="tx1"/>
+                          </a:solidFill>
+                          <a:effectLst/>
+                          <a:latin typeface="+mj-lt"/>
+                        </a:rPr>
+                        <a:t>-</a:t>
+                      </a:r>
+                    </a:p>
+                  </a:txBody>
+                  <a:tcPr marL="59695" marR="74618" marT="99491" marB="99491" anchor="ctr">
+                    <a:lnL w="12700" cap="flat" cmpd="sng" algn="ctr">
+                      <a:solidFill>
+                        <a:schemeClr val="tx1"/>
+                      </a:solidFill>
+                      <a:prstDash val="solid"/>
+                      <a:round/>
+                      <a:headEnd type="none" w="med" len="med"/>
+                      <a:tailEnd type="none" w="med" len="med"/>
+                    </a:lnL>
+                    <a:lnR w="12700" cap="flat" cmpd="sng" algn="ctr">
+                      <a:solidFill>
+                        <a:schemeClr val="tx1"/>
+                      </a:solidFill>
+                      <a:prstDash val="solid"/>
+                      <a:round/>
+                      <a:headEnd type="none" w="med" len="med"/>
+                      <a:tailEnd type="none" w="med" len="med"/>
+                    </a:lnR>
+                    <a:lnT w="12700" cap="flat" cmpd="sng" algn="ctr">
+                      <a:solidFill>
+                        <a:schemeClr val="tx1"/>
+                      </a:solidFill>
+                      <a:prstDash val="solid"/>
+                      <a:round/>
+                      <a:headEnd type="none" w="med" len="med"/>
+                      <a:tailEnd type="none" w="med" len="med"/>
+                    </a:lnT>
+                    <a:lnB w="12700" cap="flat" cmpd="sng" algn="ctr">
+                      <a:solidFill>
+                        <a:schemeClr val="tx1"/>
+                      </a:solidFill>
+                      <a:prstDash val="solid"/>
+                      <a:round/>
+                      <a:headEnd type="none" w="med" len="med"/>
+                      <a:tailEnd type="none" w="med" len="med"/>
+                    </a:lnB>
+                    <a:lnTlToBr w="12700" cmpd="sng">
+                      <a:noFill/>
+                      <a:prstDash val="solid"/>
+                    </a:lnTlToBr>
+                    <a:lnBlToTr w="12700" cmpd="sng">
+                      <a:noFill/>
+                      <a:prstDash val="solid"/>
+                    </a:lnBlToTr>
+                  </a:tcPr>
+                </a:tc>
+                <a:tc>
+                  <a:txBody>
+                    <a:bodyPr/>
+                    <a:lstStyle/>
+                    <a:p>
+                      <a:pPr algn="ctr" rtl="0"/>
+                      <a:r>
+                        <a:rPr lang="en-US" altLang="ko-KR" sz="1600" b="1" dirty="0">
+                          <a:solidFill>
+                            <a:schemeClr val="tx1"/>
+                          </a:solidFill>
+                          <a:effectLst/>
+                          <a:latin typeface="+mj-lt"/>
+                        </a:rPr>
+                        <a:t>58.3%</a:t>
+                      </a:r>
+                      <a:br>
+                        <a:rPr lang="ko-KR" altLang="en-US" sz="1600" b="1" dirty="0">
+                          <a:solidFill>
+                            <a:schemeClr val="tx1"/>
+                          </a:solidFill>
+                          <a:effectLst/>
+                          <a:latin typeface="+mj-lt"/>
+                        </a:rPr>
+                      </a:br>
+                      <a:r>
+                        <a:rPr lang="en-US" altLang="ko-KR" sz="1600" b="1" dirty="0">
+                          <a:solidFill>
+                            <a:schemeClr val="tx1"/>
+                          </a:solidFill>
+                          <a:effectLst/>
+                          <a:latin typeface="+mj-lt"/>
+                        </a:rPr>
+                        <a:t>(8.6%)</a:t>
+                      </a:r>
+                    </a:p>
+                  </a:txBody>
+                  <a:tcPr marL="59695" marR="74618" marT="99491" marB="99491" anchor="ctr">
+                    <a:lnL w="12700" cap="flat" cmpd="sng" algn="ctr">
+                      <a:solidFill>
+                        <a:schemeClr val="tx1"/>
+                      </a:solidFill>
+                      <a:prstDash val="solid"/>
+                      <a:round/>
+                      <a:headEnd type="none" w="med" len="med"/>
+                      <a:tailEnd type="none" w="med" len="med"/>
+                    </a:lnL>
+                    <a:lnR w="12700" cap="flat" cmpd="sng" algn="ctr">
+                      <a:solidFill>
+                        <a:schemeClr val="tx1"/>
+                      </a:solidFill>
+                      <a:prstDash val="solid"/>
+                      <a:round/>
+                      <a:headEnd type="none" w="med" len="med"/>
+                      <a:tailEnd type="none" w="med" len="med"/>
+                    </a:lnR>
+                    <a:lnT w="12700" cap="flat" cmpd="sng" algn="ctr">
+                      <a:solidFill>
+                        <a:schemeClr val="tx1"/>
+                      </a:solidFill>
+                      <a:prstDash val="solid"/>
+                      <a:round/>
+                      <a:headEnd type="none" w="med" len="med"/>
+                      <a:tailEnd type="none" w="med" len="med"/>
+                    </a:lnT>
+                    <a:lnB w="12700" cap="flat" cmpd="sng" algn="ctr">
+                      <a:solidFill>
+                        <a:schemeClr val="tx1"/>
+                      </a:solidFill>
+                      <a:prstDash val="solid"/>
+                      <a:round/>
+                      <a:headEnd type="none" w="med" len="med"/>
+                      <a:tailEnd type="none" w="med" len="med"/>
+                    </a:lnB>
+                    <a:lnTlToBr w="12700" cmpd="sng">
+                      <a:noFill/>
+                      <a:prstDash val="solid"/>
+                    </a:lnTlToBr>
+                    <a:lnBlToTr w="12700" cmpd="sng">
+                      <a:noFill/>
+                      <a:prstDash val="solid"/>
+                    </a:lnBlToTr>
+                  </a:tcPr>
+                </a:tc>
+                <a:tc>
+                  <a:txBody>
+                    <a:bodyPr/>
+                    <a:lstStyle/>
+                    <a:p>
+                      <a:pPr algn="ctr" rtl="0"/>
+                      <a:r>
+                        <a:rPr lang="en-US" altLang="ko-KR" sz="1600" b="1" dirty="0">
+                          <a:solidFill>
+                            <a:schemeClr val="tx1"/>
+                          </a:solidFill>
+                          <a:effectLst/>
+                          <a:latin typeface="+mj-lt"/>
+                        </a:rPr>
+                        <a:t>65.1%</a:t>
+                      </a:r>
+                      <a:br>
+                        <a:rPr lang="ko-KR" altLang="en-US" sz="1600" b="1" dirty="0">
+                          <a:solidFill>
+                            <a:schemeClr val="tx1"/>
+                          </a:solidFill>
+                          <a:effectLst/>
+                          <a:latin typeface="+mj-lt"/>
+                        </a:rPr>
+                      </a:br>
+                      <a:r>
+                        <a:rPr lang="en-US" altLang="ko-KR" sz="1600" b="1" dirty="0">
+                          <a:solidFill>
+                            <a:schemeClr val="tx1"/>
+                          </a:solidFill>
+                          <a:effectLst/>
+                          <a:latin typeface="+mj-lt"/>
+                        </a:rPr>
+                        <a:t>(7.8%)</a:t>
+                      </a:r>
+                    </a:p>
+                  </a:txBody>
+                  <a:tcPr marL="59695" marR="59695" marT="99491" marB="99491" anchor="ctr">
+                    <a:lnL w="12700" cap="flat" cmpd="sng" algn="ctr">
+                      <a:solidFill>
+                        <a:schemeClr val="tx1"/>
+                      </a:solidFill>
+                      <a:prstDash val="solid"/>
+                      <a:round/>
+                      <a:headEnd type="none" w="med" len="med"/>
+                      <a:tailEnd type="none" w="med" len="med"/>
+                    </a:lnL>
+                    <a:lnR w="12700" cap="flat" cmpd="sng" algn="ctr">
+                      <a:solidFill>
+                        <a:schemeClr val="tx1"/>
+                      </a:solidFill>
+                      <a:prstDash val="solid"/>
+                      <a:round/>
+                      <a:headEnd type="none" w="med" len="med"/>
+                      <a:tailEnd type="none" w="med" len="med"/>
+                    </a:lnR>
+                    <a:lnT w="12700" cap="flat" cmpd="sng" algn="ctr">
+                      <a:solidFill>
+                        <a:schemeClr val="tx1"/>
+                      </a:solidFill>
+                      <a:prstDash val="solid"/>
+                      <a:round/>
+                      <a:headEnd type="none" w="med" len="med"/>
+                      <a:tailEnd type="none" w="med" len="med"/>
+                    </a:lnT>
+                    <a:lnB w="12700" cap="flat" cmpd="sng" algn="ctr">
+                      <a:solidFill>
+                        <a:schemeClr val="tx1"/>
+                      </a:solidFill>
+                      <a:prstDash val="solid"/>
+                      <a:round/>
+                      <a:headEnd type="none" w="med" len="med"/>
+                      <a:tailEnd type="none" w="med" len="med"/>
+                    </a:lnB>
+                    <a:lnTlToBr w="12700" cmpd="sng">
+                      <a:noFill/>
+                      <a:prstDash val="solid"/>
+                    </a:lnTlToBr>
+                    <a:lnBlToTr w="12700" cmpd="sng">
+                      <a:noFill/>
+                      <a:prstDash val="solid"/>
+                    </a:lnBlToTr>
+                  </a:tcPr>
+                </a:tc>
+                <a:extLst>
+                  <a:ext uri="{0D108BD9-81ED-4DB2-BD59-A6C34878D82A}">
+                    <a16:rowId xmlns:a16="http://schemas.microsoft.com/office/drawing/2014/main" val="1679725939"/>
+                  </a:ext>
+                </a:extLst>
+              </a:tr>
+              <a:tr h="448927">
+                <a:tc>
+                  <a:txBody>
+                    <a:bodyPr/>
+                    <a:lstStyle/>
+                    <a:p>
+                      <a:pPr algn="ctr" rtl="0"/>
+                      <a:r>
+                        <a:rPr lang="en-US" altLang="ko-KR" sz="1600" b="1">
+                          <a:solidFill>
+                            <a:schemeClr val="tx1"/>
+                          </a:solidFill>
+                          <a:effectLst/>
+                          <a:latin typeface="+mj-lt"/>
+                        </a:rPr>
+                        <a:t>(6, 2)</a:t>
+                      </a:r>
+                      <a:endParaRPr lang="ko-KR" altLang="en-US" sz="1600" b="1">
+                        <a:solidFill>
+                          <a:schemeClr val="tx1"/>
+                        </a:solidFill>
+                        <a:effectLst/>
+                        <a:latin typeface="+mj-lt"/>
+                      </a:endParaRPr>
+                    </a:p>
+                  </a:txBody>
+                  <a:tcPr marL="59695" marR="74618" marT="99491" marB="99491" anchor="ctr">
+                    <a:lnL w="12700" cap="flat" cmpd="sng" algn="ctr">
+                      <a:solidFill>
+                        <a:schemeClr val="tx1"/>
+                      </a:solidFill>
+                      <a:prstDash val="solid"/>
+                      <a:round/>
+                      <a:headEnd type="none" w="med" len="med"/>
+                      <a:tailEnd type="none" w="med" len="med"/>
+                    </a:lnL>
+                    <a:lnR w="12700" cap="flat" cmpd="sng" algn="ctr">
+                      <a:solidFill>
+                        <a:schemeClr val="tx1"/>
+                      </a:solidFill>
+                      <a:prstDash val="solid"/>
+                      <a:round/>
+                      <a:headEnd type="none" w="med" len="med"/>
+                      <a:tailEnd type="none" w="med" len="med"/>
+                    </a:lnR>
+                    <a:lnT w="12700" cap="flat" cmpd="sng" algn="ctr">
+                      <a:solidFill>
+                        <a:schemeClr val="tx1"/>
+                      </a:solidFill>
+                      <a:prstDash val="solid"/>
+                      <a:round/>
+                      <a:headEnd type="none" w="med" len="med"/>
+                      <a:tailEnd type="none" w="med" len="med"/>
+                    </a:lnT>
+                    <a:lnB w="12700" cap="flat" cmpd="sng" algn="ctr">
+                      <a:solidFill>
+                        <a:schemeClr val="tx1"/>
+                      </a:solidFill>
+                      <a:prstDash val="solid"/>
+                      <a:round/>
+                      <a:headEnd type="none" w="med" len="med"/>
+                      <a:tailEnd type="none" w="med" len="med"/>
+                    </a:lnB>
+                    <a:lnTlToBr w="12700" cmpd="sng">
+                      <a:noFill/>
+                      <a:prstDash val="solid"/>
+                    </a:lnTlToBr>
+                    <a:lnBlToTr w="12700" cmpd="sng">
+                      <a:noFill/>
+                      <a:prstDash val="solid"/>
+                    </a:lnBlToTr>
+                  </a:tcPr>
+                </a:tc>
+                <a:tc>
+                  <a:txBody>
+                    <a:bodyPr/>
+                    <a:lstStyle/>
+                    <a:p>
+                      <a:pPr algn="ctr" rtl="0"/>
+                      <a:r>
+                        <a:rPr lang="en-US" altLang="ko-KR" sz="1600" b="1" dirty="0">
+                          <a:solidFill>
+                            <a:schemeClr val="tx1"/>
+                          </a:solidFill>
+                          <a:effectLst/>
+                          <a:latin typeface="+mj-lt"/>
+                        </a:rPr>
+                        <a:t>10.3%</a:t>
+                      </a:r>
+                      <a:br>
+                        <a:rPr lang="en-US" altLang="ko-KR" sz="1600" b="1" dirty="0">
+                          <a:solidFill>
+                            <a:schemeClr val="tx1"/>
+                          </a:solidFill>
+                          <a:effectLst/>
+                          <a:latin typeface="+mj-lt"/>
+                        </a:rPr>
+                      </a:br>
+                      <a:r>
+                        <a:rPr lang="en-US" altLang="ko-KR" sz="1600" b="1" dirty="0">
+                          <a:solidFill>
+                            <a:schemeClr val="tx1"/>
+                          </a:solidFill>
+                          <a:effectLst/>
+                          <a:latin typeface="+mj-lt"/>
+                        </a:rPr>
+                        <a:t>(6.6%)</a:t>
+                      </a:r>
+                    </a:p>
+                  </a:txBody>
+                  <a:tcPr marL="59695" marR="74618" marT="99491" marB="99491" anchor="ctr">
+                    <a:lnL w="12700" cap="flat" cmpd="sng" algn="ctr">
+                      <a:solidFill>
+                        <a:schemeClr val="tx1"/>
+                      </a:solidFill>
+                      <a:prstDash val="solid"/>
+                      <a:round/>
+                      <a:headEnd type="none" w="med" len="med"/>
+                      <a:tailEnd type="none" w="med" len="med"/>
+                    </a:lnL>
+                    <a:lnR w="12700" cap="flat" cmpd="sng" algn="ctr">
+                      <a:solidFill>
+                        <a:schemeClr val="tx1"/>
+                      </a:solidFill>
+                      <a:prstDash val="solid"/>
+                      <a:round/>
+                      <a:headEnd type="none" w="med" len="med"/>
+                      <a:tailEnd type="none" w="med" len="med"/>
+                    </a:lnR>
+                    <a:lnT w="12700" cap="flat" cmpd="sng" algn="ctr">
+                      <a:solidFill>
+                        <a:schemeClr val="tx1"/>
+                      </a:solidFill>
+                      <a:prstDash val="solid"/>
+                      <a:round/>
+                      <a:headEnd type="none" w="med" len="med"/>
+                      <a:tailEnd type="none" w="med" len="med"/>
+                    </a:lnT>
+                    <a:lnB w="12700" cap="flat" cmpd="sng" algn="ctr">
+                      <a:solidFill>
+                        <a:schemeClr val="tx1"/>
+                      </a:solidFill>
+                      <a:prstDash val="solid"/>
+                      <a:round/>
+                      <a:headEnd type="none" w="med" len="med"/>
+                      <a:tailEnd type="none" w="med" len="med"/>
+                    </a:lnB>
+                    <a:lnTlToBr w="12700" cmpd="sng">
+                      <a:noFill/>
+                      <a:prstDash val="solid"/>
+                    </a:lnTlToBr>
+                    <a:lnBlToTr w="12700" cmpd="sng">
+                      <a:noFill/>
+                      <a:prstDash val="solid"/>
+                    </a:lnBlToTr>
+                  </a:tcPr>
+                </a:tc>
+                <a:tc>
+                  <a:txBody>
+                    <a:bodyPr/>
+                    <a:lstStyle/>
+                    <a:p>
+                      <a:pPr algn="ctr" rtl="0"/>
+                      <a:r>
+                        <a:rPr lang="en-US" altLang="ko-KR" sz="1600" b="1" dirty="0">
+                          <a:solidFill>
+                            <a:schemeClr val="tx1"/>
+                          </a:solidFill>
+                          <a:effectLst/>
+                          <a:latin typeface="+mj-lt"/>
+                        </a:rPr>
+                        <a:t>23.3%</a:t>
+                      </a:r>
+                      <a:br>
+                        <a:rPr lang="en-US" altLang="ko-KR" sz="1600" b="1" dirty="0">
+                          <a:solidFill>
+                            <a:schemeClr val="tx1"/>
+                          </a:solidFill>
+                          <a:effectLst/>
+                          <a:latin typeface="+mj-lt"/>
+                        </a:rPr>
+                      </a:br>
+                      <a:r>
+                        <a:rPr lang="en-US" altLang="ko-KR" sz="1600" b="1" dirty="0">
+                          <a:solidFill>
+                            <a:schemeClr val="tx1"/>
+                          </a:solidFill>
+                          <a:effectLst/>
+                          <a:latin typeface="+mj-lt"/>
+                        </a:rPr>
+                        <a:t>(8.1%)</a:t>
+                      </a:r>
+                    </a:p>
+                  </a:txBody>
+                  <a:tcPr marL="59695" marR="74618" marT="99491" marB="99491" anchor="ctr">
+                    <a:lnL w="12700" cap="flat" cmpd="sng" algn="ctr">
+                      <a:solidFill>
+                        <a:schemeClr val="tx1"/>
+                      </a:solidFill>
+                      <a:prstDash val="solid"/>
+                      <a:round/>
+                      <a:headEnd type="none" w="med" len="med"/>
+                      <a:tailEnd type="none" w="med" len="med"/>
+                    </a:lnL>
+                    <a:lnR w="12700" cap="flat" cmpd="sng" algn="ctr">
+                      <a:solidFill>
+                        <a:schemeClr val="tx1"/>
+                      </a:solidFill>
+                      <a:prstDash val="solid"/>
+                      <a:round/>
+                      <a:headEnd type="none" w="med" len="med"/>
+                      <a:tailEnd type="none" w="med" len="med"/>
+                    </a:lnR>
+                    <a:lnT w="12700" cap="flat" cmpd="sng" algn="ctr">
+                      <a:solidFill>
+                        <a:schemeClr val="tx1"/>
+                      </a:solidFill>
+                      <a:prstDash val="solid"/>
+                      <a:round/>
+                      <a:headEnd type="none" w="med" len="med"/>
+                      <a:tailEnd type="none" w="med" len="med"/>
+                    </a:lnT>
+                    <a:lnB w="12700" cap="flat" cmpd="sng" algn="ctr">
+                      <a:solidFill>
+                        <a:schemeClr val="tx1"/>
+                      </a:solidFill>
+                      <a:prstDash val="solid"/>
+                      <a:round/>
+                      <a:headEnd type="none" w="med" len="med"/>
+                      <a:tailEnd type="none" w="med" len="med"/>
+                    </a:lnB>
+                    <a:lnTlToBr w="12700" cmpd="sng">
+                      <a:noFill/>
+                      <a:prstDash val="solid"/>
+                    </a:lnTlToBr>
+                    <a:lnBlToTr w="12700" cmpd="sng">
+                      <a:noFill/>
+                      <a:prstDash val="solid"/>
+                    </a:lnBlToTr>
+                  </a:tcPr>
+                </a:tc>
+                <a:tc>
+                  <a:txBody>
+                    <a:bodyPr/>
+                    <a:lstStyle/>
+                    <a:p>
+                      <a:pPr algn="ctr" rtl="0"/>
+                      <a:r>
+                        <a:rPr lang="en-US" altLang="ko-KR" sz="1600" b="1" dirty="0">
+                          <a:solidFill>
+                            <a:schemeClr val="tx1"/>
+                          </a:solidFill>
+                          <a:effectLst/>
+                          <a:latin typeface="+mj-lt"/>
+                        </a:rPr>
+                        <a:t>33.1%</a:t>
+                      </a:r>
+                      <a:br>
+                        <a:rPr lang="en-US" altLang="ko-KR" sz="1600" b="1" dirty="0">
+                          <a:solidFill>
+                            <a:schemeClr val="tx1"/>
+                          </a:solidFill>
+                          <a:effectLst/>
+                          <a:latin typeface="+mj-lt"/>
+                        </a:rPr>
+                      </a:br>
+                      <a:r>
+                        <a:rPr lang="en-US" altLang="ko-KR" sz="1600" b="1" dirty="0">
+                          <a:solidFill>
+                            <a:schemeClr val="tx1"/>
+                          </a:solidFill>
+                          <a:effectLst/>
+                          <a:latin typeface="+mj-lt"/>
+                        </a:rPr>
+                        <a:t>(8.6%)</a:t>
+                      </a:r>
+                    </a:p>
+                  </a:txBody>
+                  <a:tcPr marL="59695" marR="74618" marT="99491" marB="99491" anchor="ctr">
+                    <a:lnL w="12700" cap="flat" cmpd="sng" algn="ctr">
+                      <a:solidFill>
+                        <a:schemeClr val="tx1"/>
+                      </a:solidFill>
+                      <a:prstDash val="solid"/>
+                      <a:round/>
+                      <a:headEnd type="none" w="med" len="med"/>
+                      <a:tailEnd type="none" w="med" len="med"/>
+                    </a:lnL>
+                    <a:lnR w="12700" cap="flat" cmpd="sng" algn="ctr">
+                      <a:solidFill>
+                        <a:schemeClr val="tx1"/>
+                      </a:solidFill>
+                      <a:prstDash val="solid"/>
+                      <a:round/>
+                      <a:headEnd type="none" w="med" len="med"/>
+                      <a:tailEnd type="none" w="med" len="med"/>
+                    </a:lnR>
+                    <a:lnT w="12700" cap="flat" cmpd="sng" algn="ctr">
+                      <a:solidFill>
+                        <a:schemeClr val="tx1"/>
+                      </a:solidFill>
+                      <a:prstDash val="solid"/>
+                      <a:round/>
+                      <a:headEnd type="none" w="med" len="med"/>
+                      <a:tailEnd type="none" w="med" len="med"/>
+                    </a:lnT>
+                    <a:lnB w="12700" cap="flat" cmpd="sng" algn="ctr">
+                      <a:solidFill>
+                        <a:schemeClr val="tx1"/>
+                      </a:solidFill>
+                      <a:prstDash val="solid"/>
+                      <a:round/>
+                      <a:headEnd type="none" w="med" len="med"/>
+                      <a:tailEnd type="none" w="med" len="med"/>
+                    </a:lnB>
+                    <a:lnTlToBr w="12700" cmpd="sng">
+                      <a:noFill/>
+                      <a:prstDash val="solid"/>
+                    </a:lnTlToBr>
+                    <a:lnBlToTr w="12700" cmpd="sng">
+                      <a:noFill/>
+                      <a:prstDash val="solid"/>
+                    </a:lnBlToTr>
+                  </a:tcPr>
+                </a:tc>
+                <a:tc>
+                  <a:txBody>
+                    <a:bodyPr/>
+                    <a:lstStyle/>
+                    <a:p>
+                      <a:pPr algn="ctr" rtl="0"/>
+                      <a:r>
+                        <a:rPr lang="en-US" altLang="ko-KR" sz="1600" b="1" dirty="0">
+                          <a:solidFill>
+                            <a:schemeClr val="tx1"/>
+                          </a:solidFill>
+                          <a:effectLst/>
+                          <a:latin typeface="+mj-lt"/>
+                        </a:rPr>
+                        <a:t>-</a:t>
+                      </a:r>
+                    </a:p>
+                  </a:txBody>
+                  <a:tcPr marL="59695" marR="74618" marT="99491" marB="99491" anchor="ctr">
+                    <a:lnL w="12700" cap="flat" cmpd="sng" algn="ctr">
+                      <a:solidFill>
+                        <a:schemeClr val="tx1"/>
+                      </a:solidFill>
+                      <a:prstDash val="solid"/>
+                      <a:round/>
+                      <a:headEnd type="none" w="med" len="med"/>
+                      <a:tailEnd type="none" w="med" len="med"/>
+                    </a:lnL>
+                    <a:lnR w="12700" cap="flat" cmpd="sng" algn="ctr">
+                      <a:solidFill>
+                        <a:schemeClr val="tx1"/>
+                      </a:solidFill>
+                      <a:prstDash val="solid"/>
+                      <a:round/>
+                      <a:headEnd type="none" w="med" len="med"/>
+                      <a:tailEnd type="none" w="med" len="med"/>
+                    </a:lnR>
+                    <a:lnT w="12700" cap="flat" cmpd="sng" algn="ctr">
+                      <a:solidFill>
+                        <a:schemeClr val="tx1"/>
+                      </a:solidFill>
+                      <a:prstDash val="solid"/>
+                      <a:round/>
+                      <a:headEnd type="none" w="med" len="med"/>
+                      <a:tailEnd type="none" w="med" len="med"/>
+                    </a:lnT>
+                    <a:lnB w="12700" cap="flat" cmpd="sng" algn="ctr">
+                      <a:solidFill>
+                        <a:schemeClr val="tx1"/>
+                      </a:solidFill>
+                      <a:prstDash val="solid"/>
+                      <a:round/>
+                      <a:headEnd type="none" w="med" len="med"/>
+                      <a:tailEnd type="none" w="med" len="med"/>
+                    </a:lnB>
+                    <a:lnTlToBr w="12700" cmpd="sng">
+                      <a:noFill/>
+                      <a:prstDash val="solid"/>
+                    </a:lnTlToBr>
+                    <a:lnBlToTr w="12700" cmpd="sng">
+                      <a:noFill/>
+                      <a:prstDash val="solid"/>
+                    </a:lnBlToTr>
+                  </a:tcPr>
+                </a:tc>
+                <a:tc>
+                  <a:txBody>
+                    <a:bodyPr/>
+                    <a:lstStyle/>
+                    <a:p>
+                      <a:pPr algn="ctr" rtl="0"/>
+                      <a:r>
+                        <a:rPr lang="en-US" altLang="ko-KR" sz="1600" b="1" dirty="0">
+                          <a:solidFill>
+                            <a:schemeClr val="tx1"/>
+                          </a:solidFill>
+                          <a:effectLst/>
+                          <a:latin typeface="+mj-lt"/>
+                        </a:rPr>
+                        <a:t>55.6%</a:t>
+                      </a:r>
+                      <a:br>
+                        <a:rPr lang="ko-KR" altLang="en-US" sz="1600" b="1" dirty="0">
+                          <a:solidFill>
+                            <a:schemeClr val="tx1"/>
+                          </a:solidFill>
+                          <a:effectLst/>
+                          <a:latin typeface="+mj-lt"/>
+                        </a:rPr>
+                      </a:br>
+                      <a:r>
+                        <a:rPr lang="en-US" altLang="ko-KR" sz="1600" b="1" dirty="0">
+                          <a:solidFill>
+                            <a:schemeClr val="tx1"/>
+                          </a:solidFill>
+                          <a:effectLst/>
+                          <a:latin typeface="+mj-lt"/>
+                        </a:rPr>
+                        <a:t>(8.3%)</a:t>
+                      </a:r>
+                    </a:p>
+                  </a:txBody>
+                  <a:tcPr marL="59695" marR="59695" marT="99491" marB="99491" anchor="ctr">
+                    <a:lnL w="12700" cap="flat" cmpd="sng" algn="ctr">
+                      <a:solidFill>
+                        <a:schemeClr val="tx1"/>
+                      </a:solidFill>
+                      <a:prstDash val="solid"/>
+                      <a:round/>
+                      <a:headEnd type="none" w="med" len="med"/>
+                      <a:tailEnd type="none" w="med" len="med"/>
+                    </a:lnL>
+                    <a:lnR w="12700" cap="flat" cmpd="sng" algn="ctr">
+                      <a:solidFill>
+                        <a:schemeClr val="tx1"/>
+                      </a:solidFill>
+                      <a:prstDash val="solid"/>
+                      <a:round/>
+                      <a:headEnd type="none" w="med" len="med"/>
+                      <a:tailEnd type="none" w="med" len="med"/>
+                    </a:lnR>
+                    <a:lnT w="12700" cap="flat" cmpd="sng" algn="ctr">
+                      <a:solidFill>
+                        <a:schemeClr val="tx1"/>
+                      </a:solidFill>
+                      <a:prstDash val="solid"/>
+                      <a:round/>
+                      <a:headEnd type="none" w="med" len="med"/>
+                      <a:tailEnd type="none" w="med" len="med"/>
+                    </a:lnT>
+                    <a:lnB w="12700" cap="flat" cmpd="sng" algn="ctr">
+                      <a:solidFill>
+                        <a:schemeClr val="tx1"/>
+                      </a:solidFill>
+                      <a:prstDash val="solid"/>
+                      <a:round/>
+                      <a:headEnd type="none" w="med" len="med"/>
+                      <a:tailEnd type="none" w="med" len="med"/>
+                    </a:lnB>
+                    <a:lnTlToBr w="12700" cmpd="sng">
+                      <a:noFill/>
+                      <a:prstDash val="solid"/>
+                    </a:lnTlToBr>
+                    <a:lnBlToTr w="12700" cmpd="sng">
+                      <a:noFill/>
+                      <a:prstDash val="solid"/>
+                    </a:lnBlToTr>
+                  </a:tcPr>
+                </a:tc>
+                <a:extLst>
+                  <a:ext uri="{0D108BD9-81ED-4DB2-BD59-A6C34878D82A}">
+                    <a16:rowId xmlns:a16="http://schemas.microsoft.com/office/drawing/2014/main" val="2605483144"/>
+                  </a:ext>
+                </a:extLst>
+              </a:tr>
+              <a:tr h="448927">
+                <a:tc>
+                  <a:txBody>
+                    <a:bodyPr/>
+                    <a:lstStyle/>
+                    <a:p>
+                      <a:pPr algn="ctr" rtl="0"/>
+                      <a:r>
+                        <a:rPr lang="en-US" altLang="ko-KR" sz="1600" b="1" dirty="0">
+                          <a:solidFill>
+                            <a:schemeClr val="tx1"/>
+                          </a:solidFill>
+                          <a:effectLst/>
+                          <a:latin typeface="+mj-lt"/>
+                        </a:rPr>
+                        <a:t>(12, 1)</a:t>
+                      </a:r>
+                      <a:endParaRPr lang="ko-KR" altLang="en-US" sz="1600" b="1" dirty="0">
+                        <a:solidFill>
+                          <a:schemeClr val="tx1"/>
+                        </a:solidFill>
+                        <a:effectLst/>
+                        <a:latin typeface="+mj-lt"/>
+                      </a:endParaRPr>
+                    </a:p>
+                  </a:txBody>
+                  <a:tcPr marL="59695" marR="74618" marT="99491" marB="99491" anchor="ctr">
+                    <a:lnL w="12700" cap="flat" cmpd="sng" algn="ctr">
+                      <a:solidFill>
+                        <a:schemeClr val="tx1"/>
+                      </a:solidFill>
+                      <a:prstDash val="solid"/>
+                      <a:round/>
+                      <a:headEnd type="none" w="med" len="med"/>
+                      <a:tailEnd type="none" w="med" len="med"/>
+                    </a:lnL>
+                    <a:lnR w="12700" cap="flat" cmpd="sng" algn="ctr">
+                      <a:solidFill>
+                        <a:schemeClr val="tx1"/>
+                      </a:solidFill>
+                      <a:prstDash val="solid"/>
+                      <a:round/>
+                      <a:headEnd type="none" w="med" len="med"/>
+                      <a:tailEnd type="none" w="med" len="med"/>
+                    </a:lnR>
+                    <a:lnT w="12700" cap="flat" cmpd="sng" algn="ctr">
+                      <a:solidFill>
+                        <a:schemeClr val="tx1"/>
+                      </a:solidFill>
+                      <a:prstDash val="solid"/>
+                      <a:round/>
+                      <a:headEnd type="none" w="med" len="med"/>
+                      <a:tailEnd type="none" w="med" len="med"/>
+                    </a:lnT>
+                    <a:lnB w="12700" cap="flat" cmpd="sng" algn="ctr">
+                      <a:solidFill>
+                        <a:schemeClr val="tx1"/>
+                      </a:solidFill>
+                      <a:prstDash val="solid"/>
+                      <a:round/>
+                      <a:headEnd type="none" w="med" len="med"/>
+                      <a:tailEnd type="none" w="med" len="med"/>
+                    </a:lnB>
+                    <a:lnTlToBr w="12700" cmpd="sng">
+                      <a:noFill/>
+                      <a:prstDash val="solid"/>
+                    </a:lnTlToBr>
+                    <a:lnBlToTr w="12700" cmpd="sng">
+                      <a:noFill/>
+                      <a:prstDash val="solid"/>
+                    </a:lnBlToTr>
+                  </a:tcPr>
+                </a:tc>
+                <a:tc>
+                  <a:txBody>
+                    <a:bodyPr/>
+                    <a:lstStyle/>
+                    <a:p>
+                      <a:pPr algn="ctr" rtl="0"/>
+                      <a:r>
+                        <a:rPr lang="en-US" altLang="ko-KR" sz="1600" b="1" dirty="0">
+                          <a:solidFill>
+                            <a:schemeClr val="tx1"/>
+                          </a:solidFill>
+                          <a:effectLst/>
+                          <a:latin typeface="+mj-lt"/>
+                        </a:rPr>
+                        <a:t>6.5%</a:t>
+                      </a:r>
+                      <a:br>
+                        <a:rPr lang="en-US" altLang="ko-KR" sz="1600" b="1" dirty="0">
+                          <a:solidFill>
+                            <a:schemeClr val="tx1"/>
+                          </a:solidFill>
+                          <a:effectLst/>
+                          <a:latin typeface="+mj-lt"/>
+                        </a:rPr>
+                      </a:br>
+                      <a:r>
+                        <a:rPr lang="en-US" altLang="ko-KR" sz="1600" b="1" dirty="0">
+                          <a:solidFill>
+                            <a:schemeClr val="tx1"/>
+                          </a:solidFill>
+                          <a:effectLst/>
+                          <a:latin typeface="+mj-lt"/>
+                        </a:rPr>
+                        <a:t>(3.9%)</a:t>
+                      </a:r>
+                    </a:p>
+                  </a:txBody>
+                  <a:tcPr marL="59695" marR="74618" marT="99491" marB="99491" anchor="ctr">
+                    <a:lnL w="12700" cap="flat" cmpd="sng" algn="ctr">
+                      <a:solidFill>
+                        <a:schemeClr val="tx1"/>
+                      </a:solidFill>
+                      <a:prstDash val="solid"/>
+                      <a:round/>
+                      <a:headEnd type="none" w="med" len="med"/>
+                      <a:tailEnd type="none" w="med" len="med"/>
+                    </a:lnL>
+                    <a:lnR w="12700" cap="flat" cmpd="sng" algn="ctr">
+                      <a:solidFill>
+                        <a:schemeClr val="tx1"/>
+                      </a:solidFill>
+                      <a:prstDash val="solid"/>
+                      <a:round/>
+                      <a:headEnd type="none" w="med" len="med"/>
+                      <a:tailEnd type="none" w="med" len="med"/>
+                    </a:lnR>
+                    <a:lnT w="12700" cap="flat" cmpd="sng" algn="ctr">
+                      <a:solidFill>
+                        <a:schemeClr val="tx1"/>
+                      </a:solidFill>
+                      <a:prstDash val="solid"/>
+                      <a:round/>
+                      <a:headEnd type="none" w="med" len="med"/>
+                      <a:tailEnd type="none" w="med" len="med"/>
+                    </a:lnT>
+                    <a:lnB w="12700" cap="flat" cmpd="sng" algn="ctr">
+                      <a:solidFill>
+                        <a:schemeClr val="tx1"/>
+                      </a:solidFill>
+                      <a:prstDash val="solid"/>
+                      <a:round/>
+                      <a:headEnd type="none" w="med" len="med"/>
+                      <a:tailEnd type="none" w="med" len="med"/>
+                    </a:lnB>
+                    <a:lnTlToBr w="12700" cmpd="sng">
+                      <a:noFill/>
+                      <a:prstDash val="solid"/>
+                    </a:lnTlToBr>
+                    <a:lnBlToTr w="12700" cmpd="sng">
+                      <a:noFill/>
+                      <a:prstDash val="solid"/>
+                    </a:lnBlToTr>
+                  </a:tcPr>
+                </a:tc>
+                <a:tc>
+                  <a:txBody>
+                    <a:bodyPr/>
+                    <a:lstStyle/>
+                    <a:p>
+                      <a:pPr algn="ctr" rtl="0"/>
+                      <a:r>
+                        <a:rPr lang="en-US" altLang="ko-KR" sz="1600" b="1" dirty="0">
+                          <a:solidFill>
+                            <a:schemeClr val="tx1"/>
+                          </a:solidFill>
+                          <a:effectLst/>
+                          <a:latin typeface="+mj-lt"/>
+                        </a:rPr>
+                        <a:t>18.2%</a:t>
+                      </a:r>
+                      <a:br>
+                        <a:rPr lang="en-US" altLang="ko-KR" sz="1600" b="1" dirty="0">
+                          <a:solidFill>
+                            <a:schemeClr val="tx1"/>
+                          </a:solidFill>
+                          <a:effectLst/>
+                          <a:latin typeface="+mj-lt"/>
+                        </a:rPr>
+                      </a:br>
+                      <a:r>
+                        <a:rPr lang="en-US" altLang="ko-KR" sz="1600" b="1" dirty="0">
+                          <a:solidFill>
+                            <a:schemeClr val="tx1"/>
+                          </a:solidFill>
+                          <a:effectLst/>
+                          <a:latin typeface="+mj-lt"/>
+                        </a:rPr>
+                        <a:t>(6.7%)</a:t>
+                      </a:r>
+                    </a:p>
+                  </a:txBody>
+                  <a:tcPr marL="59695" marR="74618" marT="99491" marB="99491" anchor="ctr">
+                    <a:lnL w="12700" cap="flat" cmpd="sng" algn="ctr">
+                      <a:solidFill>
+                        <a:schemeClr val="tx1"/>
+                      </a:solidFill>
+                      <a:prstDash val="solid"/>
+                      <a:round/>
+                      <a:headEnd type="none" w="med" len="med"/>
+                      <a:tailEnd type="none" w="med" len="med"/>
+                    </a:lnL>
+                    <a:lnR w="12700" cap="flat" cmpd="sng" algn="ctr">
+                      <a:solidFill>
+                        <a:schemeClr val="tx1"/>
+                      </a:solidFill>
+                      <a:prstDash val="solid"/>
+                      <a:round/>
+                      <a:headEnd type="none" w="med" len="med"/>
+                      <a:tailEnd type="none" w="med" len="med"/>
+                    </a:lnR>
+                    <a:lnT w="12700" cap="flat" cmpd="sng" algn="ctr">
+                      <a:solidFill>
+                        <a:schemeClr val="tx1"/>
+                      </a:solidFill>
+                      <a:prstDash val="solid"/>
+                      <a:round/>
+                      <a:headEnd type="none" w="med" len="med"/>
+                      <a:tailEnd type="none" w="med" len="med"/>
+                    </a:lnT>
+                    <a:lnB w="12700" cap="flat" cmpd="sng" algn="ctr">
+                      <a:solidFill>
+                        <a:schemeClr val="tx1"/>
+                      </a:solidFill>
+                      <a:prstDash val="solid"/>
+                      <a:round/>
+                      <a:headEnd type="none" w="med" len="med"/>
+                      <a:tailEnd type="none" w="med" len="med"/>
+                    </a:lnB>
+                    <a:lnTlToBr w="12700" cmpd="sng">
+                      <a:noFill/>
+                      <a:prstDash val="solid"/>
+                    </a:lnTlToBr>
+                    <a:lnBlToTr w="12700" cmpd="sng">
+                      <a:noFill/>
+                      <a:prstDash val="solid"/>
+                    </a:lnBlToTr>
+                  </a:tcPr>
+                </a:tc>
+                <a:tc>
+                  <a:txBody>
+                    <a:bodyPr/>
+                    <a:lstStyle/>
+                    <a:p>
+                      <a:pPr algn="ctr" rtl="0"/>
+                      <a:r>
+                        <a:rPr lang="en-US" altLang="ko-KR" sz="1600" b="1" dirty="0">
+                          <a:solidFill>
+                            <a:schemeClr val="tx1"/>
+                          </a:solidFill>
+                          <a:effectLst/>
+                          <a:latin typeface="+mj-lt"/>
+                        </a:rPr>
+                        <a:t>27.1%</a:t>
+                      </a:r>
+                      <a:br>
+                        <a:rPr lang="en-US" altLang="ko-KR" sz="1600" b="1" dirty="0">
+                          <a:solidFill>
+                            <a:schemeClr val="tx1"/>
+                          </a:solidFill>
+                          <a:effectLst/>
+                          <a:latin typeface="+mj-lt"/>
+                        </a:rPr>
+                      </a:br>
+                      <a:r>
+                        <a:rPr lang="en-US" altLang="ko-KR" sz="1600" b="1" dirty="0">
+                          <a:solidFill>
+                            <a:schemeClr val="tx1"/>
+                          </a:solidFill>
+                          <a:effectLst/>
+                          <a:latin typeface="+mj-lt"/>
+                        </a:rPr>
+                        <a:t>(7.8%)</a:t>
+                      </a:r>
+                    </a:p>
+                  </a:txBody>
+                  <a:tcPr marL="59695" marR="74618" marT="99491" marB="99491" anchor="ctr">
+                    <a:lnL w="12700" cap="flat" cmpd="sng" algn="ctr">
+                      <a:solidFill>
+                        <a:schemeClr val="tx1"/>
+                      </a:solidFill>
+                      <a:prstDash val="solid"/>
+                      <a:round/>
+                      <a:headEnd type="none" w="med" len="med"/>
+                      <a:tailEnd type="none" w="med" len="med"/>
+                    </a:lnL>
+                    <a:lnR w="12700" cap="flat" cmpd="sng" algn="ctr">
+                      <a:solidFill>
+                        <a:schemeClr val="tx1"/>
+                      </a:solidFill>
+                      <a:prstDash val="solid"/>
+                      <a:round/>
+                      <a:headEnd type="none" w="med" len="med"/>
+                      <a:tailEnd type="none" w="med" len="med"/>
+                    </a:lnR>
+                    <a:lnT w="12700" cap="flat" cmpd="sng" algn="ctr">
+                      <a:solidFill>
+                        <a:schemeClr val="tx1"/>
+                      </a:solidFill>
+                      <a:prstDash val="solid"/>
+                      <a:round/>
+                      <a:headEnd type="none" w="med" len="med"/>
+                      <a:tailEnd type="none" w="med" len="med"/>
+                    </a:lnT>
+                    <a:lnB w="12700" cap="flat" cmpd="sng" algn="ctr">
+                      <a:solidFill>
+                        <a:schemeClr val="tx1"/>
+                      </a:solidFill>
+                      <a:prstDash val="solid"/>
+                      <a:round/>
+                      <a:headEnd type="none" w="med" len="med"/>
+                      <a:tailEnd type="none" w="med" len="med"/>
+                    </a:lnB>
+                    <a:lnTlToBr w="12700" cmpd="sng">
+                      <a:noFill/>
+                      <a:prstDash val="solid"/>
+                    </a:lnTlToBr>
+                    <a:lnBlToTr w="12700" cmpd="sng">
+                      <a:noFill/>
+                      <a:prstDash val="solid"/>
+                    </a:lnBlToTr>
+                  </a:tcPr>
+                </a:tc>
+                <a:tc>
+                  <a:txBody>
+                    <a:bodyPr/>
+                    <a:lstStyle/>
+                    <a:p>
+                      <a:pPr algn="ctr" rtl="0"/>
+                      <a:r>
+                        <a:rPr lang="en-US" altLang="ko-KR" sz="1600" b="1" dirty="0">
+                          <a:solidFill>
+                            <a:schemeClr val="tx1"/>
+                          </a:solidFill>
+                          <a:effectLst/>
+                          <a:latin typeface="+mj-lt"/>
+                        </a:rPr>
+                        <a:t>36.1%</a:t>
+                      </a:r>
+                      <a:br>
+                        <a:rPr lang="en-US" altLang="ko-KR" sz="1600" b="1" dirty="0">
+                          <a:solidFill>
+                            <a:schemeClr val="tx1"/>
+                          </a:solidFill>
+                          <a:effectLst/>
+                          <a:latin typeface="+mj-lt"/>
+                        </a:rPr>
+                      </a:br>
+                      <a:r>
+                        <a:rPr lang="en-US" altLang="ko-KR" sz="1600" b="1" dirty="0">
+                          <a:solidFill>
+                            <a:schemeClr val="tx1"/>
+                          </a:solidFill>
+                          <a:effectLst/>
+                          <a:latin typeface="+mj-lt"/>
+                        </a:rPr>
+                        <a:t>(8.3%)</a:t>
+                      </a:r>
+                    </a:p>
+                  </a:txBody>
+                  <a:tcPr marL="59695" marR="74618" marT="99491" marB="99491" anchor="ctr">
+                    <a:lnL w="12700" cap="flat" cmpd="sng" algn="ctr">
+                      <a:solidFill>
+                        <a:schemeClr val="tx1"/>
+                      </a:solidFill>
+                      <a:prstDash val="solid"/>
+                      <a:round/>
+                      <a:headEnd type="none" w="med" len="med"/>
+                      <a:tailEnd type="none" w="med" len="med"/>
+                    </a:lnL>
+                    <a:lnR w="12700" cap="flat" cmpd="sng" algn="ctr">
+                      <a:solidFill>
+                        <a:schemeClr val="tx1"/>
+                      </a:solidFill>
+                      <a:prstDash val="solid"/>
+                      <a:round/>
+                      <a:headEnd type="none" w="med" len="med"/>
+                      <a:tailEnd type="none" w="med" len="med"/>
+                    </a:lnR>
+                    <a:lnT w="12700" cap="flat" cmpd="sng" algn="ctr">
+                      <a:solidFill>
+                        <a:schemeClr val="tx1"/>
+                      </a:solidFill>
+                      <a:prstDash val="solid"/>
+                      <a:round/>
+                      <a:headEnd type="none" w="med" len="med"/>
+                      <a:tailEnd type="none" w="med" len="med"/>
+                    </a:lnT>
+                    <a:lnB w="12700" cap="flat" cmpd="sng" algn="ctr">
+                      <a:solidFill>
+                        <a:schemeClr val="tx1"/>
+                      </a:solidFill>
+                      <a:prstDash val="solid"/>
+                      <a:round/>
+                      <a:headEnd type="none" w="med" len="med"/>
+                      <a:tailEnd type="none" w="med" len="med"/>
+                    </a:lnB>
+                    <a:lnTlToBr w="12700" cmpd="sng">
+                      <a:noFill/>
+                      <a:prstDash val="solid"/>
+                    </a:lnTlToBr>
+                    <a:lnBlToTr w="12700" cmpd="sng">
+                      <a:noFill/>
+                      <a:prstDash val="solid"/>
+                    </a:lnBlToTr>
+                  </a:tcPr>
+                </a:tc>
+                <a:tc>
+                  <a:txBody>
+                    <a:bodyPr/>
+                    <a:lstStyle/>
+                    <a:p>
+                      <a:pPr algn="ctr" rtl="0"/>
+                      <a:r>
+                        <a:rPr lang="en-US" altLang="ko-KR" sz="1600" b="1" dirty="0">
+                          <a:solidFill>
+                            <a:schemeClr val="tx1"/>
+                          </a:solidFill>
+                          <a:effectLst/>
+                          <a:latin typeface="+mj-lt"/>
+                        </a:rPr>
+                        <a:t>-</a:t>
+                      </a:r>
+                    </a:p>
+                  </a:txBody>
+                  <a:tcPr marL="59695" marR="59695" marT="99491" marB="99491" anchor="ctr">
+                    <a:lnL w="12700" cap="flat" cmpd="sng" algn="ctr">
+                      <a:solidFill>
+                        <a:schemeClr val="tx1"/>
+                      </a:solidFill>
+                      <a:prstDash val="solid"/>
+                      <a:round/>
+                      <a:headEnd type="none" w="med" len="med"/>
+                      <a:tailEnd type="none" w="med" len="med"/>
+                    </a:lnL>
+                    <a:lnR w="12700" cap="flat" cmpd="sng" algn="ctr">
+                      <a:solidFill>
+                        <a:schemeClr val="tx1"/>
+                      </a:solidFill>
+                      <a:prstDash val="solid"/>
+                      <a:round/>
+                      <a:headEnd type="none" w="med" len="med"/>
+                      <a:tailEnd type="none" w="med" len="med"/>
+                    </a:lnR>
+                    <a:lnT w="12700" cap="flat" cmpd="sng" algn="ctr">
+                      <a:solidFill>
+                        <a:schemeClr val="tx1"/>
+                      </a:solidFill>
+                      <a:prstDash val="solid"/>
+                      <a:round/>
+                      <a:headEnd type="none" w="med" len="med"/>
+                      <a:tailEnd type="none" w="med" len="med"/>
+                    </a:lnT>
+                    <a:lnB w="12700" cap="flat" cmpd="sng" algn="ctr">
+                      <a:solidFill>
+                        <a:schemeClr val="tx1"/>
+                      </a:solidFill>
+                      <a:prstDash val="solid"/>
+                      <a:round/>
+                      <a:headEnd type="none" w="med" len="med"/>
+                      <a:tailEnd type="none" w="med" len="med"/>
+                    </a:lnB>
+                    <a:lnTlToBr w="12700" cmpd="sng">
+                      <a:noFill/>
+                      <a:prstDash val="solid"/>
+                    </a:lnTlToBr>
+                    <a:lnBlToTr w="12700" cmpd="sng">
+                      <a:noFill/>
+                      <a:prstDash val="solid"/>
+                    </a:lnBlToTr>
+                  </a:tcPr>
+                </a:tc>
+                <a:extLst>
+                  <a:ext uri="{0D108BD9-81ED-4DB2-BD59-A6C34878D82A}">
+                    <a16:rowId xmlns:a16="http://schemas.microsoft.com/office/drawing/2014/main" val="4138255253"/>
+                  </a:ext>
+                </a:extLst>
+              </a:tr>
+            </a:tbl>
+          </a:graphicData>
+        </a:graphic>
+      </p:graphicFrame>
+    </p:spTree>
+    <p:extLst>
+      <p:ext uri="{BB962C8B-B14F-4D97-AF65-F5344CB8AC3E}">
+        <p14:creationId xmlns:p14="http://schemas.microsoft.com/office/powerpoint/2010/main" val="1889785076"/>
+      </p:ext>
+    </p:extLst>
+  </p:cSld>
+  <p:clrMapOvr>
+    <a:masterClrMapping/>
+  </p:clrMapOvr>
+</p:sld>
+</file>
+
+<file path=ppt/slides/slide12.xml><?xml version="1.0" encoding="utf-8"?>
+<p:sld xmlns:a="http://schemas.openxmlformats.org/drawingml/2006/main" xmlns:r="http://schemas.openxmlformats.org/officeDocument/2006/relationships" xmlns:p="http://schemas.openxmlformats.org/presentationml/2006/main">
+  <p:cSld>
+    <p:spTree>
+      <p:nvGrpSpPr>
         <p:cNvPr id="1" name="">
           <a:extLst>
             <a:ext uri="{FF2B5EF4-FFF2-40B4-BE49-F238E27FC236}">
@@ -8746,7 +11685,7 @@
 </p:sld>
 </file>
 
-<file path=ppt/slides/slide12.xml><?xml version="1.0" encoding="utf-8"?>
+<file path=ppt/slides/slide13.xml><?xml version="1.0" encoding="utf-8"?>
 <p:sld xmlns:a="http://schemas.openxmlformats.org/drawingml/2006/main" xmlns:r="http://schemas.openxmlformats.org/officeDocument/2006/relationships" xmlns:p="http://schemas.openxmlformats.org/presentationml/2006/main">
   <p:cSld>
     <p:spTree>
@@ -8884,7 +11823,7 @@
 </p:sld>
 </file>
 
-<file path=ppt/slides/slide13.xml><?xml version="1.0" encoding="utf-8"?>
+<file path=ppt/slides/slide14.xml><?xml version="1.0" encoding="utf-8"?>
 <p:sld xmlns:a="http://schemas.openxmlformats.org/drawingml/2006/main" xmlns:r="http://schemas.openxmlformats.org/officeDocument/2006/relationships" xmlns:p="http://schemas.openxmlformats.org/presentationml/2006/main">
   <p:cSld>
     <p:spTree>
@@ -11293,291 +14232,957 @@
           </a:p>
         </p:txBody>
       </p:sp>
-      <p:sp>
-        <p:nvSpPr>
-          <p:cNvPr id="3" name="타원 2">
+      <p:pic>
+        <p:nvPicPr>
+          <p:cNvPr id="31" name="그림 30">
             <a:extLst>
               <a:ext uri="{FF2B5EF4-FFF2-40B4-BE49-F238E27FC236}">
-                <a16:creationId xmlns:a16="http://schemas.microsoft.com/office/drawing/2014/main" id="{491CD6DA-5997-75BF-18C2-5376086A524B}"/>
+                <a16:creationId xmlns:a16="http://schemas.microsoft.com/office/drawing/2014/main" id="{0A2C5285-AE8F-419B-B541-0DB80AA2890C}"/>
               </a:ext>
             </a:extLst>
           </p:cNvPr>
-          <p:cNvSpPr/>
+          <p:cNvPicPr>
+            <a:picLocks noChangeAspect="1"/>
+          </p:cNvPicPr>
           <p:nvPr/>
-        </p:nvSpPr>
+        </p:nvPicPr>
+        <p:blipFill>
+          <a:blip r:embed="rId2">
+            <a:extLst>
+              <a:ext uri="{28A0092B-C50C-407E-A947-70E740481C1C}">
+                <a14:useLocalDpi xmlns:a14="http://schemas.microsoft.com/office/drawing/2010/main" val="0"/>
+              </a:ext>
+            </a:extLst>
+          </a:blip>
+          <a:stretch>
+            <a:fillRect/>
+          </a:stretch>
+        </p:blipFill>
         <p:spPr>
           <a:xfrm>
-            <a:off x="1275008" y="1610401"/>
-            <a:ext cx="1624402" cy="1337393"/>
+            <a:off x="5066966" y="1179513"/>
+            <a:ext cx="2058478" cy="2058478"/>
           </a:xfrm>
-          <a:prstGeom prst="ellipse">
+          <a:prstGeom prst="rect">
             <a:avLst/>
           </a:prstGeom>
+          <a:ln>
+            <a:noFill/>
+          </a:ln>
         </p:spPr>
-        <p:style>
-          <a:lnRef idx="2">
-            <a:schemeClr val="accent1">
-              <a:shade val="15000"/>
-            </a:schemeClr>
-          </a:lnRef>
-          <a:fillRef idx="1">
-            <a:schemeClr val="accent1"/>
-          </a:fillRef>
-          <a:effectRef idx="0">
-            <a:schemeClr val="accent1"/>
-          </a:effectRef>
-          <a:fontRef idx="minor">
-            <a:schemeClr val="lt1"/>
-          </a:fontRef>
-        </p:style>
-        <p:txBody>
-          <a:bodyPr rtlCol="0" anchor="ctr"/>
-          <a:lstStyle/>
-          <a:p>
-            <a:pPr algn="ctr"/>
-            <a:r>
-              <a:rPr lang="ko-KR" altLang="en-US" sz="1200" dirty="0"/>
-              <a:t>다이스</a:t>
-            </a:r>
-            <a:endParaRPr lang="en-US" altLang="ko-KR" sz="1200" dirty="0"/>
-          </a:p>
-          <a:p>
-            <a:pPr algn="ctr"/>
-            <a:r>
-              <a:rPr lang="ko-KR" altLang="en-US" sz="1200" dirty="0"/>
-              <a:t>아이콘</a:t>
-            </a:r>
-          </a:p>
-        </p:txBody>
-      </p:sp>
-      <p:sp>
-        <p:nvSpPr>
-          <p:cNvPr id="10" name="타원 9">
+      </p:pic>
+      <p:pic>
+        <p:nvPicPr>
+          <p:cNvPr id="33" name="그림 32">
             <a:extLst>
               <a:ext uri="{FF2B5EF4-FFF2-40B4-BE49-F238E27FC236}">
-                <a16:creationId xmlns:a16="http://schemas.microsoft.com/office/drawing/2014/main" id="{1C9D0674-2478-EDAF-B924-89F395FD610A}"/>
+                <a16:creationId xmlns:a16="http://schemas.microsoft.com/office/drawing/2014/main" id="{3818935A-4D96-48B7-B2DB-54A22BA1495B}"/>
               </a:ext>
             </a:extLst>
           </p:cNvPr>
-          <p:cNvSpPr/>
+          <p:cNvPicPr>
+            <a:picLocks noChangeAspect="1"/>
+          </p:cNvPicPr>
           <p:nvPr/>
-        </p:nvSpPr>
+        </p:nvPicPr>
+        <p:blipFill>
+          <a:blip r:embed="rId3">
+            <a:extLst>
+              <a:ext uri="{28A0092B-C50C-407E-A947-70E740481C1C}">
+                <a14:useLocalDpi xmlns:a14="http://schemas.microsoft.com/office/drawing/2010/main" val="0"/>
+              </a:ext>
+            </a:extLst>
+          </a:blip>
+          <a:stretch>
+            <a:fillRect/>
+          </a:stretch>
+        </p:blipFill>
         <p:spPr>
           <a:xfrm>
-            <a:off x="3679158" y="1610401"/>
-            <a:ext cx="1624402" cy="1337393"/>
+            <a:off x="2993051" y="1179513"/>
+            <a:ext cx="2058478" cy="2058478"/>
           </a:xfrm>
-          <a:prstGeom prst="ellipse">
+          <a:prstGeom prst="rect">
             <a:avLst/>
           </a:prstGeom>
+          <a:ln>
+            <a:noFill/>
+          </a:ln>
         </p:spPr>
-        <p:style>
-          <a:lnRef idx="2">
-            <a:schemeClr val="accent1">
-              <a:shade val="15000"/>
-            </a:schemeClr>
-          </a:lnRef>
-          <a:fillRef idx="1">
-            <a:schemeClr val="accent1"/>
-          </a:fillRef>
-          <a:effectRef idx="0">
-            <a:schemeClr val="accent1"/>
-          </a:effectRef>
-          <a:fontRef idx="minor">
-            <a:schemeClr val="lt1"/>
-          </a:fontRef>
-        </p:style>
-        <p:txBody>
-          <a:bodyPr rtlCol="0" anchor="ctr"/>
-          <a:lstStyle/>
-          <a:p>
-            <a:pPr algn="ctr"/>
-            <a:r>
-              <a:rPr lang="ko-KR" altLang="en-US" sz="1200" dirty="0"/>
-              <a:t>다이스</a:t>
-            </a:r>
-            <a:endParaRPr lang="en-US" altLang="ko-KR" sz="1200" dirty="0"/>
-          </a:p>
-          <a:p>
-            <a:pPr algn="ctr"/>
-            <a:r>
-              <a:rPr lang="ko-KR" altLang="en-US" sz="1200" dirty="0"/>
-              <a:t>아이콘</a:t>
-            </a:r>
-          </a:p>
-        </p:txBody>
-      </p:sp>
-      <p:sp>
-        <p:nvSpPr>
-          <p:cNvPr id="12" name="타원 11">
+      </p:pic>
+      <p:pic>
+        <p:nvPicPr>
+          <p:cNvPr id="35" name="그림 34">
             <a:extLst>
               <a:ext uri="{FF2B5EF4-FFF2-40B4-BE49-F238E27FC236}">
-                <a16:creationId xmlns:a16="http://schemas.microsoft.com/office/drawing/2014/main" id="{C48E9216-2003-84E6-6754-48993292852F}"/>
+                <a16:creationId xmlns:a16="http://schemas.microsoft.com/office/drawing/2014/main" id="{1CFCEE2D-7E47-48F9-9CE4-1FAE312A7678}"/>
               </a:ext>
             </a:extLst>
           </p:cNvPr>
-          <p:cNvSpPr/>
+          <p:cNvPicPr>
+            <a:picLocks noChangeAspect="1"/>
+          </p:cNvPicPr>
           <p:nvPr/>
-        </p:nvSpPr>
+        </p:nvPicPr>
+        <p:blipFill>
+          <a:blip r:embed="rId4">
+            <a:extLst>
+              <a:ext uri="{28A0092B-C50C-407E-A947-70E740481C1C}">
+                <a14:useLocalDpi xmlns:a14="http://schemas.microsoft.com/office/drawing/2010/main" val="0"/>
+              </a:ext>
+            </a:extLst>
+          </a:blip>
+          <a:stretch>
+            <a:fillRect/>
+          </a:stretch>
+        </p:blipFill>
         <p:spPr>
           <a:xfrm>
-            <a:off x="5667209" y="1610401"/>
-            <a:ext cx="1624402" cy="1337393"/>
+            <a:off x="919136" y="1179513"/>
+            <a:ext cx="2058478" cy="2058478"/>
           </a:xfrm>
-          <a:prstGeom prst="ellipse">
+          <a:prstGeom prst="rect">
             <a:avLst/>
           </a:prstGeom>
+          <a:ln>
+            <a:noFill/>
+          </a:ln>
         </p:spPr>
-        <p:style>
-          <a:lnRef idx="2">
-            <a:schemeClr val="accent1">
-              <a:shade val="15000"/>
-            </a:schemeClr>
-          </a:lnRef>
-          <a:fillRef idx="1">
-            <a:schemeClr val="accent1"/>
-          </a:fillRef>
-          <a:effectRef idx="0">
-            <a:schemeClr val="accent1"/>
-          </a:effectRef>
-          <a:fontRef idx="minor">
-            <a:schemeClr val="lt1"/>
-          </a:fontRef>
-        </p:style>
-        <p:txBody>
-          <a:bodyPr rtlCol="0" anchor="ctr"/>
-          <a:lstStyle/>
-          <a:p>
-            <a:pPr algn="ctr"/>
-            <a:r>
-              <a:rPr lang="ko-KR" altLang="en-US" sz="1200" dirty="0"/>
-              <a:t>다이스</a:t>
-            </a:r>
-            <a:endParaRPr lang="en-US" altLang="ko-KR" sz="1200" dirty="0"/>
-          </a:p>
-          <a:p>
-            <a:pPr algn="ctr"/>
-            <a:r>
-              <a:rPr lang="ko-KR" altLang="en-US" sz="1200" dirty="0"/>
-              <a:t>아이콘</a:t>
-            </a:r>
-          </a:p>
-        </p:txBody>
-      </p:sp>
-      <p:sp>
-        <p:nvSpPr>
-          <p:cNvPr id="14" name="타원 13">
+      </p:pic>
+      <p:pic>
+        <p:nvPicPr>
+          <p:cNvPr id="37" name="그림 36">
             <a:extLst>
               <a:ext uri="{FF2B5EF4-FFF2-40B4-BE49-F238E27FC236}">
-                <a16:creationId xmlns:a16="http://schemas.microsoft.com/office/drawing/2014/main" id="{5E85E0BA-E720-DFF0-F4C2-EC5873FB4BFF}"/>
+                <a16:creationId xmlns:a16="http://schemas.microsoft.com/office/drawing/2014/main" id="{4DFFB6EC-D50C-4A3F-9B7F-7C48BCAA788D}"/>
               </a:ext>
             </a:extLst>
           </p:cNvPr>
-          <p:cNvSpPr/>
+          <p:cNvPicPr>
+            <a:picLocks noChangeAspect="1"/>
+          </p:cNvPicPr>
           <p:nvPr/>
-        </p:nvSpPr>
+        </p:nvPicPr>
+        <p:blipFill>
+          <a:blip r:embed="rId5">
+            <a:extLst>
+              <a:ext uri="{28A0092B-C50C-407E-A947-70E740481C1C}">
+                <a14:useLocalDpi xmlns:a14="http://schemas.microsoft.com/office/drawing/2010/main" val="0"/>
+              </a:ext>
+            </a:extLst>
+          </a:blip>
+          <a:stretch>
+            <a:fillRect/>
+          </a:stretch>
+        </p:blipFill>
         <p:spPr>
           <a:xfrm>
-            <a:off x="7655260" y="1610401"/>
-            <a:ext cx="1624402" cy="1337393"/>
+            <a:off x="9214386" y="1179513"/>
+            <a:ext cx="2058478" cy="2058478"/>
           </a:xfrm>
-          <a:prstGeom prst="ellipse">
+          <a:prstGeom prst="rect">
             <a:avLst/>
           </a:prstGeom>
+          <a:ln>
+            <a:noFill/>
+          </a:ln>
         </p:spPr>
-        <p:style>
-          <a:lnRef idx="2">
-            <a:schemeClr val="accent1">
-              <a:shade val="15000"/>
-            </a:schemeClr>
-          </a:lnRef>
-          <a:fillRef idx="1">
-            <a:schemeClr val="accent1"/>
-          </a:fillRef>
-          <a:effectRef idx="0">
-            <a:schemeClr val="accent1"/>
-          </a:effectRef>
-          <a:fontRef idx="minor">
-            <a:schemeClr val="lt1"/>
-          </a:fontRef>
-        </p:style>
-        <p:txBody>
-          <a:bodyPr rtlCol="0" anchor="ctr"/>
-          <a:lstStyle/>
-          <a:p>
-            <a:pPr algn="ctr"/>
-            <a:r>
-              <a:rPr lang="ko-KR" altLang="en-US" sz="1200" dirty="0"/>
-              <a:t>다이스</a:t>
-            </a:r>
-            <a:endParaRPr lang="en-US" altLang="ko-KR" sz="1200" dirty="0"/>
-          </a:p>
-          <a:p>
-            <a:pPr algn="ctr"/>
-            <a:r>
-              <a:rPr lang="ko-KR" altLang="en-US" sz="1200" dirty="0"/>
-              <a:t>아이콘</a:t>
-            </a:r>
-          </a:p>
-        </p:txBody>
-      </p:sp>
-      <p:sp>
-        <p:nvSpPr>
-          <p:cNvPr id="16" name="타원 15">
+      </p:pic>
+      <p:pic>
+        <p:nvPicPr>
+          <p:cNvPr id="39" name="그림 38">
             <a:extLst>
               <a:ext uri="{FF2B5EF4-FFF2-40B4-BE49-F238E27FC236}">
-                <a16:creationId xmlns:a16="http://schemas.microsoft.com/office/drawing/2014/main" id="{47449222-69D9-B53A-5901-0030F9358B39}"/>
+                <a16:creationId xmlns:a16="http://schemas.microsoft.com/office/drawing/2014/main" id="{F6106543-1A91-468C-8424-A17E5A12A182}"/>
               </a:ext>
             </a:extLst>
           </p:cNvPr>
-          <p:cNvSpPr/>
+          <p:cNvPicPr>
+            <a:picLocks noChangeAspect="1"/>
+          </p:cNvPicPr>
           <p:nvPr/>
-        </p:nvSpPr>
+        </p:nvPicPr>
+        <p:blipFill>
+          <a:blip r:embed="rId6">
+            <a:extLst>
+              <a:ext uri="{28A0092B-C50C-407E-A947-70E740481C1C}">
+                <a14:useLocalDpi xmlns:a14="http://schemas.microsoft.com/office/drawing/2010/main" val="0"/>
+              </a:ext>
+            </a:extLst>
+          </a:blip>
+          <a:stretch>
+            <a:fillRect/>
+          </a:stretch>
+        </p:blipFill>
         <p:spPr>
           <a:xfrm>
-            <a:off x="9535426" y="1610401"/>
-            <a:ext cx="1624402" cy="1337393"/>
+            <a:off x="7140881" y="1179513"/>
+            <a:ext cx="2058478" cy="2058478"/>
           </a:xfrm>
-          <a:prstGeom prst="ellipse">
+          <a:prstGeom prst="rect">
             <a:avLst/>
           </a:prstGeom>
+          <a:ln>
+            <a:noFill/>
+          </a:ln>
         </p:spPr>
-        <p:style>
-          <a:lnRef idx="2">
-            <a:schemeClr val="accent1">
-              <a:shade val="15000"/>
-            </a:schemeClr>
-          </a:lnRef>
-          <a:fillRef idx="1">
-            <a:schemeClr val="accent1"/>
-          </a:fillRef>
-          <a:effectRef idx="0">
-            <a:schemeClr val="accent1"/>
-          </a:effectRef>
-          <a:fontRef idx="minor">
-            <a:schemeClr val="lt1"/>
-          </a:fontRef>
-        </p:style>
-        <p:txBody>
-          <a:bodyPr rtlCol="0" anchor="ctr"/>
-          <a:lstStyle/>
-          <a:p>
-            <a:pPr algn="ctr"/>
-            <a:r>
-              <a:rPr lang="ko-KR" altLang="en-US" sz="1200" dirty="0"/>
-              <a:t>다이스</a:t>
-            </a:r>
-            <a:endParaRPr lang="en-US" altLang="ko-KR" sz="1200" dirty="0"/>
-          </a:p>
-          <a:p>
-            <a:pPr algn="ctr"/>
-            <a:r>
-              <a:rPr lang="ko-KR" altLang="en-US" sz="1200" dirty="0"/>
-              <a:t>아이콘</a:t>
-            </a:r>
-          </a:p>
-        </p:txBody>
-      </p:sp>
+      </p:pic>
+      <p:graphicFrame>
+        <p:nvGraphicFramePr>
+          <p:cNvPr id="54" name="표 54">
+            <a:extLst>
+              <a:ext uri="{FF2B5EF4-FFF2-40B4-BE49-F238E27FC236}">
+                <a16:creationId xmlns:a16="http://schemas.microsoft.com/office/drawing/2014/main" id="{9A68D003-73CB-4385-BAF9-D165D1EE3B90}"/>
+              </a:ext>
+            </a:extLst>
+          </p:cNvPr>
+          <p:cNvGraphicFramePr>
+            <a:graphicFrameLocks noGrp="1"/>
+          </p:cNvGraphicFramePr>
+          <p:nvPr>
+            <p:extLst>
+              <p:ext uri="{D42A27DB-BD31-4B8C-83A1-F6EECF244321}">
+                <p14:modId xmlns:p14="http://schemas.microsoft.com/office/powerpoint/2010/main" val="1503659812"/>
+              </p:ext>
+            </p:extLst>
+          </p:nvPr>
+        </p:nvGraphicFramePr>
+        <p:xfrm>
+          <a:off x="919136" y="3081464"/>
+          <a:ext cx="10379488" cy="640080"/>
+        </p:xfrm>
+        <a:graphic>
+          <a:graphicData uri="http://schemas.openxmlformats.org/drawingml/2006/table">
+            <a:tbl>
+              <a:tblPr firstRow="1" bandRow="1">
+                <a:tableStyleId>{5C22544A-7EE6-4342-B048-85BDC9FD1C3A}</a:tableStyleId>
+              </a:tblPr>
+              <a:tblGrid>
+                <a:gridCol w="2114868">
+                  <a:extLst>
+                    <a:ext uri="{9D8B030D-6E8A-4147-A177-3AD203B41FA5}">
+                      <a16:colId xmlns:a16="http://schemas.microsoft.com/office/drawing/2014/main" val="1380859310"/>
+                    </a:ext>
+                  </a:extLst>
+                </a:gridCol>
+                <a:gridCol w="2066155">
+                  <a:extLst>
+                    <a:ext uri="{9D8B030D-6E8A-4147-A177-3AD203B41FA5}">
+                      <a16:colId xmlns:a16="http://schemas.microsoft.com/office/drawing/2014/main" val="2948273911"/>
+                    </a:ext>
+                  </a:extLst>
+                </a:gridCol>
+                <a:gridCol w="2066155">
+                  <a:extLst>
+                    <a:ext uri="{9D8B030D-6E8A-4147-A177-3AD203B41FA5}">
+                      <a16:colId xmlns:a16="http://schemas.microsoft.com/office/drawing/2014/main" val="2713385047"/>
+                    </a:ext>
+                  </a:extLst>
+                </a:gridCol>
+                <a:gridCol w="2066155">
+                  <a:extLst>
+                    <a:ext uri="{9D8B030D-6E8A-4147-A177-3AD203B41FA5}">
+                      <a16:colId xmlns:a16="http://schemas.microsoft.com/office/drawing/2014/main" val="1866376904"/>
+                    </a:ext>
+                  </a:extLst>
+                </a:gridCol>
+                <a:gridCol w="2066155">
+                  <a:extLst>
+                    <a:ext uri="{9D8B030D-6E8A-4147-A177-3AD203B41FA5}">
+                      <a16:colId xmlns:a16="http://schemas.microsoft.com/office/drawing/2014/main" val="849572228"/>
+                    </a:ext>
+                  </a:extLst>
+                </a:gridCol>
+              </a:tblGrid>
+              <a:tr h="0">
+                <a:tc>
+                  <a:txBody>
+                    <a:bodyPr/>
+                    <a:lstStyle/>
+                    <a:p>
+                      <a:pPr algn="ctr"/>
+                      <a:r>
+                        <a:rPr lang="ko-KR" altLang="en-US" sz="1600" b="1" kern="1200" dirty="0">
+                          <a:solidFill>
+                            <a:schemeClr val="lt1"/>
+                          </a:solidFill>
+                          <a:latin typeface="+mj-ea"/>
+                          <a:ea typeface="+mn-ea"/>
+                          <a:cs typeface="+mn-cs"/>
+                        </a:rPr>
+                        <a:t>코인 다이스</a:t>
+                      </a:r>
+                      <a:endParaRPr lang="en-US" altLang="ko-KR" sz="1600" b="1" kern="1200" dirty="0">
+                        <a:solidFill>
+                          <a:schemeClr val="lt1"/>
+                        </a:solidFill>
+                        <a:latin typeface="+mj-ea"/>
+                        <a:ea typeface="+mn-ea"/>
+                        <a:cs typeface="+mn-cs"/>
+                      </a:endParaRPr>
+                    </a:p>
+                  </a:txBody>
+                  <a:tcPr>
+                    <a:lnL w="12700" cmpd="sng">
+                      <a:noFill/>
+                    </a:lnL>
+                    <a:lnR w="12700" cmpd="sng">
+                      <a:noFill/>
+                    </a:lnR>
+                    <a:lnT w="12700" cmpd="sng">
+                      <a:noFill/>
+                    </a:lnT>
+                    <a:lnB w="38100" cmpd="sng">
+                      <a:noFill/>
+                    </a:lnB>
+                    <a:lnTlToBr w="12700" cmpd="sng">
+                      <a:noFill/>
+                      <a:prstDash val="solid"/>
+                    </a:lnTlToBr>
+                    <a:lnBlToTr w="12700" cmpd="sng">
+                      <a:noFill/>
+                      <a:prstDash val="solid"/>
+                    </a:lnBlToTr>
+                    <a:noFill/>
+                  </a:tcPr>
+                </a:tc>
+                <a:tc>
+                  <a:txBody>
+                    <a:bodyPr/>
+                    <a:lstStyle/>
+                    <a:p>
+                      <a:pPr algn="ctr"/>
+                      <a:r>
+                        <a:rPr lang="ko-KR" altLang="en-US" sz="1600" b="1" kern="1200" dirty="0">
+                          <a:solidFill>
+                            <a:schemeClr val="lt1"/>
+                          </a:solidFill>
+                          <a:latin typeface="+mj-ea"/>
+                          <a:ea typeface="+mn-ea"/>
+                          <a:cs typeface="+mn-cs"/>
+                        </a:rPr>
+                        <a:t>삼면 다이스</a:t>
+                      </a:r>
+                      <a:endParaRPr lang="en-US" altLang="ko-KR" sz="1600" b="1" kern="1200" dirty="0">
+                        <a:solidFill>
+                          <a:schemeClr val="lt1"/>
+                        </a:solidFill>
+                        <a:latin typeface="+mj-ea"/>
+                        <a:ea typeface="+mn-ea"/>
+                        <a:cs typeface="+mn-cs"/>
+                      </a:endParaRPr>
+                    </a:p>
+                  </a:txBody>
+                  <a:tcPr>
+                    <a:lnL w="12700" cmpd="sng">
+                      <a:noFill/>
+                    </a:lnL>
+                    <a:lnR w="12700" cmpd="sng">
+                      <a:noFill/>
+                    </a:lnR>
+                    <a:lnT w="12700" cmpd="sng">
+                      <a:noFill/>
+                    </a:lnT>
+                    <a:lnB w="38100" cmpd="sng">
+                      <a:noFill/>
+                    </a:lnB>
+                    <a:lnTlToBr w="12700" cmpd="sng">
+                      <a:noFill/>
+                      <a:prstDash val="solid"/>
+                    </a:lnTlToBr>
+                    <a:lnBlToTr w="12700" cmpd="sng">
+                      <a:noFill/>
+                      <a:prstDash val="solid"/>
+                    </a:lnBlToTr>
+                    <a:noFill/>
+                  </a:tcPr>
+                </a:tc>
+                <a:tc>
+                  <a:txBody>
+                    <a:bodyPr/>
+                    <a:lstStyle/>
+                    <a:p>
+                      <a:pPr algn="ctr"/>
+                      <a:r>
+                        <a:rPr lang="ko-KR" altLang="en-US" sz="1600" b="1" kern="1200" dirty="0">
+                          <a:solidFill>
+                            <a:schemeClr val="lt1"/>
+                          </a:solidFill>
+                          <a:latin typeface="+mj-ea"/>
+                          <a:ea typeface="+mn-ea"/>
+                          <a:cs typeface="+mn-cs"/>
+                        </a:rPr>
+                        <a:t>사면 다이스</a:t>
+                      </a:r>
+                      <a:endParaRPr lang="en-US" altLang="ko-KR" sz="1600" b="1" kern="1200" dirty="0">
+                        <a:solidFill>
+                          <a:schemeClr val="lt1"/>
+                        </a:solidFill>
+                        <a:latin typeface="+mj-ea"/>
+                        <a:ea typeface="+mn-ea"/>
+                        <a:cs typeface="+mn-cs"/>
+                      </a:endParaRPr>
+                    </a:p>
+                  </a:txBody>
+                  <a:tcPr>
+                    <a:lnL w="12700" cmpd="sng">
+                      <a:noFill/>
+                    </a:lnL>
+                    <a:lnR w="12700" cmpd="sng">
+                      <a:noFill/>
+                    </a:lnR>
+                    <a:lnT w="12700" cmpd="sng">
+                      <a:noFill/>
+                    </a:lnT>
+                    <a:lnB w="38100" cmpd="sng">
+                      <a:noFill/>
+                    </a:lnB>
+                    <a:lnTlToBr w="12700" cmpd="sng">
+                      <a:noFill/>
+                      <a:prstDash val="solid"/>
+                    </a:lnTlToBr>
+                    <a:lnBlToTr w="12700" cmpd="sng">
+                      <a:noFill/>
+                      <a:prstDash val="solid"/>
+                    </a:lnBlToTr>
+                    <a:noFill/>
+                  </a:tcPr>
+                </a:tc>
+                <a:tc>
+                  <a:txBody>
+                    <a:bodyPr/>
+                    <a:lstStyle/>
+                    <a:p>
+                      <a:pPr algn="ctr"/>
+                      <a:r>
+                        <a:rPr lang="ko-KR" altLang="en-US" sz="1600" b="1" kern="1200" dirty="0" err="1">
+                          <a:solidFill>
+                            <a:schemeClr val="lt1"/>
+                          </a:solidFill>
+                          <a:latin typeface="+mj-ea"/>
+                          <a:ea typeface="+mn-ea"/>
+                          <a:cs typeface="+mn-cs"/>
+                        </a:rPr>
+                        <a:t>육면</a:t>
+                      </a:r>
+                      <a:r>
+                        <a:rPr lang="ko-KR" altLang="en-US" sz="1600" b="1" kern="1200" dirty="0">
+                          <a:solidFill>
+                            <a:schemeClr val="lt1"/>
+                          </a:solidFill>
+                          <a:latin typeface="+mj-ea"/>
+                          <a:ea typeface="+mn-ea"/>
+                          <a:cs typeface="+mn-cs"/>
+                        </a:rPr>
+                        <a:t> 다이스</a:t>
+                      </a:r>
+                      <a:endParaRPr lang="en-US" altLang="ko-KR" sz="1600" b="1" kern="1200" dirty="0">
+                        <a:solidFill>
+                          <a:schemeClr val="lt1"/>
+                        </a:solidFill>
+                        <a:latin typeface="+mj-ea"/>
+                        <a:ea typeface="+mn-ea"/>
+                        <a:cs typeface="+mn-cs"/>
+                      </a:endParaRPr>
+                    </a:p>
+                  </a:txBody>
+                  <a:tcPr>
+                    <a:lnL w="12700" cmpd="sng">
+                      <a:noFill/>
+                    </a:lnL>
+                    <a:lnR w="12700" cmpd="sng">
+                      <a:noFill/>
+                    </a:lnR>
+                    <a:lnT w="12700" cmpd="sng">
+                      <a:noFill/>
+                    </a:lnT>
+                    <a:lnB w="38100" cmpd="sng">
+                      <a:noFill/>
+                    </a:lnB>
+                    <a:lnTlToBr w="12700" cmpd="sng">
+                      <a:noFill/>
+                      <a:prstDash val="solid"/>
+                    </a:lnTlToBr>
+                    <a:lnBlToTr w="12700" cmpd="sng">
+                      <a:noFill/>
+                      <a:prstDash val="solid"/>
+                    </a:lnBlToTr>
+                    <a:noFill/>
+                  </a:tcPr>
+                </a:tc>
+                <a:tc>
+                  <a:txBody>
+                    <a:bodyPr/>
+                    <a:lstStyle/>
+                    <a:p>
+                      <a:pPr algn="ctr"/>
+                      <a:r>
+                        <a:rPr lang="ko-KR" altLang="en-US" sz="1600" b="1" kern="1200" dirty="0">
+                          <a:solidFill>
+                            <a:schemeClr val="lt1"/>
+                          </a:solidFill>
+                          <a:latin typeface="+mj-ea"/>
+                          <a:ea typeface="+mn-ea"/>
+                          <a:cs typeface="+mn-cs"/>
+                        </a:rPr>
+                        <a:t>십이면 다이스</a:t>
+                      </a:r>
+                      <a:endParaRPr lang="en-US" altLang="ko-KR" sz="1600" b="1" kern="1200" dirty="0">
+                        <a:solidFill>
+                          <a:schemeClr val="lt1"/>
+                        </a:solidFill>
+                        <a:latin typeface="+mj-ea"/>
+                        <a:ea typeface="+mn-ea"/>
+                        <a:cs typeface="+mn-cs"/>
+                      </a:endParaRPr>
+                    </a:p>
+                  </a:txBody>
+                  <a:tcPr>
+                    <a:lnL w="12700" cmpd="sng">
+                      <a:noFill/>
+                    </a:lnL>
+                    <a:lnR w="12700" cmpd="sng">
+                      <a:noFill/>
+                    </a:lnR>
+                    <a:lnT w="12700" cmpd="sng">
+                      <a:noFill/>
+                    </a:lnT>
+                    <a:lnB w="38100" cmpd="sng">
+                      <a:noFill/>
+                    </a:lnB>
+                    <a:lnTlToBr w="12700" cmpd="sng">
+                      <a:noFill/>
+                      <a:prstDash val="solid"/>
+                    </a:lnTlToBr>
+                    <a:lnBlToTr w="12700" cmpd="sng">
+                      <a:noFill/>
+                      <a:prstDash val="solid"/>
+                    </a:lnBlToTr>
+                    <a:noFill/>
+                  </a:tcPr>
+                </a:tc>
+                <a:extLst>
+                  <a:ext uri="{0D108BD9-81ED-4DB2-BD59-A6C34878D82A}">
+                    <a16:rowId xmlns:a16="http://schemas.microsoft.com/office/drawing/2014/main" val="1524305664"/>
+                  </a:ext>
+                </a:extLst>
+              </a:tr>
+              <a:tr h="0">
+                <a:tc>
+                  <a:txBody>
+                    <a:bodyPr/>
+                    <a:lstStyle/>
+                    <a:p>
+                      <a:pPr marL="0" marR="0" lvl="0" indent="0" algn="ctr" defTabSz="457200" rtl="0" eaLnBrk="1" fontAlgn="auto" latinLnBrk="1" hangingPunct="1">
+                        <a:lnSpc>
+                          <a:spcPct val="100000"/>
+                        </a:lnSpc>
+                        <a:spcBef>
+                          <a:spcPts val="0"/>
+                        </a:spcBef>
+                        <a:spcAft>
+                          <a:spcPts val="0"/>
+                        </a:spcAft>
+                        <a:buClrTx/>
+                        <a:buSzTx/>
+                        <a:buFontTx/>
+                        <a:buNone/>
+                        <a:tabLst/>
+                        <a:defRPr/>
+                      </a:pPr>
+                      <a:r>
+                        <a:rPr lang="en-US" altLang="ko-KR" sz="1400" b="0" kern="1200" dirty="0">
+                          <a:solidFill>
+                            <a:schemeClr val="lt1"/>
+                          </a:solidFill>
+                          <a:latin typeface="+mj-ea"/>
+                          <a:ea typeface="+mn-ea"/>
+                          <a:cs typeface="+mn-cs"/>
+                        </a:rPr>
+                        <a:t>[2 × 6] </a:t>
+                      </a:r>
+                      <a:r>
+                        <a:rPr lang="ko-KR" altLang="en-US" sz="1400" b="0" kern="1200" dirty="0">
+                          <a:solidFill>
+                            <a:schemeClr val="lt1"/>
+                          </a:solidFill>
+                          <a:latin typeface="+mj-ea"/>
+                          <a:ea typeface="+mn-ea"/>
+                          <a:cs typeface="+mn-cs"/>
+                        </a:rPr>
+                        <a:t>범위 </a:t>
+                      </a:r>
+                      <a:r>
+                        <a:rPr lang="en-US" altLang="ko-KR" sz="1400" b="0" kern="1200" dirty="0">
+                          <a:solidFill>
+                            <a:schemeClr val="lt1"/>
+                          </a:solidFill>
+                          <a:latin typeface="+mj-ea"/>
+                          <a:ea typeface="+mn-ea"/>
+                          <a:cs typeface="+mn-cs"/>
+                        </a:rPr>
+                        <a:t>6 ~ 12</a:t>
+                      </a:r>
+                    </a:p>
+                  </a:txBody>
+                  <a:tcPr>
+                    <a:lnL w="12700" cmpd="sng">
+                      <a:noFill/>
+                    </a:lnL>
+                    <a:lnR w="12700" cmpd="sng">
+                      <a:noFill/>
+                    </a:lnR>
+                    <a:lnT w="38100" cmpd="sng">
+                      <a:noFill/>
+                    </a:lnT>
+                    <a:lnB w="12700" cmpd="sng">
+                      <a:noFill/>
+                    </a:lnB>
+                    <a:lnTlToBr w="12700" cmpd="sng">
+                      <a:noFill/>
+                      <a:prstDash val="solid"/>
+                    </a:lnTlToBr>
+                    <a:lnBlToTr w="12700" cmpd="sng">
+                      <a:noFill/>
+                      <a:prstDash val="solid"/>
+                    </a:lnBlToTr>
+                    <a:noFill/>
+                  </a:tcPr>
+                </a:tc>
+                <a:tc>
+                  <a:txBody>
+                    <a:bodyPr/>
+                    <a:lstStyle/>
+                    <a:p>
+                      <a:pPr marL="0" marR="0" lvl="0" indent="0" algn="ctr" defTabSz="457200" rtl="0" eaLnBrk="1" fontAlgn="auto" latinLnBrk="1" hangingPunct="1">
+                        <a:lnSpc>
+                          <a:spcPct val="100000"/>
+                        </a:lnSpc>
+                        <a:spcBef>
+                          <a:spcPts val="0"/>
+                        </a:spcBef>
+                        <a:spcAft>
+                          <a:spcPts val="0"/>
+                        </a:spcAft>
+                        <a:buClrTx/>
+                        <a:buSzTx/>
+                        <a:buFontTx/>
+                        <a:buNone/>
+                        <a:tabLst/>
+                        <a:defRPr/>
+                      </a:pPr>
+                      <a:r>
+                        <a:rPr lang="en-US" altLang="ko-KR" sz="1400" b="0" kern="1200" dirty="0">
+                          <a:solidFill>
+                            <a:schemeClr val="lt1"/>
+                          </a:solidFill>
+                          <a:latin typeface="+mj-ea"/>
+                          <a:ea typeface="+mn-ea"/>
+                          <a:cs typeface="+mn-cs"/>
+                        </a:rPr>
+                        <a:t>[3 × 4] </a:t>
+                      </a:r>
+                      <a:r>
+                        <a:rPr lang="ko-KR" altLang="en-US" sz="1400" b="0" kern="1200" dirty="0">
+                          <a:solidFill>
+                            <a:schemeClr val="lt1"/>
+                          </a:solidFill>
+                          <a:latin typeface="+mj-ea"/>
+                          <a:ea typeface="+mn-ea"/>
+                          <a:cs typeface="+mn-cs"/>
+                        </a:rPr>
+                        <a:t>범위 </a:t>
+                      </a:r>
+                      <a:r>
+                        <a:rPr lang="en-US" altLang="ko-KR" sz="1400" b="0" kern="1200" dirty="0">
+                          <a:solidFill>
+                            <a:schemeClr val="lt1"/>
+                          </a:solidFill>
+                          <a:latin typeface="+mj-ea"/>
+                          <a:ea typeface="+mn-ea"/>
+                          <a:cs typeface="+mn-cs"/>
+                        </a:rPr>
+                        <a:t>4 ~ 12</a:t>
+                      </a:r>
+                    </a:p>
+                  </a:txBody>
+                  <a:tcPr>
+                    <a:lnL w="12700" cmpd="sng">
+                      <a:noFill/>
+                    </a:lnL>
+                    <a:lnR w="12700" cmpd="sng">
+                      <a:noFill/>
+                    </a:lnR>
+                    <a:lnT w="38100" cmpd="sng">
+                      <a:noFill/>
+                    </a:lnT>
+                    <a:lnB w="12700" cmpd="sng">
+                      <a:noFill/>
+                    </a:lnB>
+                    <a:lnTlToBr w="12700" cmpd="sng">
+                      <a:noFill/>
+                      <a:prstDash val="solid"/>
+                    </a:lnTlToBr>
+                    <a:lnBlToTr w="12700" cmpd="sng">
+                      <a:noFill/>
+                      <a:prstDash val="solid"/>
+                    </a:lnBlToTr>
+                    <a:noFill/>
+                  </a:tcPr>
+                </a:tc>
+                <a:tc>
+                  <a:txBody>
+                    <a:bodyPr/>
+                    <a:lstStyle/>
+                    <a:p>
+                      <a:pPr marL="0" marR="0" lvl="0" indent="0" algn="ctr" defTabSz="457200" rtl="0" eaLnBrk="1" fontAlgn="auto" latinLnBrk="1" hangingPunct="1">
+                        <a:lnSpc>
+                          <a:spcPct val="100000"/>
+                        </a:lnSpc>
+                        <a:spcBef>
+                          <a:spcPts val="0"/>
+                        </a:spcBef>
+                        <a:spcAft>
+                          <a:spcPts val="0"/>
+                        </a:spcAft>
+                        <a:buClrTx/>
+                        <a:buSzTx/>
+                        <a:buFontTx/>
+                        <a:buNone/>
+                        <a:tabLst/>
+                        <a:defRPr/>
+                      </a:pPr>
+                      <a:r>
+                        <a:rPr lang="en-US" altLang="ko-KR" sz="1400" b="0" kern="1200" dirty="0">
+                          <a:solidFill>
+                            <a:schemeClr val="lt1"/>
+                          </a:solidFill>
+                          <a:latin typeface="+mj-ea"/>
+                          <a:ea typeface="+mn-ea"/>
+                          <a:cs typeface="+mn-cs"/>
+                        </a:rPr>
+                        <a:t>[4 × 3] </a:t>
+                      </a:r>
+                      <a:r>
+                        <a:rPr lang="ko-KR" altLang="en-US" sz="1400" b="0" kern="1200" dirty="0">
+                          <a:solidFill>
+                            <a:schemeClr val="lt1"/>
+                          </a:solidFill>
+                          <a:latin typeface="+mj-ea"/>
+                          <a:ea typeface="+mn-ea"/>
+                          <a:cs typeface="+mn-cs"/>
+                        </a:rPr>
+                        <a:t>범위 </a:t>
+                      </a:r>
+                      <a:r>
+                        <a:rPr lang="en-US" altLang="ko-KR" sz="1400" b="0" kern="1200" dirty="0">
+                          <a:solidFill>
+                            <a:schemeClr val="lt1"/>
+                          </a:solidFill>
+                          <a:latin typeface="+mj-ea"/>
+                          <a:ea typeface="+mn-ea"/>
+                          <a:cs typeface="+mn-cs"/>
+                        </a:rPr>
+                        <a:t>3 ~ 12</a:t>
+                      </a:r>
+                    </a:p>
+                  </a:txBody>
+                  <a:tcPr>
+                    <a:lnL w="12700" cmpd="sng">
+                      <a:noFill/>
+                    </a:lnL>
+                    <a:lnR w="12700" cmpd="sng">
+                      <a:noFill/>
+                    </a:lnR>
+                    <a:lnT w="38100" cmpd="sng">
+                      <a:noFill/>
+                    </a:lnT>
+                    <a:lnB w="12700" cmpd="sng">
+                      <a:noFill/>
+                    </a:lnB>
+                    <a:lnTlToBr w="12700" cmpd="sng">
+                      <a:noFill/>
+                      <a:prstDash val="solid"/>
+                    </a:lnTlToBr>
+                    <a:lnBlToTr w="12700" cmpd="sng">
+                      <a:noFill/>
+                      <a:prstDash val="solid"/>
+                    </a:lnBlToTr>
+                    <a:noFill/>
+                  </a:tcPr>
+                </a:tc>
+                <a:tc>
+                  <a:txBody>
+                    <a:bodyPr/>
+                    <a:lstStyle/>
+                    <a:p>
+                      <a:pPr marL="0" marR="0" lvl="0" indent="0" algn="ctr" defTabSz="457200" rtl="0" eaLnBrk="1" fontAlgn="auto" latinLnBrk="1" hangingPunct="1">
+                        <a:lnSpc>
+                          <a:spcPct val="100000"/>
+                        </a:lnSpc>
+                        <a:spcBef>
+                          <a:spcPts val="0"/>
+                        </a:spcBef>
+                        <a:spcAft>
+                          <a:spcPts val="0"/>
+                        </a:spcAft>
+                        <a:buClrTx/>
+                        <a:buSzTx/>
+                        <a:buFontTx/>
+                        <a:buNone/>
+                        <a:tabLst/>
+                        <a:defRPr/>
+                      </a:pPr>
+                      <a:r>
+                        <a:rPr lang="en-US" altLang="ko-KR" sz="1400" b="0" kern="1200" dirty="0">
+                          <a:solidFill>
+                            <a:schemeClr val="lt1"/>
+                          </a:solidFill>
+                          <a:latin typeface="+mj-ea"/>
+                          <a:ea typeface="+mn-ea"/>
+                          <a:cs typeface="+mn-cs"/>
+                        </a:rPr>
+                        <a:t>[6 × 2] </a:t>
+                      </a:r>
+                      <a:r>
+                        <a:rPr lang="ko-KR" altLang="en-US" sz="1400" b="0" kern="1200" dirty="0">
+                          <a:solidFill>
+                            <a:schemeClr val="lt1"/>
+                          </a:solidFill>
+                          <a:latin typeface="+mj-ea"/>
+                          <a:ea typeface="+mn-ea"/>
+                          <a:cs typeface="+mn-cs"/>
+                        </a:rPr>
+                        <a:t>범위 </a:t>
+                      </a:r>
+                      <a:r>
+                        <a:rPr lang="en-US" altLang="ko-KR" sz="1400" b="0" kern="1200" dirty="0">
+                          <a:solidFill>
+                            <a:schemeClr val="lt1"/>
+                          </a:solidFill>
+                          <a:latin typeface="+mj-ea"/>
+                          <a:ea typeface="+mn-ea"/>
+                          <a:cs typeface="+mn-cs"/>
+                        </a:rPr>
+                        <a:t>2 ~ 12</a:t>
+                      </a:r>
+                    </a:p>
+                  </a:txBody>
+                  <a:tcPr>
+                    <a:lnL w="12700" cmpd="sng">
+                      <a:noFill/>
+                    </a:lnL>
+                    <a:lnR w="12700" cmpd="sng">
+                      <a:noFill/>
+                    </a:lnR>
+                    <a:lnT w="38100" cmpd="sng">
+                      <a:noFill/>
+                    </a:lnT>
+                    <a:lnB w="12700" cmpd="sng">
+                      <a:noFill/>
+                    </a:lnB>
+                    <a:lnTlToBr w="12700" cmpd="sng">
+                      <a:noFill/>
+                      <a:prstDash val="solid"/>
+                    </a:lnTlToBr>
+                    <a:lnBlToTr w="12700" cmpd="sng">
+                      <a:noFill/>
+                      <a:prstDash val="solid"/>
+                    </a:lnBlToTr>
+                    <a:noFill/>
+                  </a:tcPr>
+                </a:tc>
+                <a:tc>
+                  <a:txBody>
+                    <a:bodyPr/>
+                    <a:lstStyle/>
+                    <a:p>
+                      <a:pPr marL="0" marR="0" lvl="0" indent="0" algn="ctr" defTabSz="457200" rtl="0" eaLnBrk="1" fontAlgn="auto" latinLnBrk="1" hangingPunct="1">
+                        <a:lnSpc>
+                          <a:spcPct val="100000"/>
+                        </a:lnSpc>
+                        <a:spcBef>
+                          <a:spcPts val="0"/>
+                        </a:spcBef>
+                        <a:spcAft>
+                          <a:spcPts val="0"/>
+                        </a:spcAft>
+                        <a:buClrTx/>
+                        <a:buSzTx/>
+                        <a:buFontTx/>
+                        <a:buNone/>
+                        <a:tabLst/>
+                        <a:defRPr/>
+                      </a:pPr>
+                      <a:r>
+                        <a:rPr lang="en-US" altLang="ko-KR" sz="1400" b="0" kern="1200" dirty="0">
+                          <a:solidFill>
+                            <a:schemeClr val="lt1"/>
+                          </a:solidFill>
+                          <a:latin typeface="+mj-ea"/>
+                          <a:ea typeface="+mn-ea"/>
+                          <a:cs typeface="+mn-cs"/>
+                        </a:rPr>
+                        <a:t>[12 × 1] </a:t>
+                      </a:r>
+                      <a:r>
+                        <a:rPr lang="ko-KR" altLang="en-US" sz="1400" b="0" kern="1200" dirty="0">
+                          <a:solidFill>
+                            <a:schemeClr val="lt1"/>
+                          </a:solidFill>
+                          <a:latin typeface="+mj-ea"/>
+                          <a:ea typeface="+mn-ea"/>
+                          <a:cs typeface="+mn-cs"/>
+                        </a:rPr>
+                        <a:t>범위 </a:t>
+                      </a:r>
+                      <a:r>
+                        <a:rPr lang="en-US" altLang="ko-KR" sz="1400" b="0" kern="1200" dirty="0">
+                          <a:solidFill>
+                            <a:schemeClr val="lt1"/>
+                          </a:solidFill>
+                          <a:latin typeface="+mj-ea"/>
+                          <a:ea typeface="+mn-ea"/>
+                          <a:cs typeface="+mn-cs"/>
+                        </a:rPr>
+                        <a:t>1 ~ 12</a:t>
+                      </a:r>
+                    </a:p>
+                  </a:txBody>
+                  <a:tcPr>
+                    <a:lnL w="12700" cmpd="sng">
+                      <a:noFill/>
+                    </a:lnL>
+                    <a:lnR w="12700" cmpd="sng">
+                      <a:noFill/>
+                    </a:lnR>
+                    <a:lnT w="38100" cmpd="sng">
+                      <a:noFill/>
+                    </a:lnT>
+                    <a:lnB w="12700" cmpd="sng">
+                      <a:noFill/>
+                    </a:lnB>
+                    <a:lnTlToBr w="12700" cmpd="sng">
+                      <a:noFill/>
+                      <a:prstDash val="solid"/>
+                    </a:lnTlToBr>
+                    <a:lnBlToTr w="12700" cmpd="sng">
+                      <a:noFill/>
+                      <a:prstDash val="solid"/>
+                    </a:lnBlToTr>
+                    <a:noFill/>
+                  </a:tcPr>
+                </a:tc>
+                <a:extLst>
+                  <a:ext uri="{0D108BD9-81ED-4DB2-BD59-A6C34878D82A}">
+                    <a16:rowId xmlns:a16="http://schemas.microsoft.com/office/drawing/2014/main" val="1935861288"/>
+                  </a:ext>
+                </a:extLst>
+              </a:tr>
+            </a:tbl>
+          </a:graphicData>
+        </a:graphic>
+      </p:graphicFrame>
     </p:spTree>
     <p:extLst>
       <p:ext uri="{BB962C8B-B14F-4D97-AF65-F5344CB8AC3E}">

--- a/기획/SRPG/Srpg 기획서.pptx
+++ b/기획/SRPG/Srpg 기획서.pptx
@@ -264,7 +264,7 @@
           <a:p>
             <a:fld id="{4E9214C1-2863-45BA-A7C5-D5EA3C3D4C30}" type="datetimeFigureOut">
               <a:rPr lang="ko-KR" altLang="en-US" smtClean="0"/>
-              <a:t>2026-04-14</a:t>
+              <a:t>2026-04-15</a:t>
             </a:fld>
             <a:endParaRPr lang="ko-KR" altLang="en-US"/>
           </a:p>
@@ -429,7 +429,7 @@
           <a:p>
             <a:fld id="{8F563C85-90F6-445D-9B5B-8ABB00FB3043}" type="datetimeFigureOut">
               <a:rPr lang="ko-KR" altLang="en-US" smtClean="0"/>
-              <a:t>2026-04-14</a:t>
+              <a:t>2026-04-15</a:t>
             </a:fld>
             <a:endParaRPr lang="ko-KR" altLang="en-US"/>
           </a:p>
@@ -976,7 +976,7 @@
             </a:pPr>
             <a:fld id="{B9320F77-B9A0-41C5-862A-B4B631284C64}" type="datetime1">
               <a:rPr lang="en-GB" altLang="en-US" smtClean="0"/>
-              <a:t>14/04/2026</a:t>
+              <a:t>15/04/2026</a:t>
             </a:fld>
             <a:endParaRPr lang="ko-KR" altLang="en-US"/>
           </a:p>
@@ -1335,7 +1335,7 @@
             </a:pPr>
             <a:fld id="{B9320F77-B9A0-41C5-862A-B4B631284C64}" type="datetime1">
               <a:rPr lang="en-GB" altLang="en-US" smtClean="0"/>
-              <a:t>14/04/2026</a:t>
+              <a:t>15/04/2026</a:t>
             </a:fld>
             <a:endParaRPr lang="ko-KR" altLang="en-US"/>
           </a:p>
@@ -1531,7 +1531,7 @@
             </a:pPr>
             <a:fld id="{B9320F77-B9A0-41C5-862A-B4B631284C64}" type="datetime1">
               <a:rPr lang="en-GB" altLang="en-US" smtClean="0"/>
-              <a:t>14/04/2026</a:t>
+              <a:t>15/04/2026</a:t>
             </a:fld>
             <a:endParaRPr lang="ko-KR" altLang="en-US"/>
           </a:p>
@@ -1796,7 +1796,7 @@
             </a:pPr>
             <a:fld id="{B9320F77-B9A0-41C5-862A-B4B631284C64}" type="datetime1">
               <a:rPr lang="en-GB" altLang="en-US" smtClean="0"/>
-              <a:t>14/04/2026</a:t>
+              <a:t>15/04/2026</a:t>
             </a:fld>
             <a:endParaRPr lang="ko-KR" altLang="en-US"/>
           </a:p>
@@ -2224,7 +2224,7 @@
             </a:pPr>
             <a:fld id="{B9320F77-B9A0-41C5-862A-B4B631284C64}" type="datetime1">
               <a:rPr lang="en-GB" altLang="en-US" smtClean="0"/>
-              <a:t>14/04/2026</a:t>
+              <a:t>15/04/2026</a:t>
             </a:fld>
             <a:endParaRPr lang="ko-KR" altLang="en-US"/>
           </a:p>
@@ -2765,7 +2765,7 @@
             </a:pPr>
             <a:fld id="{B9320F77-B9A0-41C5-862A-B4B631284C64}" type="datetime1">
               <a:rPr lang="en-GB" altLang="en-US" smtClean="0"/>
-              <a:t>14/04/2026</a:t>
+              <a:t>15/04/2026</a:t>
             </a:fld>
             <a:endParaRPr lang="ko-KR" altLang="en-US"/>
           </a:p>
@@ -3633,7 +3633,7 @@
             </a:pPr>
             <a:fld id="{B9320F77-B9A0-41C5-862A-B4B631284C64}" type="datetime1">
               <a:rPr lang="en-GB" altLang="en-US" smtClean="0"/>
-              <a:t>14/04/2026</a:t>
+              <a:t>15/04/2026</a:t>
             </a:fld>
             <a:endParaRPr lang="ko-KR" altLang="en-US"/>
           </a:p>
@@ -3807,7 +3807,7 @@
             </a:pPr>
             <a:fld id="{B9320F77-B9A0-41C5-862A-B4B631284C64}" type="datetime1">
               <a:rPr lang="en-GB" altLang="en-US" smtClean="0"/>
-              <a:t>14/04/2026</a:t>
+              <a:t>15/04/2026</a:t>
             </a:fld>
             <a:endParaRPr lang="ko-KR" altLang="en-US"/>
           </a:p>
@@ -3996,7 +3996,7 @@
             </a:pPr>
             <a:fld id="{B9320F77-B9A0-41C5-862A-B4B631284C64}" type="datetime1">
               <a:rPr lang="en-GB" altLang="en-US" smtClean="0"/>
-              <a:t>14/04/2026</a:t>
+              <a:t>15/04/2026</a:t>
             </a:fld>
             <a:endParaRPr lang="ko-KR" altLang="en-US"/>
           </a:p>
@@ -4171,7 +4171,7 @@
             </a:pPr>
             <a:fld id="{B9320F77-B9A0-41C5-862A-B4B631284C64}" type="datetime1">
               <a:rPr lang="en-GB" altLang="en-US" smtClean="0"/>
-              <a:t>14/04/2026</a:t>
+              <a:t>15/04/2026</a:t>
             </a:fld>
             <a:endParaRPr lang="ko-KR" altLang="en-US"/>
           </a:p>
@@ -4419,7 +4419,7 @@
             </a:pPr>
             <a:fld id="{B9320F77-B9A0-41C5-862A-B4B631284C64}" type="datetime1">
               <a:rPr lang="en-GB" altLang="en-US" smtClean="0"/>
-              <a:t>14/04/2026</a:t>
+              <a:t>15/04/2026</a:t>
             </a:fld>
             <a:endParaRPr lang="ko-KR" altLang="en-US"/>
           </a:p>
@@ -4660,7 +4660,7 @@
             </a:pPr>
             <a:fld id="{B9320F77-B9A0-41C5-862A-B4B631284C64}" type="datetime1">
               <a:rPr lang="en-GB" altLang="en-US" smtClean="0"/>
-              <a:t>14/04/2026</a:t>
+              <a:t>15/04/2026</a:t>
             </a:fld>
             <a:endParaRPr lang="ko-KR" altLang="en-US"/>
           </a:p>
@@ -5131,7 +5131,7 @@
             </a:pPr>
             <a:fld id="{B9320F77-B9A0-41C5-862A-B4B631284C64}" type="datetime1">
               <a:rPr lang="en-GB" altLang="en-US" smtClean="0"/>
-              <a:t>14/04/2026</a:t>
+              <a:t>15/04/2026</a:t>
             </a:fld>
             <a:endParaRPr lang="ko-KR" altLang="en-US"/>
           </a:p>
@@ -5254,7 +5254,7 @@
             </a:pPr>
             <a:fld id="{B9320F77-B9A0-41C5-862A-B4B631284C64}" type="datetime1">
               <a:rPr lang="en-GB" altLang="en-US" smtClean="0"/>
-              <a:t>14/04/2026</a:t>
+              <a:t>15/04/2026</a:t>
             </a:fld>
             <a:endParaRPr lang="ko-KR" altLang="en-US"/>
           </a:p>
@@ -5354,7 +5354,7 @@
             </a:pPr>
             <a:fld id="{B9320F77-B9A0-41C5-862A-B4B631284C64}" type="datetime1">
               <a:rPr lang="en-GB" altLang="en-US" smtClean="0"/>
-              <a:t>14/04/2026</a:t>
+              <a:t>15/04/2026</a:t>
             </a:fld>
             <a:endParaRPr lang="ko-KR" altLang="en-US"/>
           </a:p>
@@ -5614,7 +5614,7 @@
             </a:pPr>
             <a:fld id="{B9320F77-B9A0-41C5-862A-B4B631284C64}" type="datetime1">
               <a:rPr lang="en-GB" altLang="en-US" smtClean="0"/>
-              <a:t>14/04/2026</a:t>
+              <a:t>15/04/2026</a:t>
             </a:fld>
             <a:endParaRPr lang="ko-KR" altLang="en-US"/>
           </a:p>
@@ -5919,7 +5919,7 @@
             </a:pPr>
             <a:fld id="{B9320F77-B9A0-41C5-862A-B4B631284C64}" type="datetime1">
               <a:rPr lang="en-GB" altLang="en-US" smtClean="0"/>
-              <a:t>14/04/2026</a:t>
+              <a:t>15/04/2026</a:t>
             </a:fld>
             <a:endParaRPr lang="ko-KR" altLang="en-US"/>
           </a:p>
@@ -6158,7 +6158,7 @@
             </a:pPr>
             <a:fld id="{B9320F77-B9A0-41C5-862A-B4B631284C64}" type="datetime1">
               <a:rPr lang="en-GB" altLang="en-US" smtClean="0"/>
-              <a:t>14/04/2026</a:t>
+              <a:t>15/04/2026</a:t>
             </a:fld>
             <a:endParaRPr lang="ko-KR" altLang="en-US"/>
           </a:p>
